--- a/deliverables/chem-u02/SHULL_CHEM_Slides_U02_S02.2.pptx
+++ b/deliverables/chem-u02/SHULL_CHEM_Slides_U02_S02.2.pptx
@@ -26,9 +26,10 @@
     <p:sldId id="274" r:id="rId20"/>
     <p:sldId id="275" r:id="rId21"/>
     <p:sldId id="276" r:id="rId22"/>
+    <p:sldId id="277" r:id="rId23"/>
   </p:sldIdLst>
   <p:notesMasterIdLst>
-    <p:notesMasterId r:id="rId23"/>
+    <p:notesMasterId r:id="rId24"/>
   </p:notesMasterIdLst>
   <p:sldSz cx="12192000" cy="6858000"/>
   <p:notesSz cx="6858000" cy="12192000"/>
@@ -522,7 +523,7 @@
           <a:p>
             <a:r>
               <a:rPr lang="en-US" dirty="0"/>
-              <a:t/>
+              <a:t>Section opener. Pacing: 22 slides is the top of range for a 50-minute period. Cuttable if short: slides 14, 15 and 19 (energy order, 4s before 3d, period lengths). Image slot (empty): section: a long-exposure photograph of fireflies over a dark field.</a:t>
             </a:r>
             <a:endParaRPr lang="en-US" dirty="0"/>
           </a:p>
@@ -610,7 +611,7 @@
           <a:p>
             <a:r>
               <a:rPr lang="en-US" dirty="0"/>
-              <a:t/>
+              <a:t>Misconception: an orbital holds 2 electrons, not as many as its sublevel. Spin pairing is formalised in S2.3. Image slot (empty): aside: an open egg carton on a lab bench.</a:t>
             </a:r>
             <a:endParaRPr lang="en-US" dirty="0"/>
           </a:p>
@@ -698,7 +699,7 @@
           <a:p>
             <a:r>
               <a:rPr lang="en-US" dirty="0"/>
-              <a:t/>
+              <a:t>Do together. Students list sublevels first (3s, 3p, 3d), then count. Work area stays empty for the board. Image slot (empty): aside: a three-tier wooden shelf with small boxes.</a:t>
             </a:r>
             <a:endParaRPr lang="en-US" dirty="0"/>
           </a:p>
@@ -786,7 +787,7 @@
           <a:p>
             <a:r>
               <a:rPr lang="en-US" dirty="0"/>
-              <a:t/>
+              <a:t>Key: 3s 1 orbital 2 e-; 3p 3 orbitals 6 e-; 3d 5 orbitals 10 e-. Total 9 orbitals = n^2, 18 e- = 2n^2. Image slot (empty): data: pencil and graph paper with tally marks.</a:t>
             </a:r>
             <a:endParaRPr lang="en-US" dirty="0"/>
           </a:p>
@@ -874,7 +875,7 @@
           <a:p>
             <a:r>
               <a:rPr lang="en-US" dirty="0"/>
-              <a:t/>
+              <a:t>Pattern: orbitals n^2 (1, 4, 9, 16); electrons 2n^2 (2, 8, 18, 32).</a:t>
             </a:r>
             <a:endParaRPr lang="en-US" dirty="0"/>
           </a:p>
@@ -962,7 +963,7 @@
           <a:p>
             <a:r>
               <a:rPr lang="en-US" dirty="0"/>
-              <a:t/>
+              <a:t>Within one level, energy rises s &lt; p &lt; d &lt; f for atoms with more than one electron. Hydrogen is the exception: same-n sublevels are equal. Image slot (empty): concept: four wooden shelves of increasing height in a workshop.</a:t>
             </a:r>
             <a:endParaRPr lang="en-US" dirty="0"/>
           </a:p>
@@ -1050,7 +1051,7 @@
           <a:p>
             <a:r>
               <a:rPr lang="en-US" dirty="0"/>
-              <a:t/>
+              <a:t>PROVISIONAL wording: '4s fills before 3d' is stated as a neutral-atom filling order, not as a claim that 4s is lower in energy in every situation. Matt to confirm the wording. Previews S2.3. Cuttable. Label reads 'Order rule'.</a:t>
             </a:r>
             <a:endParaRPr lang="en-US" dirty="0"/>
           </a:p>
@@ -1138,7 +1139,7 @@
           <a:p>
             <a:r>
               <a:rPr lang="en-US" dirty="0"/>
-              <a:t/>
+              <a:t>Students try first. Work area stays empty. Image slot (empty): aside: a rack of seven small test tubes.</a:t>
             </a:r>
             <a:endParaRPr lang="en-US" dirty="0"/>
           </a:p>
@@ -1226,7 +1227,7 @@
           <a:p>
             <a:r>
               <a:rPr lang="en-US" dirty="0"/>
-              <a:t/>
+              <a:t>Key: 4f = 7 x 2 = 14 e-. n = 2: 2s 2 + 2p 6 = 8 e- = 2(2)^2. Image slot (empty): data: a handwritten tally on a lab notebook page.</a:t>
             </a:r>
             <a:endParaRPr lang="en-US" dirty="0"/>
           </a:p>
@@ -1314,7 +1315,7 @@
           <a:p>
             <a:r>
               <a:rPr lang="en-US" dirty="0"/>
-              <a:t/>
+              <a:t>PROVISIONAL: group 3 and f block drawing convention. The f block is drawn 14 wide below the table, detached, with a border; which elements sit in group 3 (La/Ac vs Lu/Lr) is not stated. Matt to confirm. Helium: 1s^2, sits in group 18, s-coloured.</a:t>
             </a:r>
             <a:endParaRPr lang="en-US" dirty="0"/>
           </a:p>
@@ -1402,7 +1403,7 @@
           <a:p>
             <a:r>
               <a:rPr lang="en-US" dirty="0"/>
-              <a:t/>
+              <a:t>Periods: 2, 8, 8, 18, 18, 32, 32 from the sublevels that fill in each. Cuttable. Image slot (empty): aside: a periodic table wall chart photographed at a shallow angle.</a:t>
             </a:r>
             <a:endParaRPr lang="en-US" dirty="0"/>
           </a:p>
@@ -1490,7 +1491,7 @@
           <a:p>
             <a:r>
               <a:rPr lang="en-US" dirty="0"/>
-              <a:t/>
+              <a:t>Learning targets, condensed from the four in the brief to three cards: targets 2 and 3 (names, orbitals, capacities) are merged. Matt to confirm the merge. Read aloud, do not linger. Image slot (empty): aside: a hand ticking a checklist on a clipboard.</a:t>
             </a:r>
             <a:endParaRPr lang="en-US" dirty="0"/>
           </a:p>
@@ -1578,7 +1579,7 @@
           <a:p>
             <a:r>
               <a:rPr lang="en-US" dirty="0"/>
-              <a:t/>
+              <a:t>Formative 1 to 3. Answers: (1) An orbit is a fixed path; an orbital is a region where the electron is probably found. (2) 2s and 2p. (3) 5 orbitals; 10 electrons. Image slot (empty): aside: a pencil resting on a blank notebook page.</a:t>
             </a:r>
             <a:endParaRPr lang="en-US" dirty="0"/>
           </a:p>
@@ -1666,7 +1667,7 @@
           <a:p>
             <a:r>
               <a:rPr lang="en-US" dirty="0"/>
-              <a:t/>
+              <a:t>Formative 4 and 5. Answers: (4) n = 3: 3s 2 + 3p 6 + 3d 10 = 18 electrons (2n^2 = 18). (5) n = 4: 1 + 3 + 5 + 7 = 16 orbitals (n^2 = 16). Collect or compare. Image slot (empty): concept: an empty desk with a calculator and a pencil.</a:t>
             </a:r>
             <a:endParaRPr lang="en-US" dirty="0"/>
           </a:p>
@@ -1690,6 +1691,94 @@
             <a:fld id="{F7021451-1387-4CA6-816F-3879F97B5CBC}" type="slidenum">
               <a:rPr lang="en-US"/>
               <a:t>21</a:t>
+            </a:fld>
+            <a:endParaRPr lang="en-US"/>
+          </a:p>
+        </p:txBody>
+      </p:sp>
+    </p:spTree>
+    <p:extLst>
+      <p:ext uri="{BB962C8B-B14F-4D97-AF65-F5344CB8AC3E}">
+        <p14:creationId xmlns:p14="http://schemas.microsoft.com/office/powerpoint/2010/main" val="1024086991"/>
+      </p:ext>
+    </p:extLst>
+  </p:cSld>
+  <p:clrMapOvr>
+    <a:masterClrMapping/>
+  </p:clrMapOvr>
+</p:notes>
+</file>
+
+<file path=ppt/notesSlides/notesSlide22.xml><?xml version="1.0" encoding="utf-8"?>
+<p:notes xmlns:a="http://schemas.openxmlformats.org/drawingml/2006/main" xmlns:r="http://schemas.openxmlformats.org/officeDocument/2006/relationships" xmlns:p="http://schemas.openxmlformats.org/presentationml/2006/main">
+  <p:cSld>
+    <p:spTree>
+      <p:nvGrpSpPr>
+        <p:cNvPr id="1" name=""/>
+        <p:cNvGrpSpPr/>
+        <p:nvPr/>
+      </p:nvGrpSpPr>
+      <p:grpSpPr>
+        <a:xfrm>
+          <a:off x="0" y="0"/>
+          <a:ext cx="0" cy="0"/>
+          <a:chOff x="0" y="0"/>
+          <a:chExt cx="0" cy="0"/>
+        </a:xfrm>
+      </p:grpSpPr>
+      <p:sp>
+        <p:nvSpPr>
+          <p:cNvPr id="2" name="Slide Image Placeholder 1"/>
+          <p:cNvSpPr>
+            <a:spLocks noGrp="1" noRot="1" noChangeAspect="1"/>
+          </p:cNvSpPr>
+          <p:nvPr>
+            <p:ph type="sldImg"/>
+          </p:nvPr>
+        </p:nvSpPr>
+        <p:spPr/>
+      </p:sp>
+      <p:sp>
+        <p:nvSpPr>
+          <p:cNvPr id="3" name="Notes Placeholder 2"/>
+          <p:cNvSpPr>
+            <a:spLocks noGrp="1"/>
+          </p:cNvSpPr>
+          <p:nvPr>
+            <p:ph type="body" idx="1"/>
+          </p:nvPr>
+        </p:nvSpPr>
+        <p:spPr/>
+        <p:txBody>
+          <a:bodyPr/>
+          <a:lstStyle/>
+          <a:p>
+            <a:r>
+              <a:rPr lang="en-US" dirty="0"/>
+              <a:t>Close. Next section S2.3 uses the filling order from slide 15. Image slot (empty): divider: a long laboratory bench receding into shadow.</a:t>
+            </a:r>
+            <a:endParaRPr lang="en-US" dirty="0"/>
+          </a:p>
+        </p:txBody>
+      </p:sp>
+      <p:sp>
+        <p:nvSpPr>
+          <p:cNvPr id="4" name="Slide Number Placeholder 3"/>
+          <p:cNvSpPr>
+            <a:spLocks noGrp="1"/>
+          </p:cNvSpPr>
+          <p:nvPr>
+            <p:ph type="sldNum" sz="quarter" idx="10"/>
+          </p:nvPr>
+        </p:nvSpPr>
+        <p:spPr/>
+        <p:txBody>
+          <a:bodyPr/>
+          <a:lstStyle/>
+          <a:p>
+            <a:fld id="{F7021451-1387-4CA6-816F-3879F97B5CBC}" type="slidenum">
+              <a:rPr lang="en-US"/>
+              <a:t>22</a:t>
             </a:fld>
             <a:endParaRPr lang="en-US"/>
           </a:p>
@@ -1754,7 +1843,7 @@
           <a:p>
             <a:r>
               <a:rPr lang="en-US" dirty="0"/>
-              <a:t/>
+              <a:t>Hook. Ask first, then reveal: Bohr failed for helium. Answer to take: the quantum-mechanical (electron cloud) model. Image slot (empty): concept: a chalkboard with a half-erased circular orbit diagram.</a:t>
             </a:r>
             <a:endParaRPr lang="en-US" dirty="0"/>
           </a:p>
@@ -1842,7 +1931,7 @@
           <a:p>
             <a:r>
               <a:rPr lang="en-US" dirty="0"/>
-              <a:t/>
+              <a:t>Three nested words. Students write the bar. Check that they say 'inside', not 'equal to'. Image slot (empty): aside: a set of nested wooden boxes, open, on a bench.</a:t>
             </a:r>
             <a:endParaRPr lang="en-US" dirty="0"/>
           </a:p>
@@ -1930,7 +2019,7 @@
           <a:p>
             <a:r>
               <a:rPr lang="en-US" dirty="0"/>
-              <a:t/>
+              <a:t>Name Heisenberg only; do not derive. Probability replaces paths. Image slot (empty): aside: a vintage chalkboard covered in wave equations.</a:t>
             </a:r>
             <a:endParaRPr lang="en-US" dirty="0"/>
           </a:p>
@@ -2018,7 +2107,7 @@
           <a:p>
             <a:r>
               <a:rPr lang="en-US" dirty="0"/>
-              <a:t/>
+              <a:t>Misconception to hit: electrons do not travel along the orbital outline. Image slot (empty): concept: a long-exposure photograph of a swarm of fireflies forming a glowing cloud.</a:t>
             </a:r>
             <a:endParaRPr lang="en-US" dirty="0"/>
           </a:p>
@@ -2106,7 +2195,7 @@
           <a:p>
             <a:r>
               <a:rPr lang="en-US" dirty="0"/>
-              <a:t/>
+              <a:t>Higher n: higher energy, larger average distance. Image slot (empty): concept: a stone staircase seen from the bottom step, lit from above.</a:t>
             </a:r>
             <a:endParaRPr lang="en-US" dirty="0"/>
           </a:p>
@@ -2194,7 +2283,7 @@
           <a:p>
             <a:r>
               <a:rPr lang="en-US" dirty="0"/>
-              <a:t/>
+              <a:t>Read the map bottom up. d starts at n = 3, f at n = 4; n = 1 has only s, n = 2 only s and p.</a:t>
             </a:r>
             <a:endParaRPr lang="en-US" dirty="0"/>
           </a:p>
@@ -2282,7 +2371,7 @@
           <a:p>
             <a:r>
               <a:rPr lang="en-US" dirty="0"/>
-              <a:t/>
+              <a:t>Shapes are probability regions, not paths. Slide shows one of the five d orbitals; the fifth d shape differs slightly (named, not drawn). f is names only.</a:t>
             </a:r>
             <a:endParaRPr lang="en-US" dirty="0"/>
           </a:p>
@@ -13283,7 +13372,7 @@
       </p:sp>
       <p:sp>
         <p:nvSpPr>
-          <p:cNvPr id="6" name="Text 3"/>
+          <p:cNvPr id="7" name="Text 3"/>
           <p:cNvSpPr txBox="1"/>
           <p:nvPr>
             <p:ph idx="103" hasCustomPrompt="1"/>
@@ -13347,7 +13436,7 @@
         <p:spPr>
           <a:xfrm>
             <a:off x="685800" y="932688"/>
-            <a:ext cx="7863840" cy="868680"/>
+            <a:ext cx="7360920" cy="868680"/>
           </a:xfrm>
           <a:prstGeom prst="rect">
             <a:avLst/>
@@ -13371,7 +13460,7 @@
                 <a:ea typeface="Trade Gothic Next" pitchFamily="34" charset="-122"/>
                 <a:cs typeface="Trade Gothic Next" pitchFamily="34" charset="-120"/>
               </a:rPr>
-              <a:t>Example: The n = 3 Level</a:t>
+              <a:t>How Many Electrons Fit</a:t>
             </a:r>
             <a:endParaRPr lang="en-US" sz="2800" dirty="0"/>
           </a:p>
@@ -13388,7 +13477,7 @@
         <p:spPr>
           <a:xfrm>
             <a:off x="685800" y="1847088"/>
-            <a:ext cx="7863840" cy="384048"/>
+            <a:ext cx="7360920" cy="384048"/>
           </a:xfrm>
           <a:prstGeom prst="rect">
             <a:avLst/>
@@ -13412,7 +13501,7 @@
                 <a:ea typeface="Trade Gothic Next" pitchFamily="34" charset="-122"/>
                 <a:cs typeface="Trade Gothic Next" pitchFamily="34" charset="-120"/>
               </a:rPr>
-              <a:t>We do this one together. List first, then count.</a:t>
+              <a:t>Orbitals are the unit. Count orbitals, then double.</a:t>
             </a:r>
             <a:endParaRPr lang="en-US" sz="1700" dirty="0"/>
           </a:p>
@@ -13420,7 +13509,48 @@
       </p:sp>
       <p:sp>
         <p:nvSpPr>
-          <p:cNvPr id="4" name="Text 6"/>
+          <p:cNvPr id="4" name="Text 5"/>
+          <p:cNvSpPr txBox="1"/>
+          <p:nvPr>
+            <p:ph idx="109" type="body" hasCustomPrompt="1"/>
+          </p:nvPr>
+        </p:nvSpPr>
+        <p:spPr>
+          <a:xfrm>
+            <a:off x="886968" y="2953512"/>
+            <a:ext cx="2999232" cy="219456"/>
+          </a:xfrm>
+          <a:prstGeom prst="rect">
+            <a:avLst/>
+          </a:prstGeom>
+          <a:noFill/>
+          <a:ln/>
+        </p:spPr>
+        <p:txBody>
+          <a:bodyPr wrap="square" lIns="0" tIns="0" rIns="0" bIns="0" rtlCol="0"/>
+          <a:lstStyle/>
+          <a:p>
+            <a:pPr indent="0" marL="0">
+              <a:buNone/>
+            </a:pPr>
+            <a:r>
+              <a:rPr lang="en-US" sz="1200" b="1" spc="120" kern="0" dirty="0">
+                <a:solidFill>
+                  <a:srgbClr val="2E3338"/>
+                </a:solidFill>
+                <a:latin typeface="Trade Gothic Next" pitchFamily="34" charset="0"/>
+                <a:ea typeface="Trade Gothic Next" pitchFamily="34" charset="-122"/>
+                <a:cs typeface="Trade Gothic Next" pitchFamily="34" charset="-120"/>
+              </a:rPr>
+              <a:t>ONE ORBITAL</a:t>
+            </a:r>
+            <a:endParaRPr lang="en-US" sz="1200" dirty="0"/>
+          </a:p>
+        </p:txBody>
+      </p:sp>
+      <p:sp>
+        <p:nvSpPr>
+          <p:cNvPr id="5" name="Text 5"/>
           <p:cNvSpPr txBox="1"/>
           <p:nvPr>
             <p:ph idx="110" type="body" hasCustomPrompt="1"/>
@@ -13428,8 +13558,8 @@
         </p:nvSpPr>
         <p:spPr>
           <a:xfrm>
-            <a:off x="886968" y="2798064"/>
-            <a:ext cx="4992624" cy="548640"/>
+            <a:off x="886968" y="3246120"/>
+            <a:ext cx="2999232" cy="1673352"/>
           </a:xfrm>
           <a:prstGeom prst="rect">
             <a:avLst/>
@@ -13447,299 +13577,269 @@
             <a:r>
               <a:rPr lang="en-US" sz="1600" dirty="0">
                 <a:solidFill>
+                  <a:srgbClr val="14161B"/>
+                </a:solidFill>
+                <a:latin typeface="Trade Gothic Next" pitchFamily="34" charset="0"/>
+                <a:ea typeface="Trade Gothic Next" pitchFamily="34" charset="-122"/>
+                <a:cs typeface="Trade Gothic Next" pitchFamily="34" charset="-120"/>
+              </a:rPr>
+              <a:t>Holds at most 2 electrons.</a:t>
+            </a:r>
+            <a:endParaRPr lang="en-US" sz="1600" dirty="0"/>
+          </a:p>
+        </p:txBody>
+      </p:sp>
+      <p:sp>
+        <p:nvSpPr>
+          <p:cNvPr id="6" name="Text 6"/>
+          <p:cNvSpPr txBox="1"/>
+          <p:nvPr>
+            <p:ph idx="112" type="body" hasCustomPrompt="1"/>
+          </p:nvPr>
+        </p:nvSpPr>
+        <p:spPr>
+          <a:xfrm>
+            <a:off x="4498848" y="2953512"/>
+            <a:ext cx="2999232" cy="219456"/>
+          </a:xfrm>
+          <a:prstGeom prst="rect">
+            <a:avLst/>
+          </a:prstGeom>
+          <a:noFill/>
+          <a:ln/>
+        </p:spPr>
+        <p:txBody>
+          <a:bodyPr wrap="square" lIns="0" tIns="0" rIns="0" bIns="0" rtlCol="0"/>
+          <a:lstStyle/>
+          <a:p>
+            <a:pPr indent="0" marL="0">
+              <a:buNone/>
+            </a:pPr>
+            <a:r>
+              <a:rPr lang="en-US" sz="1200" b="1" spc="120" kern="0" dirty="0">
+                <a:solidFill>
+                  <a:srgbClr val="2E3338"/>
+                </a:solidFill>
+                <a:latin typeface="Trade Gothic Next" pitchFamily="34" charset="0"/>
+                <a:ea typeface="Trade Gothic Next" pitchFamily="34" charset="-122"/>
+                <a:cs typeface="Trade Gothic Next" pitchFamily="34" charset="-120"/>
+              </a:rPr>
+              <a:t>ONE SUBLEVEL</a:t>
+            </a:r>
+            <a:endParaRPr lang="en-US" sz="1200" dirty="0"/>
+          </a:p>
+        </p:txBody>
+      </p:sp>
+      <p:sp>
+        <p:nvSpPr>
+          <p:cNvPr id="7" name="Text 6"/>
+          <p:cNvSpPr txBox="1"/>
+          <p:nvPr>
+            <p:ph idx="113" type="body" hasCustomPrompt="1"/>
+          </p:nvPr>
+        </p:nvSpPr>
+        <p:spPr>
+          <a:xfrm>
+            <a:off x="4498848" y="3246120"/>
+            <a:ext cx="2999232" cy="1673352"/>
+          </a:xfrm>
+          <a:prstGeom prst="rect">
+            <a:avLst/>
+          </a:prstGeom>
+          <a:noFill/>
+          <a:ln/>
+        </p:spPr>
+        <p:txBody>
+          <a:bodyPr wrap="square" lIns="0" tIns="0" rIns="0" bIns="0" rtlCol="0"/>
+          <a:lstStyle/>
+          <a:p>
+            <a:pPr indent="0" marL="0">
+              <a:buNone/>
+            </a:pPr>
+            <a:r>
+              <a:rPr lang="en-US" sz="1600" dirty="0">
+                <a:solidFill>
+                  <a:srgbClr val="14161B"/>
+                </a:solidFill>
+                <a:latin typeface="Trade Gothic Next" pitchFamily="34" charset="0"/>
+                <a:ea typeface="Trade Gothic Next" pitchFamily="34" charset="-122"/>
+                <a:cs typeface="Trade Gothic Next" pitchFamily="34" charset="-120"/>
+              </a:rPr>
+              <a:t>s: 1 × 2 = 2</a:t>
+            </a:r>
+            <a:endParaRPr lang="en-US" sz="1600" dirty="0"/>
+          </a:p>
+          <a:p>
+            <a:pPr indent="0" marL="0">
+              <a:buNone/>
+            </a:pPr>
+            <a:r>
+              <a:rPr lang="en-US" sz="1600" dirty="0">
+                <a:solidFill>
+                  <a:srgbClr val="14161B"/>
+                </a:solidFill>
+                <a:latin typeface="Trade Gothic Next" pitchFamily="34" charset="0"/>
+                <a:ea typeface="Trade Gothic Next" pitchFamily="34" charset="-122"/>
+                <a:cs typeface="Trade Gothic Next" pitchFamily="34" charset="-120"/>
+              </a:rPr>
+              <a:t>p: 3 × 2 = 6</a:t>
+            </a:r>
+            <a:endParaRPr lang="en-US" sz="1600" dirty="0"/>
+          </a:p>
+          <a:p>
+            <a:pPr indent="0" marL="0">
+              <a:buNone/>
+            </a:pPr>
+            <a:r>
+              <a:rPr lang="en-US" sz="1600" dirty="0">
+                <a:solidFill>
+                  <a:srgbClr val="14161B"/>
+                </a:solidFill>
+                <a:latin typeface="Trade Gothic Next" pitchFamily="34" charset="0"/>
+                <a:ea typeface="Trade Gothic Next" pitchFamily="34" charset="-122"/>
+                <a:cs typeface="Trade Gothic Next" pitchFamily="34" charset="-120"/>
+              </a:rPr>
+              <a:t>d: 5 × 2 = 10</a:t>
+            </a:r>
+            <a:endParaRPr lang="en-US" sz="1600" dirty="0"/>
+          </a:p>
+          <a:p>
+            <a:pPr indent="0" marL="0">
+              <a:buNone/>
+            </a:pPr>
+            <a:r>
+              <a:rPr lang="en-US" sz="1600" dirty="0">
+                <a:solidFill>
+                  <a:srgbClr val="14161B"/>
+                </a:solidFill>
+                <a:latin typeface="Trade Gothic Next" pitchFamily="34" charset="0"/>
+                <a:ea typeface="Trade Gothic Next" pitchFamily="34" charset="-122"/>
+                <a:cs typeface="Trade Gothic Next" pitchFamily="34" charset="-120"/>
+              </a:rPr>
+              <a:t>f: 7 × 2 = 14</a:t>
+            </a:r>
+            <a:endParaRPr lang="en-US" sz="1600" dirty="0"/>
+          </a:p>
+        </p:txBody>
+      </p:sp>
+      <p:sp>
+        <p:nvSpPr>
+          <p:cNvPr id="8" name="Text 7"/>
+          <p:cNvSpPr txBox="1"/>
+          <p:nvPr>
+            <p:ph idx="115" type="body" hasCustomPrompt="1"/>
+          </p:nvPr>
+        </p:nvSpPr>
+        <p:spPr>
+          <a:xfrm>
+            <a:off x="8110728" y="2953512"/>
+            <a:ext cx="2999232" cy="219456"/>
+          </a:xfrm>
+          <a:prstGeom prst="rect">
+            <a:avLst/>
+          </a:prstGeom>
+          <a:noFill/>
+          <a:ln/>
+        </p:spPr>
+        <p:txBody>
+          <a:bodyPr wrap="square" lIns="0" tIns="0" rIns="0" bIns="0" rtlCol="0"/>
+          <a:lstStyle/>
+          <a:p>
+            <a:pPr indent="0" marL="0">
+              <a:buNone/>
+            </a:pPr>
+            <a:r>
+              <a:rPr lang="en-US" sz="1200" b="1" spc="120" kern="0" dirty="0">
+                <a:solidFill>
+                  <a:srgbClr val="2E3338"/>
+                </a:solidFill>
+                <a:latin typeface="Trade Gothic Next" pitchFamily="34" charset="0"/>
+                <a:ea typeface="Trade Gothic Next" pitchFamily="34" charset="-122"/>
+                <a:cs typeface="Trade Gothic Next" pitchFamily="34" charset="-120"/>
+              </a:rPr>
+              <a:t>OPPOSITE SPINS</a:t>
+            </a:r>
+            <a:endParaRPr lang="en-US" sz="1200" dirty="0"/>
+          </a:p>
+        </p:txBody>
+      </p:sp>
+      <p:sp>
+        <p:nvSpPr>
+          <p:cNvPr id="9" name="Text 7"/>
+          <p:cNvSpPr txBox="1"/>
+          <p:nvPr>
+            <p:ph idx="116" type="body" hasCustomPrompt="1"/>
+          </p:nvPr>
+        </p:nvSpPr>
+        <p:spPr>
+          <a:xfrm>
+            <a:off x="8110728" y="3246120"/>
+            <a:ext cx="2999232" cy="1673352"/>
+          </a:xfrm>
+          <a:prstGeom prst="rect">
+            <a:avLst/>
+          </a:prstGeom>
+          <a:noFill/>
+          <a:ln/>
+        </p:spPr>
+        <p:txBody>
+          <a:bodyPr wrap="square" lIns="0" tIns="0" rIns="0" bIns="0" rtlCol="0"/>
+          <a:lstStyle/>
+          <a:p>
+            <a:pPr indent="0" marL="0">
+              <a:buNone/>
+            </a:pPr>
+            <a:r>
+              <a:rPr lang="en-US" sz="1600" dirty="0">
+                <a:solidFill>
+                  <a:srgbClr val="14161B"/>
+                </a:solidFill>
+                <a:latin typeface="Trade Gothic Next" pitchFamily="34" charset="0"/>
+                <a:ea typeface="Trade Gothic Next" pitchFamily="34" charset="-122"/>
+                <a:cs typeface="Trade Gothic Next" pitchFamily="34" charset="-120"/>
+              </a:rPr>
+              <a:t>The 2 electrons in one orbital have opposite spins. Section 2.3 puts this to work.</a:t>
+            </a:r>
+            <a:endParaRPr lang="en-US" sz="1600" dirty="0"/>
+          </a:p>
+        </p:txBody>
+      </p:sp>
+      <p:sp>
+        <p:nvSpPr>
+          <p:cNvPr id="10" name="Text 9"/>
+          <p:cNvSpPr txBox="1"/>
+          <p:nvPr>
+            <p:ph idx="119" type="body" hasCustomPrompt="1"/>
+          </p:nvPr>
+        </p:nvSpPr>
+        <p:spPr>
+          <a:xfrm>
+            <a:off x="2240280" y="5486400"/>
+            <a:ext cx="8991295" cy="402336"/>
+          </a:xfrm>
+          <a:prstGeom prst="rect">
+            <a:avLst/>
+          </a:prstGeom>
+          <a:noFill/>
+          <a:ln/>
+        </p:spPr>
+        <p:txBody>
+          <a:bodyPr wrap="square" lIns="0" tIns="0" rIns="0" bIns="0" rtlCol="0" anchor="ctr"/>
+          <a:lstStyle/>
+          <a:p>
+            <a:pPr indent="0" marL="0">
+              <a:buNone/>
+            </a:pPr>
+            <a:r>
+              <a:rPr lang="en-US" sz="1600" b="1" dirty="0">
+                <a:solidFill>
                   <a:srgbClr val="EDF0E5"/>
                 </a:solidFill>
                 <a:latin typeface="Trade Gothic Next" pitchFamily="34" charset="0"/>
                 <a:ea typeface="Trade Gothic Next" pitchFamily="34" charset="-122"/>
                 <a:cs typeface="Trade Gothic Next" pitchFamily="34" charset="-120"/>
               </a:rPr>
-              <a:t>List the sublevels in n = 3. Give the orbitals and maximum electrons in each.</a:t>
-            </a:r>
-            <a:endParaRPr lang="en-US" sz="1600" dirty="0"/>
-          </a:p>
-        </p:txBody>
-      </p:sp>
-      <p:sp>
-        <p:nvSpPr>
-          <p:cNvPr id="5" name="Text 7"/>
-          <p:cNvSpPr txBox="1"/>
-          <p:nvPr>
-            <p:ph idx="112" type="body" hasCustomPrompt="1"/>
-          </p:nvPr>
-        </p:nvSpPr>
-        <p:spPr>
-          <a:xfrm>
-            <a:off x="886968" y="3776472"/>
-            <a:ext cx="2203704" cy="219456"/>
-          </a:xfrm>
-          <a:prstGeom prst="rect">
-            <a:avLst/>
-          </a:prstGeom>
-          <a:noFill/>
-          <a:ln/>
-        </p:spPr>
-        <p:txBody>
-          <a:bodyPr wrap="square" lIns="0" tIns="0" rIns="0" bIns="0" rtlCol="0"/>
-          <a:lstStyle/>
-          <a:p>
-            <a:pPr indent="0" marL="0">
-              <a:buNone/>
-            </a:pPr>
-            <a:r>
-              <a:rPr lang="en-US" sz="1200" b="1" spc="120" kern="0" dirty="0">
-                <a:solidFill>
-                  <a:srgbClr val="2E3338"/>
-                </a:solidFill>
-                <a:latin typeface="Trade Gothic Next" pitchFamily="34" charset="0"/>
-                <a:ea typeface="Trade Gothic Next" pitchFamily="34" charset="-122"/>
-                <a:cs typeface="Trade Gothic Next" pitchFamily="34" charset="-120"/>
-              </a:rPr>
-              <a:t>GIVEN</a:t>
-            </a:r>
-            <a:endParaRPr lang="en-US" sz="1200" dirty="0"/>
-          </a:p>
-        </p:txBody>
-      </p:sp>
-      <p:sp>
-        <p:nvSpPr>
-          <p:cNvPr id="6" name="Text 7"/>
-          <p:cNvSpPr txBox="1"/>
-          <p:nvPr>
-            <p:ph idx="113" type="body" hasCustomPrompt="1"/>
-          </p:nvPr>
-        </p:nvSpPr>
-        <p:spPr>
-          <a:xfrm>
-            <a:off x="886968" y="4069080"/>
-            <a:ext cx="2203704" cy="1078992"/>
-          </a:xfrm>
-          <a:prstGeom prst="rect">
-            <a:avLst/>
-          </a:prstGeom>
-          <a:noFill/>
-          <a:ln/>
-        </p:spPr>
-        <p:txBody>
-          <a:bodyPr wrap="square" lIns="0" tIns="0" rIns="0" bIns="0" rtlCol="0"/>
-          <a:lstStyle/>
-          <a:p>
-            <a:pPr indent="0" marL="0">
-              <a:buNone/>
-            </a:pPr>
-            <a:r>
-              <a:rPr lang="en-US" sz="1600" dirty="0">
-                <a:solidFill>
-                  <a:srgbClr val="14161B"/>
-                </a:solidFill>
-                <a:latin typeface="Trade Gothic Next" pitchFamily="34" charset="0"/>
-                <a:ea typeface="Trade Gothic Next" pitchFamily="34" charset="-122"/>
-                <a:cs typeface="Trade Gothic Next" pitchFamily="34" charset="-120"/>
-              </a:rPr>
-              <a:t>n = 3</a:t>
-            </a:r>
-            <a:endParaRPr lang="en-US" sz="1600" dirty="0"/>
-          </a:p>
-          <a:p>
-            <a:pPr indent="0" marL="0">
-              <a:buNone/>
-            </a:pPr>
-            <a:r>
-              <a:rPr lang="en-US" sz="1600" dirty="0">
-                <a:solidFill>
-                  <a:srgbClr val="14161B"/>
-                </a:solidFill>
-                <a:latin typeface="Trade Gothic Next" pitchFamily="34" charset="0"/>
-                <a:ea typeface="Trade Gothic Next" pitchFamily="34" charset="-122"/>
-                <a:cs typeface="Trade Gothic Next" pitchFamily="34" charset="-120"/>
-              </a:rPr>
-              <a:t>Level n has n sublevels</a:t>
-            </a:r>
-            <a:endParaRPr lang="en-US" sz="1600" dirty="0"/>
-          </a:p>
-        </p:txBody>
-      </p:sp>
-      <p:sp>
-        <p:nvSpPr>
-          <p:cNvPr id="7" name="Text 8"/>
-          <p:cNvSpPr txBox="1"/>
-          <p:nvPr>
-            <p:ph idx="115" type="body" hasCustomPrompt="1"/>
-          </p:nvPr>
-        </p:nvSpPr>
-        <p:spPr>
-          <a:xfrm>
-            <a:off x="3675888" y="3776472"/>
-            <a:ext cx="2203704" cy="219456"/>
-          </a:xfrm>
-          <a:prstGeom prst="rect">
-            <a:avLst/>
-          </a:prstGeom>
-          <a:noFill/>
-          <a:ln/>
-        </p:spPr>
-        <p:txBody>
-          <a:bodyPr wrap="square" lIns="0" tIns="0" rIns="0" bIns="0" rtlCol="0"/>
-          <a:lstStyle/>
-          <a:p>
-            <a:pPr indent="0" marL="0">
-              <a:buNone/>
-            </a:pPr>
-            <a:r>
-              <a:rPr lang="en-US" sz="1200" b="1" spc="120" kern="0" dirty="0">
-                <a:solidFill>
-                  <a:srgbClr val="2E3338"/>
-                </a:solidFill>
-                <a:latin typeface="Trade Gothic Next" pitchFamily="34" charset="0"/>
-                <a:ea typeface="Trade Gothic Next" pitchFamily="34" charset="-122"/>
-                <a:cs typeface="Trade Gothic Next" pitchFamily="34" charset="-120"/>
-              </a:rPr>
-              <a:t>NEED</a:t>
-            </a:r>
-            <a:endParaRPr lang="en-US" sz="1200" dirty="0"/>
-          </a:p>
-        </p:txBody>
-      </p:sp>
-      <p:sp>
-        <p:nvSpPr>
-          <p:cNvPr id="8" name="Text 8"/>
-          <p:cNvSpPr txBox="1"/>
-          <p:nvPr>
-            <p:ph idx="116" type="body" hasCustomPrompt="1"/>
-          </p:nvPr>
-        </p:nvSpPr>
-        <p:spPr>
-          <a:xfrm>
-            <a:off x="3675888" y="4069080"/>
-            <a:ext cx="2203704" cy="1078992"/>
-          </a:xfrm>
-          <a:prstGeom prst="rect">
-            <a:avLst/>
-          </a:prstGeom>
-          <a:noFill/>
-          <a:ln/>
-        </p:spPr>
-        <p:txBody>
-          <a:bodyPr wrap="square" lIns="0" tIns="0" rIns="0" bIns="0" rtlCol="0"/>
-          <a:lstStyle/>
-          <a:p>
-            <a:pPr indent="0" marL="0">
-              <a:buNone/>
-            </a:pPr>
-            <a:r>
-              <a:rPr lang="en-US" sz="1600" dirty="0">
-                <a:solidFill>
-                  <a:srgbClr val="14161B"/>
-                </a:solidFill>
-                <a:latin typeface="Trade Gothic Next" pitchFamily="34" charset="0"/>
-                <a:ea typeface="Trade Gothic Next" pitchFamily="34" charset="-122"/>
-                <a:cs typeface="Trade Gothic Next" pitchFamily="34" charset="-120"/>
-              </a:rPr>
-              <a:t>Sublevels</a:t>
-            </a:r>
-            <a:endParaRPr lang="en-US" sz="1600" dirty="0"/>
-          </a:p>
-          <a:p>
-            <a:pPr indent="0" marL="0">
-              <a:buNone/>
-            </a:pPr>
-            <a:r>
-              <a:rPr lang="en-US" sz="1600" dirty="0">
-                <a:solidFill>
-                  <a:srgbClr val="14161B"/>
-                </a:solidFill>
-                <a:latin typeface="Trade Gothic Next" pitchFamily="34" charset="0"/>
-                <a:ea typeface="Trade Gothic Next" pitchFamily="34" charset="-122"/>
-                <a:cs typeface="Trade Gothic Next" pitchFamily="34" charset="-120"/>
-              </a:rPr>
-              <a:t>Orbitals in each</a:t>
-            </a:r>
-            <a:endParaRPr lang="en-US" sz="1600" dirty="0"/>
-          </a:p>
-          <a:p>
-            <a:pPr indent="0" marL="0">
-              <a:buNone/>
-            </a:pPr>
-            <a:r>
-              <a:rPr lang="en-US" sz="1600" dirty="0">
-                <a:solidFill>
-                  <a:srgbClr val="14161B"/>
-                </a:solidFill>
-                <a:latin typeface="Trade Gothic Next" pitchFamily="34" charset="0"/>
-                <a:ea typeface="Trade Gothic Next" pitchFamily="34" charset="-122"/>
-                <a:cs typeface="Trade Gothic Next" pitchFamily="34" charset="-120"/>
-              </a:rPr>
-              <a:t>Max electrons</a:t>
-            </a:r>
-            <a:endParaRPr lang="en-US" sz="1600" dirty="0"/>
-          </a:p>
-        </p:txBody>
-      </p:sp>
-      <p:sp>
-        <p:nvSpPr>
-          <p:cNvPr id="9" name="Text 10"/>
-          <p:cNvSpPr txBox="1"/>
-          <p:nvPr>
-            <p:ph idx="119" type="body" hasCustomPrompt="1"/>
-          </p:nvPr>
-        </p:nvSpPr>
-        <p:spPr>
-          <a:xfrm>
-            <a:off x="6464808" y="2880360"/>
-            <a:ext cx="4837176" cy="2286000"/>
-          </a:xfrm>
-          <a:prstGeom prst="rect">
-            <a:avLst/>
-          </a:prstGeom>
-          <a:noFill/>
-          <a:ln/>
-        </p:spPr>
-        <p:txBody>
-          <a:bodyPr wrap="square" lIns="0" tIns="0" rIns="0" bIns="0" rtlCol="0"/>
-          <a:lstStyle/>
-          <a:p>
-            <a:pPr indent="0" marL="0">
-              <a:buNone/>
-            </a:pPr>
-            <a:endParaRPr lang="en-US" sz="1900" dirty="0"/>
-          </a:p>
-        </p:txBody>
-      </p:sp>
-      <p:sp>
-        <p:nvSpPr>
-          <p:cNvPr id="10" name="Text 12"/>
-          <p:cNvSpPr txBox="1"/>
-          <p:nvPr>
-            <p:ph idx="122" type="body" hasCustomPrompt="1"/>
-          </p:nvPr>
-        </p:nvSpPr>
-        <p:spPr>
-          <a:xfrm>
-            <a:off x="2240280" y="5605272"/>
-            <a:ext cx="8991295" cy="402336"/>
-          </a:xfrm>
-          <a:prstGeom prst="rect">
-            <a:avLst/>
-          </a:prstGeom>
-          <a:noFill/>
-          <a:ln/>
-        </p:spPr>
-        <p:txBody>
-          <a:bodyPr wrap="square" lIns="0" tIns="0" rIns="0" bIns="0" rtlCol="0" anchor="ctr"/>
-          <a:lstStyle/>
-          <a:p>
-            <a:pPr indent="0" marL="0">
-              <a:buNone/>
-            </a:pPr>
-            <a:r>
-              <a:rPr lang="en-US" sz="1600" b="1" dirty="0">
-                <a:solidFill>
-                  <a:srgbClr val="EDF0E5"/>
-                </a:solidFill>
-                <a:latin typeface="Trade Gothic Next" pitchFamily="34" charset="0"/>
-                <a:ea typeface="Trade Gothic Next" pitchFamily="34" charset="-122"/>
-                <a:cs typeface="Trade Gothic Next" pitchFamily="34" charset="-120"/>
-              </a:rPr>
-              <a:t>Level n has n sublevels. List them, then count the orbitals.</a:t>
+              <a:t>One orbital holds 2 electrons. s holds 2, p holds 6, d holds 10, f holds 14.</a:t>
             </a:r>
             <a:endParaRPr lang="en-US" sz="1600" dirty="0"/>
           </a:p>
@@ -13788,10 +13888,10 @@
       </p:sp>
       <p:sp>
         <p:nvSpPr>
-          <p:cNvPr id="12" name="Text 13"/>
-          <p:cNvSpPr txBox="1"/>
-          <p:nvPr>
-            <p:ph idx="124" type="body" hasCustomPrompt="1"/>
+          <p:cNvPr id="12" name="Text 10"/>
+          <p:cNvSpPr txBox="1"/>
+          <p:nvPr>
+            <p:ph idx="121" type="body" hasCustomPrompt="1"/>
           </p:nvPr>
         </p:nvSpPr>
         <p:spPr>
@@ -13829,7 +13929,7 @@
       </p:sp>
       <p:sp>
         <p:nvSpPr>
-          <p:cNvPr id="13" name="Text 4"/>
+          <p:cNvPr id="14" name="Text 4"/>
           <p:cNvSpPr txBox="1"/>
           <p:nvPr>
             <p:ph idx="107" hasCustomPrompt="1"/>
@@ -13837,8 +13937,8 @@
         </p:nvSpPr>
         <p:spPr>
           <a:xfrm>
-            <a:off x="9262872" y="1088136"/>
-            <a:ext cx="1901952" cy="1069848"/>
+            <a:off x="8641080" y="1088136"/>
+            <a:ext cx="2633472" cy="1481328"/>
           </a:xfrm>
           <a:prstGeom prst="rect">
             <a:avLst/>
@@ -13893,7 +13993,7 @@
         <p:spPr>
           <a:xfrm>
             <a:off x="685800" y="932688"/>
-            <a:ext cx="10820095" cy="868680"/>
+            <a:ext cx="7863840" cy="868680"/>
           </a:xfrm>
           <a:prstGeom prst="rect">
             <a:avLst/>
@@ -13917,7 +14017,7 @@
                 <a:ea typeface="Trade Gothic Next" pitchFamily="34" charset="-122"/>
                 <a:cs typeface="Trade Gothic Next" pitchFamily="34" charset="-120"/>
               </a:rPr>
-              <a:t>The n = 3 Level, Worked</a:t>
+              <a:t>Example: The n = 3 Level</a:t>
             </a:r>
             <a:endParaRPr lang="en-US" sz="2800" dirty="0"/>
           </a:p>
@@ -13934,7 +14034,7 @@
         <p:spPr>
           <a:xfrm>
             <a:off x="685800" y="1847088"/>
-            <a:ext cx="10820095" cy="384048"/>
+            <a:ext cx="7863840" cy="384048"/>
           </a:xfrm>
           <a:prstGeom prst="rect">
             <a:avLst/>
@@ -13958,7 +14058,7 @@
                 <a:ea typeface="Trade Gothic Next" pitchFamily="34" charset="-122"/>
                 <a:cs typeface="Trade Gothic Next" pitchFamily="34" charset="-120"/>
               </a:rPr>
-              <a:t>Check your list against this.</a:t>
+              <a:t>We do this one together. List first, then count.</a:t>
             </a:r>
             <a:endParaRPr lang="en-US" sz="1700" dirty="0"/>
           </a:p>
@@ -13966,16 +14066,16 @@
       </p:sp>
       <p:sp>
         <p:nvSpPr>
-          <p:cNvPr id="4" name="Text 5"/>
-          <p:cNvSpPr txBox="1"/>
-          <p:nvPr>
-            <p:ph idx="109" type="body" hasCustomPrompt="1"/>
-          </p:nvPr>
-        </p:nvSpPr>
-        <p:spPr>
-          <a:xfrm>
-            <a:off x="5276088" y="2560320"/>
-            <a:ext cx="2752344" cy="219456"/>
+          <p:cNvPr id="4" name="Text 6"/>
+          <p:cNvSpPr txBox="1"/>
+          <p:nvPr>
+            <p:ph idx="110" type="body" hasCustomPrompt="1"/>
+          </p:nvPr>
+        </p:nvSpPr>
+        <p:spPr>
+          <a:xfrm>
+            <a:off x="886968" y="2798064"/>
+            <a:ext cx="4992624" cy="548640"/>
           </a:xfrm>
           <a:prstGeom prst="rect">
             <a:avLst/>
@@ -13991,6 +14091,47 @@
               <a:buNone/>
             </a:pPr>
             <a:r>
+              <a:rPr lang="en-US" sz="1600" dirty="0">
+                <a:solidFill>
+                  <a:srgbClr val="EDF0E5"/>
+                </a:solidFill>
+                <a:latin typeface="Trade Gothic Next" pitchFamily="34" charset="0"/>
+                <a:ea typeface="Trade Gothic Next" pitchFamily="34" charset="-122"/>
+                <a:cs typeface="Trade Gothic Next" pitchFamily="34" charset="-120"/>
+              </a:rPr>
+              <a:t>List the sublevels in n = 3. Give the orbitals and maximum electrons in each.</a:t>
+            </a:r>
+            <a:endParaRPr lang="en-US" sz="1600" dirty="0"/>
+          </a:p>
+        </p:txBody>
+      </p:sp>
+      <p:sp>
+        <p:nvSpPr>
+          <p:cNvPr id="5" name="Text 7"/>
+          <p:cNvSpPr txBox="1"/>
+          <p:nvPr>
+            <p:ph idx="112" type="body" hasCustomPrompt="1"/>
+          </p:nvPr>
+        </p:nvSpPr>
+        <p:spPr>
+          <a:xfrm>
+            <a:off x="886968" y="3776472"/>
+            <a:ext cx="2203704" cy="219456"/>
+          </a:xfrm>
+          <a:prstGeom prst="rect">
+            <a:avLst/>
+          </a:prstGeom>
+          <a:noFill/>
+          <a:ln/>
+        </p:spPr>
+        <p:txBody>
+          <a:bodyPr wrap="square" lIns="0" tIns="0" rIns="0" bIns="0" rtlCol="0"/>
+          <a:lstStyle/>
+          <a:p>
+            <a:pPr indent="0" marL="0">
+              <a:buNone/>
+            </a:pPr>
+            <a:r>
               <a:rPr lang="en-US" sz="1200" b="1" spc="120" kern="0" dirty="0">
                 <a:solidFill>
                   <a:srgbClr val="2E3338"/>
@@ -13999,7 +14140,7 @@
                 <a:ea typeface="Trade Gothic Next" pitchFamily="34" charset="-122"/>
                 <a:cs typeface="Trade Gothic Next" pitchFamily="34" charset="-120"/>
               </a:rPr>
-              <a:t>SETUP</a:t>
+              <a:t>GIVEN</a:t>
             </a:r>
             <a:endParaRPr lang="en-US" sz="1200" dirty="0"/>
           </a:p>
@@ -14007,16 +14148,16 @@
       </p:sp>
       <p:sp>
         <p:nvSpPr>
-          <p:cNvPr id="5" name="Text 5"/>
-          <p:cNvSpPr txBox="1"/>
-          <p:nvPr>
-            <p:ph idx="110" type="body" hasCustomPrompt="1"/>
-          </p:nvPr>
-        </p:nvSpPr>
-        <p:spPr>
-          <a:xfrm>
-            <a:off x="5276088" y="2852928"/>
-            <a:ext cx="2752344" cy="1901952"/>
+          <p:cNvPr id="6" name="Text 7"/>
+          <p:cNvSpPr txBox="1"/>
+          <p:nvPr>
+            <p:ph idx="113" type="body" hasCustomPrompt="1"/>
+          </p:nvPr>
+        </p:nvSpPr>
+        <p:spPr>
+          <a:xfrm>
+            <a:off x="886968" y="4069080"/>
+            <a:ext cx="2203704" cy="1078992"/>
           </a:xfrm>
           <a:prstGeom prst="rect">
             <a:avLst/>
@@ -14040,7 +14181,7 @@
                 <a:ea typeface="Trade Gothic Next" pitchFamily="34" charset="-122"/>
                 <a:cs typeface="Trade Gothic Next" pitchFamily="34" charset="-120"/>
               </a:rPr>
-              <a:t>n = 3 gives 3 sublevels:</a:t>
+              <a:t>n = 3</a:t>
             </a:r>
             <a:endParaRPr lang="en-US" sz="1600" dirty="0"/>
           </a:p>
@@ -14057,7 +14198,7 @@
                 <a:ea typeface="Trade Gothic Next" pitchFamily="34" charset="-122"/>
                 <a:cs typeface="Trade Gothic Next" pitchFamily="34" charset="-120"/>
               </a:rPr>
-              <a:t>3s, 3p, 3d</a:t>
+              <a:t>Level n has n sublevels</a:t>
             </a:r>
             <a:endParaRPr lang="en-US" sz="1600" dirty="0"/>
           </a:p>
@@ -14065,16 +14206,16 @@
       </p:sp>
       <p:sp>
         <p:nvSpPr>
-          <p:cNvPr id="6" name="Text 7"/>
-          <p:cNvSpPr txBox="1"/>
-          <p:nvPr>
-            <p:ph idx="113" type="body" hasCustomPrompt="1"/>
-          </p:nvPr>
-        </p:nvSpPr>
-        <p:spPr>
-          <a:xfrm>
-            <a:off x="8613648" y="2871216"/>
-            <a:ext cx="2688336" cy="1920240"/>
+          <p:cNvPr id="7" name="Text 8"/>
+          <p:cNvSpPr txBox="1"/>
+          <p:nvPr>
+            <p:ph idx="115" type="body" hasCustomPrompt="1"/>
+          </p:nvPr>
+        </p:nvSpPr>
+        <p:spPr>
+          <a:xfrm>
+            <a:off x="3675888" y="3776472"/>
+            <a:ext cx="2203704" cy="219456"/>
           </a:xfrm>
           <a:prstGeom prst="rect">
             <a:avLst/>
@@ -14090,7 +14231,48 @@
               <a:buNone/>
             </a:pPr>
             <a:r>
-              <a:rPr lang="en-US" sz="1900" dirty="0">
+              <a:rPr lang="en-US" sz="1200" b="1" spc="120" kern="0" dirty="0">
+                <a:solidFill>
+                  <a:srgbClr val="2E3338"/>
+                </a:solidFill>
+                <a:latin typeface="Trade Gothic Next" pitchFamily="34" charset="0"/>
+                <a:ea typeface="Trade Gothic Next" pitchFamily="34" charset="-122"/>
+                <a:cs typeface="Trade Gothic Next" pitchFamily="34" charset="-120"/>
+              </a:rPr>
+              <a:t>NEED</a:t>
+            </a:r>
+            <a:endParaRPr lang="en-US" sz="1200" dirty="0"/>
+          </a:p>
+        </p:txBody>
+      </p:sp>
+      <p:sp>
+        <p:nvSpPr>
+          <p:cNvPr id="8" name="Text 8"/>
+          <p:cNvSpPr txBox="1"/>
+          <p:nvPr>
+            <p:ph idx="116" type="body" hasCustomPrompt="1"/>
+          </p:nvPr>
+        </p:nvSpPr>
+        <p:spPr>
+          <a:xfrm>
+            <a:off x="3675888" y="4069080"/>
+            <a:ext cx="2203704" cy="1078992"/>
+          </a:xfrm>
+          <a:prstGeom prst="rect">
+            <a:avLst/>
+          </a:prstGeom>
+          <a:noFill/>
+          <a:ln/>
+        </p:spPr>
+        <p:txBody>
+          <a:bodyPr wrap="square" lIns="0" tIns="0" rIns="0" bIns="0" rtlCol="0"/>
+          <a:lstStyle/>
+          <a:p>
+            <a:pPr indent="0" marL="0">
+              <a:buNone/>
+            </a:pPr>
+            <a:r>
+              <a:rPr lang="en-US" sz="1600" dirty="0">
                 <a:solidFill>
                   <a:srgbClr val="14161B"/>
                 </a:solidFill>
@@ -14098,74 +14280,87 @@
                 <a:ea typeface="Trade Gothic Next" pitchFamily="34" charset="-122"/>
                 <a:cs typeface="Trade Gothic Next" pitchFamily="34" charset="-120"/>
               </a:rPr>
-              <a:t>3s: 1 orbital, 2 e−</a:t>
-            </a:r>
+              <a:t>Sublevels</a:t>
+            </a:r>
+            <a:endParaRPr lang="en-US" sz="1600" dirty="0"/>
+          </a:p>
+          <a:p>
+            <a:pPr indent="0" marL="0">
+              <a:buNone/>
+            </a:pPr>
+            <a:r>
+              <a:rPr lang="en-US" sz="1600" dirty="0">
+                <a:solidFill>
+                  <a:srgbClr val="14161B"/>
+                </a:solidFill>
+                <a:latin typeface="Trade Gothic Next" pitchFamily="34" charset="0"/>
+                <a:ea typeface="Trade Gothic Next" pitchFamily="34" charset="-122"/>
+                <a:cs typeface="Trade Gothic Next" pitchFamily="34" charset="-120"/>
+              </a:rPr>
+              <a:t>Orbitals in each</a:t>
+            </a:r>
+            <a:endParaRPr lang="en-US" sz="1600" dirty="0"/>
+          </a:p>
+          <a:p>
+            <a:pPr indent="0" marL="0">
+              <a:buNone/>
+            </a:pPr>
+            <a:r>
+              <a:rPr lang="en-US" sz="1600" dirty="0">
+                <a:solidFill>
+                  <a:srgbClr val="14161B"/>
+                </a:solidFill>
+                <a:latin typeface="Trade Gothic Next" pitchFamily="34" charset="0"/>
+                <a:ea typeface="Trade Gothic Next" pitchFamily="34" charset="-122"/>
+                <a:cs typeface="Trade Gothic Next" pitchFamily="34" charset="-120"/>
+              </a:rPr>
+              <a:t>Max electrons</a:t>
+            </a:r>
+            <a:endParaRPr lang="en-US" sz="1600" dirty="0"/>
+          </a:p>
+        </p:txBody>
+      </p:sp>
+      <p:sp>
+        <p:nvSpPr>
+          <p:cNvPr id="9" name="Text 10"/>
+          <p:cNvSpPr txBox="1"/>
+          <p:nvPr>
+            <p:ph idx="119" type="body" hasCustomPrompt="1"/>
+          </p:nvPr>
+        </p:nvSpPr>
+        <p:spPr>
+          <a:xfrm>
+            <a:off x="6464808" y="2880360"/>
+            <a:ext cx="4837176" cy="2286000"/>
+          </a:xfrm>
+          <a:prstGeom prst="rect">
+            <a:avLst/>
+          </a:prstGeom>
+          <a:noFill/>
+          <a:ln/>
+        </p:spPr>
+        <p:txBody>
+          <a:bodyPr wrap="square" lIns="0" tIns="0" rIns="0" bIns="0" rtlCol="0"/>
+          <a:lstStyle/>
+          <a:p>
+            <a:pPr indent="0" marL="0">
+              <a:buNone/>
+            </a:pPr>
             <a:endParaRPr lang="en-US" sz="1900" dirty="0"/>
           </a:p>
-          <a:p>
-            <a:pPr indent="0" marL="0">
-              <a:buNone/>
-            </a:pPr>
-            <a:r>
-              <a:rPr lang="en-US" sz="1900" dirty="0">
-                <a:solidFill>
-                  <a:srgbClr val="14161B"/>
-                </a:solidFill>
-                <a:latin typeface="Trade Gothic Next" pitchFamily="34" charset="0"/>
-                <a:ea typeface="Trade Gothic Next" pitchFamily="34" charset="-122"/>
-                <a:cs typeface="Trade Gothic Next" pitchFamily="34" charset="-120"/>
-              </a:rPr>
-              <a:t>3p: 3 orbitals, 6 e−</a:t>
-            </a:r>
-            <a:endParaRPr lang="en-US" sz="1900" dirty="0"/>
-          </a:p>
-          <a:p>
-            <a:pPr indent="0" marL="0">
-              <a:buNone/>
-            </a:pPr>
-            <a:r>
-              <a:rPr lang="en-US" sz="1900" dirty="0">
-                <a:solidFill>
-                  <a:srgbClr val="14161B"/>
-                </a:solidFill>
-                <a:latin typeface="Trade Gothic Next" pitchFamily="34" charset="0"/>
-                <a:ea typeface="Trade Gothic Next" pitchFamily="34" charset="-122"/>
-                <a:cs typeface="Trade Gothic Next" pitchFamily="34" charset="-120"/>
-              </a:rPr>
-              <a:t>3d: 5 orbitals, 10 e−</a:t>
-            </a:r>
-            <a:endParaRPr lang="en-US" sz="1900" dirty="0"/>
-          </a:p>
-          <a:p>
-            <a:pPr indent="0" marL="0">
-              <a:buNone/>
-            </a:pPr>
-            <a:r>
-              <a:rPr lang="en-US" sz="1900" dirty="0">
-                <a:solidFill>
-                  <a:srgbClr val="14161B"/>
-                </a:solidFill>
-                <a:latin typeface="Trade Gothic Next" pitchFamily="34" charset="0"/>
-                <a:ea typeface="Trade Gothic Next" pitchFamily="34" charset="-122"/>
-                <a:cs typeface="Trade Gothic Next" pitchFamily="34" charset="-120"/>
-              </a:rPr>
-              <a:t>Total: 9 orbitals, 18 e−</a:t>
-            </a:r>
-            <a:endParaRPr lang="en-US" sz="1900" dirty="0"/>
-          </a:p>
-        </p:txBody>
-      </p:sp>
-      <p:sp>
-        <p:nvSpPr>
-          <p:cNvPr id="7" name="Text 9"/>
-          <p:cNvSpPr txBox="1"/>
-          <p:nvPr>
-            <p:ph idx="116" type="body" hasCustomPrompt="1"/>
-          </p:nvPr>
-        </p:nvSpPr>
-        <p:spPr>
-          <a:xfrm>
-            <a:off x="2240280" y="5212080"/>
+        </p:txBody>
+      </p:sp>
+      <p:sp>
+        <p:nvSpPr>
+          <p:cNvPr id="10" name="Text 12"/>
+          <p:cNvSpPr txBox="1"/>
+          <p:nvPr>
+            <p:ph idx="122" type="body" hasCustomPrompt="1"/>
+          </p:nvPr>
+        </p:nvSpPr>
+        <p:spPr>
+          <a:xfrm>
+            <a:off x="2240280" y="5605272"/>
             <a:ext cx="8991295" cy="402336"/>
           </a:xfrm>
           <a:prstGeom prst="rect">
@@ -14190,7 +14385,7 @@
                 <a:ea typeface="Trade Gothic Next" pitchFamily="34" charset="-122"/>
                 <a:cs typeface="Trade Gothic Next" pitchFamily="34" charset="-120"/>
               </a:rPr>
-              <a:t>n = 3 holds 9 orbitals (n²) and 18 electrons (2n²).</a:t>
+              <a:t>Level n has n sublevels. List them, then count the orbitals.</a:t>
             </a:r>
             <a:endParaRPr lang="en-US" sz="1600" dirty="0"/>
           </a:p>
@@ -14198,7 +14393,7 @@
       </p:sp>
       <p:sp>
         <p:nvSpPr>
-          <p:cNvPr id="8" name="Text 1"/>
+          <p:cNvPr id="11" name="Text 1"/>
           <p:cNvSpPr txBox="1"/>
           <p:nvPr>
             <p:ph idx="101" type="body" hasCustomPrompt="1"/>
@@ -14239,10 +14434,10 @@
       </p:sp>
       <p:sp>
         <p:nvSpPr>
-          <p:cNvPr id="9" name="Text 10"/>
-          <p:cNvSpPr txBox="1"/>
-          <p:nvPr>
-            <p:ph idx="118" type="body" hasCustomPrompt="1"/>
+          <p:cNvPr id="12" name="Text 13"/>
+          <p:cNvSpPr txBox="1"/>
+          <p:nvPr>
+            <p:ph idx="124" type="body" hasCustomPrompt="1"/>
           </p:nvPr>
         </p:nvSpPr>
         <p:spPr>
@@ -14280,7 +14475,7 @@
       </p:sp>
       <p:sp>
         <p:nvSpPr>
-          <p:cNvPr id="10" name="Text 4"/>
+          <p:cNvPr id="14" name="Text 4"/>
           <p:cNvSpPr txBox="1"/>
           <p:nvPr>
             <p:ph idx="107" hasCustomPrompt="1"/>
@@ -14288,8 +14483,8 @@
         </p:nvSpPr>
         <p:spPr>
           <a:xfrm>
-            <a:off x="832104" y="2542032"/>
-            <a:ext cx="3867912" cy="2267712"/>
+            <a:off x="9262872" y="1088136"/>
+            <a:ext cx="1901952" cy="1069848"/>
           </a:xfrm>
           <a:prstGeom prst="rect">
             <a:avLst/>
@@ -14319,6 +14514,569 @@
 <file path=ppt/slides/slide12.xml><?xml version="1.0" encoding="utf-8"?>
 <p:sld xmlns:a="http://schemas.openxmlformats.org/drawingml/2006/main" xmlns:r="http://schemas.openxmlformats.org/officeDocument/2006/relationships" xmlns:p="http://schemas.openxmlformats.org/presentationml/2006/main">
   <p:cSld name="Slide 12">
+    <p:spTree>
+      <p:nvGrpSpPr>
+        <p:cNvPr id="1" name=""/>
+        <p:cNvGrpSpPr/>
+        <p:nvPr/>
+      </p:nvGrpSpPr>
+      <p:grpSpPr>
+        <a:xfrm>
+          <a:off x="0" y="0"/>
+          <a:ext cx="0" cy="0"/>
+          <a:chOff x="0" y="0"/>
+          <a:chExt cx="0" cy="0"/>
+        </a:xfrm>
+      </p:grpSpPr>
+      <p:sp>
+        <p:nvSpPr>
+          <p:cNvPr id="2" name="Text 2"/>
+          <p:cNvSpPr txBox="1"/>
+          <p:nvPr>
+            <p:ph idx="103" type="title" hasCustomPrompt="1"/>
+          </p:nvPr>
+        </p:nvSpPr>
+        <p:spPr>
+          <a:xfrm>
+            <a:off x="685800" y="932688"/>
+            <a:ext cx="10820095" cy="868680"/>
+          </a:xfrm>
+          <a:prstGeom prst="rect">
+            <a:avLst/>
+          </a:prstGeom>
+          <a:noFill/>
+          <a:ln/>
+        </p:spPr>
+        <p:txBody>
+          <a:bodyPr wrap="square" lIns="0" tIns="0" rIns="0" bIns="0" rtlCol="0" anchor="t"/>
+          <a:lstStyle/>
+          <a:p>
+            <a:pPr algn="l" indent="0" marL="0">
+              <a:buNone/>
+            </a:pPr>
+            <a:r>
+              <a:rPr lang="en-US" sz="2800" b="1" dirty="0">
+                <a:solidFill>
+                  <a:srgbClr val="14161B"/>
+                </a:solidFill>
+                <a:latin typeface="Trade Gothic Next" pitchFamily="34" charset="0"/>
+                <a:ea typeface="Trade Gothic Next" pitchFamily="34" charset="-122"/>
+                <a:cs typeface="Trade Gothic Next" pitchFamily="34" charset="-120"/>
+              </a:rPr>
+              <a:t>The n = 3 Level, Worked</a:t>
+            </a:r>
+            <a:endParaRPr lang="en-US" sz="2800" dirty="0"/>
+          </a:p>
+        </p:txBody>
+      </p:sp>
+      <p:sp>
+        <p:nvSpPr>
+          <p:cNvPr id="3" name="Text 2"/>
+          <p:cNvSpPr txBox="1"/>
+          <p:nvPr>
+            <p:ph idx="104" type="body" hasCustomPrompt="1"/>
+          </p:nvPr>
+        </p:nvSpPr>
+        <p:spPr>
+          <a:xfrm>
+            <a:off x="685800" y="1847088"/>
+            <a:ext cx="10820095" cy="384048"/>
+          </a:xfrm>
+          <a:prstGeom prst="rect">
+            <a:avLst/>
+          </a:prstGeom>
+          <a:noFill/>
+          <a:ln/>
+        </p:spPr>
+        <p:txBody>
+          <a:bodyPr wrap="square" lIns="0" tIns="0" rIns="0" bIns="0" rtlCol="0"/>
+          <a:lstStyle/>
+          <a:p>
+            <a:pPr indent="0" marL="0">
+              <a:buNone/>
+            </a:pPr>
+            <a:r>
+              <a:rPr lang="en-US" sz="1700" dirty="0">
+                <a:solidFill>
+                  <a:srgbClr val="2E3338"/>
+                </a:solidFill>
+                <a:latin typeface="Trade Gothic Next" pitchFamily="34" charset="0"/>
+                <a:ea typeface="Trade Gothic Next" pitchFamily="34" charset="-122"/>
+                <a:cs typeface="Trade Gothic Next" pitchFamily="34" charset="-120"/>
+              </a:rPr>
+              <a:t>Check your list against this.</a:t>
+            </a:r>
+            <a:endParaRPr lang="en-US" sz="1700" dirty="0"/>
+          </a:p>
+        </p:txBody>
+      </p:sp>
+      <p:sp>
+        <p:nvSpPr>
+          <p:cNvPr id="4" name="Text 5"/>
+          <p:cNvSpPr txBox="1"/>
+          <p:nvPr>
+            <p:ph idx="109" type="body" hasCustomPrompt="1"/>
+          </p:nvPr>
+        </p:nvSpPr>
+        <p:spPr>
+          <a:xfrm>
+            <a:off x="5276088" y="2560320"/>
+            <a:ext cx="2752344" cy="219456"/>
+          </a:xfrm>
+          <a:prstGeom prst="rect">
+            <a:avLst/>
+          </a:prstGeom>
+          <a:noFill/>
+          <a:ln/>
+        </p:spPr>
+        <p:txBody>
+          <a:bodyPr wrap="square" lIns="0" tIns="0" rIns="0" bIns="0" rtlCol="0"/>
+          <a:lstStyle/>
+          <a:p>
+            <a:pPr indent="0" marL="0">
+              <a:buNone/>
+            </a:pPr>
+            <a:r>
+              <a:rPr lang="en-US" sz="1200" b="1" spc="120" kern="0" dirty="0">
+                <a:solidFill>
+                  <a:srgbClr val="2E3338"/>
+                </a:solidFill>
+                <a:latin typeface="Trade Gothic Next" pitchFamily="34" charset="0"/>
+                <a:ea typeface="Trade Gothic Next" pitchFamily="34" charset="-122"/>
+                <a:cs typeface="Trade Gothic Next" pitchFamily="34" charset="-120"/>
+              </a:rPr>
+              <a:t>SETUP</a:t>
+            </a:r>
+            <a:endParaRPr lang="en-US" sz="1200" dirty="0"/>
+          </a:p>
+        </p:txBody>
+      </p:sp>
+      <p:sp>
+        <p:nvSpPr>
+          <p:cNvPr id="5" name="Text 5"/>
+          <p:cNvSpPr txBox="1"/>
+          <p:nvPr>
+            <p:ph idx="110" type="body" hasCustomPrompt="1"/>
+          </p:nvPr>
+        </p:nvSpPr>
+        <p:spPr>
+          <a:xfrm>
+            <a:off x="5276088" y="2852928"/>
+            <a:ext cx="2752344" cy="1901952"/>
+          </a:xfrm>
+          <a:prstGeom prst="rect">
+            <a:avLst/>
+          </a:prstGeom>
+          <a:noFill/>
+          <a:ln/>
+        </p:spPr>
+        <p:txBody>
+          <a:bodyPr wrap="square" lIns="0" tIns="0" rIns="0" bIns="0" rtlCol="0"/>
+          <a:lstStyle/>
+          <a:p>
+            <a:pPr indent="0" marL="0">
+              <a:buNone/>
+            </a:pPr>
+            <a:r>
+              <a:rPr lang="en-US" sz="1600" dirty="0">
+                <a:solidFill>
+                  <a:srgbClr val="14161B"/>
+                </a:solidFill>
+                <a:latin typeface="Trade Gothic Next" pitchFamily="34" charset="0"/>
+                <a:ea typeface="Trade Gothic Next" pitchFamily="34" charset="-122"/>
+                <a:cs typeface="Trade Gothic Next" pitchFamily="34" charset="-120"/>
+              </a:rPr>
+              <a:t>n = 3 gives 3 sublevels:</a:t>
+            </a:r>
+            <a:endParaRPr lang="en-US" sz="1600" dirty="0"/>
+          </a:p>
+          <a:p>
+            <a:pPr indent="0" marL="0">
+              <a:buNone/>
+            </a:pPr>
+            <a:r>
+              <a:rPr lang="en-US" sz="1600" dirty="0">
+                <a:solidFill>
+                  <a:srgbClr val="14161B"/>
+                </a:solidFill>
+                <a:latin typeface="Trade Gothic Next" pitchFamily="34" charset="0"/>
+                <a:ea typeface="Trade Gothic Next" pitchFamily="34" charset="-122"/>
+                <a:cs typeface="Trade Gothic Next" pitchFamily="34" charset="-120"/>
+              </a:rPr>
+              <a:t>3s, 3p, 3d</a:t>
+            </a:r>
+            <a:endParaRPr lang="en-US" sz="1600" dirty="0"/>
+          </a:p>
+        </p:txBody>
+      </p:sp>
+      <p:sp>
+        <p:nvSpPr>
+          <p:cNvPr id="6" name="Text 7"/>
+          <p:cNvSpPr txBox="1"/>
+          <p:nvPr>
+            <p:ph idx="113" type="body" hasCustomPrompt="1"/>
+          </p:nvPr>
+        </p:nvSpPr>
+        <p:spPr>
+          <a:xfrm>
+            <a:off x="8613648" y="2871216"/>
+            <a:ext cx="2688336" cy="1920240"/>
+          </a:xfrm>
+          <a:prstGeom prst="rect">
+            <a:avLst/>
+          </a:prstGeom>
+          <a:noFill/>
+          <a:ln/>
+        </p:spPr>
+        <p:txBody>
+          <a:bodyPr wrap="square" lIns="0" tIns="0" rIns="0" bIns="0" rtlCol="0"/>
+          <a:lstStyle/>
+          <a:p>
+            <a:pPr indent="0" marL="0">
+              <a:buNone/>
+            </a:pPr>
+            <a:r>
+              <a:rPr lang="en-US" sz="1900" dirty="0">
+                <a:solidFill>
+                  <a:srgbClr val="14161B"/>
+                </a:solidFill>
+                <a:latin typeface="Trade Gothic Next" pitchFamily="34" charset="0"/>
+                <a:ea typeface="Trade Gothic Next" pitchFamily="34" charset="-122"/>
+                <a:cs typeface="Trade Gothic Next" pitchFamily="34" charset="-120"/>
+              </a:rPr>
+              <a:t>3s: 1 orbital, 2 e</a:t>
+            </a:r>
+            <a:pPr indent="0" marL="0">
+              <a:buNone/>
+            </a:pPr>
+            <a:r>
+              <a:rPr lang="en-US" sz="1900" baseline="30000" dirty="0">
+                <a:solidFill>
+                  <a:srgbClr val="14161B"/>
+                </a:solidFill>
+                <a:latin typeface="Trade Gothic Next" pitchFamily="34" charset="0"/>
+                <a:ea typeface="Trade Gothic Next" pitchFamily="34" charset="-122"/>
+                <a:cs typeface="Trade Gothic Next" pitchFamily="34" charset="-120"/>
+              </a:rPr>
+              <a:t>−</a:t>
+            </a:r>
+            <a:endParaRPr lang="en-US" sz="1900" dirty="0"/>
+          </a:p>
+          <a:p>
+            <a:pPr indent="0" marL="0">
+              <a:buNone/>
+            </a:pPr>
+            <a:r>
+              <a:rPr lang="en-US" sz="1900" dirty="0">
+                <a:solidFill>
+                  <a:srgbClr val="14161B"/>
+                </a:solidFill>
+                <a:latin typeface="Trade Gothic Next" pitchFamily="34" charset="0"/>
+                <a:ea typeface="Trade Gothic Next" pitchFamily="34" charset="-122"/>
+                <a:cs typeface="Trade Gothic Next" pitchFamily="34" charset="-120"/>
+              </a:rPr>
+              <a:t>3p: 3 orbitals, 6 e</a:t>
+            </a:r>
+            <a:pPr indent="0" marL="0">
+              <a:buNone/>
+            </a:pPr>
+            <a:r>
+              <a:rPr lang="en-US" sz="1900" baseline="30000" dirty="0">
+                <a:solidFill>
+                  <a:srgbClr val="14161B"/>
+                </a:solidFill>
+                <a:latin typeface="Trade Gothic Next" pitchFamily="34" charset="0"/>
+                <a:ea typeface="Trade Gothic Next" pitchFamily="34" charset="-122"/>
+                <a:cs typeface="Trade Gothic Next" pitchFamily="34" charset="-120"/>
+              </a:rPr>
+              <a:t>−</a:t>
+            </a:r>
+            <a:endParaRPr lang="en-US" sz="1900" dirty="0"/>
+          </a:p>
+          <a:p>
+            <a:pPr indent="0" marL="0">
+              <a:buNone/>
+            </a:pPr>
+            <a:r>
+              <a:rPr lang="en-US" sz="1900" dirty="0">
+                <a:solidFill>
+                  <a:srgbClr val="14161B"/>
+                </a:solidFill>
+                <a:latin typeface="Trade Gothic Next" pitchFamily="34" charset="0"/>
+                <a:ea typeface="Trade Gothic Next" pitchFamily="34" charset="-122"/>
+                <a:cs typeface="Trade Gothic Next" pitchFamily="34" charset="-120"/>
+              </a:rPr>
+              <a:t>3d: 5 orbitals, 10 e</a:t>
+            </a:r>
+            <a:pPr indent="0" marL="0">
+              <a:buNone/>
+            </a:pPr>
+            <a:r>
+              <a:rPr lang="en-US" sz="1900" baseline="30000" dirty="0">
+                <a:solidFill>
+                  <a:srgbClr val="14161B"/>
+                </a:solidFill>
+                <a:latin typeface="Trade Gothic Next" pitchFamily="34" charset="0"/>
+                <a:ea typeface="Trade Gothic Next" pitchFamily="34" charset="-122"/>
+                <a:cs typeface="Trade Gothic Next" pitchFamily="34" charset="-120"/>
+              </a:rPr>
+              <a:t>−</a:t>
+            </a:r>
+            <a:endParaRPr lang="en-US" sz="1900" dirty="0"/>
+          </a:p>
+          <a:p>
+            <a:pPr indent="0" marL="0">
+              <a:buNone/>
+            </a:pPr>
+            <a:r>
+              <a:rPr lang="en-US" sz="1900" dirty="0">
+                <a:solidFill>
+                  <a:srgbClr val="14161B"/>
+                </a:solidFill>
+                <a:latin typeface="Trade Gothic Next" pitchFamily="34" charset="0"/>
+                <a:ea typeface="Trade Gothic Next" pitchFamily="34" charset="-122"/>
+                <a:cs typeface="Trade Gothic Next" pitchFamily="34" charset="-120"/>
+              </a:rPr>
+              <a:t>Total: 9 orbitals, 18 e</a:t>
+            </a:r>
+            <a:pPr indent="0" marL="0">
+              <a:buNone/>
+            </a:pPr>
+            <a:r>
+              <a:rPr lang="en-US" sz="1900" baseline="30000" dirty="0">
+                <a:solidFill>
+                  <a:srgbClr val="14161B"/>
+                </a:solidFill>
+                <a:latin typeface="Trade Gothic Next" pitchFamily="34" charset="0"/>
+                <a:ea typeface="Trade Gothic Next" pitchFamily="34" charset="-122"/>
+                <a:cs typeface="Trade Gothic Next" pitchFamily="34" charset="-120"/>
+              </a:rPr>
+              <a:t>−</a:t>
+            </a:r>
+            <a:endParaRPr lang="en-US" sz="1900" dirty="0"/>
+          </a:p>
+        </p:txBody>
+      </p:sp>
+      <p:sp>
+        <p:nvSpPr>
+          <p:cNvPr id="7" name="Text 9"/>
+          <p:cNvSpPr txBox="1"/>
+          <p:nvPr>
+            <p:ph idx="116" type="body" hasCustomPrompt="1"/>
+          </p:nvPr>
+        </p:nvSpPr>
+        <p:spPr>
+          <a:xfrm>
+            <a:off x="2240280" y="5212080"/>
+            <a:ext cx="8991295" cy="402336"/>
+          </a:xfrm>
+          <a:prstGeom prst="rect">
+            <a:avLst/>
+          </a:prstGeom>
+          <a:noFill/>
+          <a:ln/>
+        </p:spPr>
+        <p:txBody>
+          <a:bodyPr wrap="square" lIns="0" tIns="0" rIns="0" bIns="0" rtlCol="0" anchor="ctr"/>
+          <a:lstStyle/>
+          <a:p>
+            <a:pPr indent="0" marL="0">
+              <a:buNone/>
+            </a:pPr>
+            <a:r>
+              <a:rPr lang="en-US" sz="1600" b="1" dirty="0">
+                <a:solidFill>
+                  <a:srgbClr val="EDF0E5"/>
+                </a:solidFill>
+                <a:latin typeface="Trade Gothic Next" pitchFamily="34" charset="0"/>
+                <a:ea typeface="Trade Gothic Next" pitchFamily="34" charset="-122"/>
+                <a:cs typeface="Trade Gothic Next" pitchFamily="34" charset="-120"/>
+              </a:rPr>
+              <a:t>n = 3 holds 9 orbitals (n</a:t>
+            </a:r>
+            <a:pPr indent="0" marL="0">
+              <a:buNone/>
+            </a:pPr>
+            <a:r>
+              <a:rPr lang="en-US" sz="1600" b="1" baseline="30000" dirty="0">
+                <a:solidFill>
+                  <a:srgbClr val="EDF0E5"/>
+                </a:solidFill>
+                <a:latin typeface="Trade Gothic Next" pitchFamily="34" charset="0"/>
+                <a:ea typeface="Trade Gothic Next" pitchFamily="34" charset="-122"/>
+                <a:cs typeface="Trade Gothic Next" pitchFamily="34" charset="-120"/>
+              </a:rPr>
+              <a:t>2</a:t>
+            </a:r>
+            <a:pPr indent="0" marL="0">
+              <a:buNone/>
+            </a:pPr>
+            <a:r>
+              <a:rPr lang="en-US" sz="1600" b="1" dirty="0">
+                <a:solidFill>
+                  <a:srgbClr val="EDF0E5"/>
+                </a:solidFill>
+                <a:latin typeface="Trade Gothic Next" pitchFamily="34" charset="0"/>
+                <a:ea typeface="Trade Gothic Next" pitchFamily="34" charset="-122"/>
+                <a:cs typeface="Trade Gothic Next" pitchFamily="34" charset="-120"/>
+              </a:rPr>
+              <a:t>) and 18 electrons (2n</a:t>
+            </a:r>
+            <a:pPr indent="0" marL="0">
+              <a:buNone/>
+            </a:pPr>
+            <a:r>
+              <a:rPr lang="en-US" sz="1600" b="1" baseline="30000" dirty="0">
+                <a:solidFill>
+                  <a:srgbClr val="EDF0E5"/>
+                </a:solidFill>
+                <a:latin typeface="Trade Gothic Next" pitchFamily="34" charset="0"/>
+                <a:ea typeface="Trade Gothic Next" pitchFamily="34" charset="-122"/>
+                <a:cs typeface="Trade Gothic Next" pitchFamily="34" charset="-120"/>
+              </a:rPr>
+              <a:t>2</a:t>
+            </a:r>
+            <a:pPr indent="0" marL="0">
+              <a:buNone/>
+            </a:pPr>
+            <a:r>
+              <a:rPr lang="en-US" sz="1600" b="1" dirty="0">
+                <a:solidFill>
+                  <a:srgbClr val="EDF0E5"/>
+                </a:solidFill>
+                <a:latin typeface="Trade Gothic Next" pitchFamily="34" charset="0"/>
+                <a:ea typeface="Trade Gothic Next" pitchFamily="34" charset="-122"/>
+                <a:cs typeface="Trade Gothic Next" pitchFamily="34" charset="-120"/>
+              </a:rPr>
+              <a:t>).</a:t>
+            </a:r>
+            <a:endParaRPr lang="en-US" sz="1600" dirty="0"/>
+          </a:p>
+        </p:txBody>
+      </p:sp>
+      <p:sp>
+        <p:nvSpPr>
+          <p:cNvPr id="8" name="Text 1"/>
+          <p:cNvSpPr txBox="1"/>
+          <p:nvPr>
+            <p:ph idx="101" type="body" hasCustomPrompt="1"/>
+          </p:nvPr>
+        </p:nvSpPr>
+        <p:spPr>
+          <a:xfrm>
+            <a:off x="685800" y="384048"/>
+            <a:ext cx="6400800" cy="237744"/>
+          </a:xfrm>
+          <a:prstGeom prst="rect">
+            <a:avLst/>
+          </a:prstGeom>
+          <a:noFill/>
+          <a:ln/>
+        </p:spPr>
+        <p:txBody>
+          <a:bodyPr wrap="square" lIns="0" tIns="0" rIns="0" bIns="0" rtlCol="0" anchor="ctr"/>
+          <a:lstStyle/>
+          <a:p>
+            <a:pPr indent="0" marL="0">
+              <a:buNone/>
+            </a:pPr>
+            <a:r>
+              <a:rPr lang="en-US" sz="1100" b="1" spc="160" kern="0" dirty="0">
+                <a:solidFill>
+                  <a:srgbClr val="14161B"/>
+                </a:solidFill>
+                <a:latin typeface="Trade Gothic Next" pitchFamily="34" charset="0"/>
+                <a:ea typeface="Trade Gothic Next" pitchFamily="34" charset="-122"/>
+                <a:cs typeface="Trade Gothic Next" pitchFamily="34" charset="-120"/>
+              </a:rPr>
+              <a:t>UNIT 02  •  CHEMISTRY</a:t>
+            </a:r>
+            <a:endParaRPr lang="en-US" sz="1100" dirty="0"/>
+          </a:p>
+        </p:txBody>
+      </p:sp>
+      <p:sp>
+        <p:nvSpPr>
+          <p:cNvPr id="9" name="Text 10"/>
+          <p:cNvSpPr txBox="1"/>
+          <p:nvPr>
+            <p:ph idx="118" type="body" hasCustomPrompt="1"/>
+          </p:nvPr>
+        </p:nvSpPr>
+        <p:spPr>
+          <a:xfrm>
+            <a:off x="8762695" y="6382512"/>
+            <a:ext cx="2743200" cy="237744"/>
+          </a:xfrm>
+          <a:prstGeom prst="rect">
+            <a:avLst/>
+          </a:prstGeom>
+          <a:noFill/>
+          <a:ln/>
+        </p:spPr>
+        <p:txBody>
+          <a:bodyPr wrap="square" lIns="0" tIns="0" rIns="0" bIns="0" rtlCol="0" anchor="ctr"/>
+          <a:lstStyle/>
+          <a:p>
+            <a:pPr algn="r" indent="0" marL="0">
+              <a:buNone/>
+            </a:pPr>
+            <a:r>
+              <a:rPr lang="en-US" sz="1000" b="1" spc="140" kern="0" dirty="0">
+                <a:solidFill>
+                  <a:srgbClr val="2E3338"/>
+                </a:solidFill>
+                <a:latin typeface="Trade Gothic Next" pitchFamily="34" charset="0"/>
+                <a:ea typeface="Trade Gothic Next" pitchFamily="34" charset="-122"/>
+                <a:cs typeface="Trade Gothic Next" pitchFamily="34" charset="-120"/>
+              </a:rPr>
+              <a:t>U02 • S02.2</a:t>
+            </a:r>
+            <a:endParaRPr lang="en-US" sz="1000" dirty="0"/>
+          </a:p>
+        </p:txBody>
+      </p:sp>
+      <p:sp>
+        <p:nvSpPr>
+          <p:cNvPr id="11" name="Text 4"/>
+          <p:cNvSpPr txBox="1"/>
+          <p:nvPr>
+            <p:ph idx="107" hasCustomPrompt="1"/>
+          </p:nvPr>
+        </p:nvSpPr>
+        <p:spPr>
+          <a:xfrm>
+            <a:off x="832104" y="2542032"/>
+            <a:ext cx="3867912" cy="2267712"/>
+          </a:xfrm>
+          <a:prstGeom prst="rect">
+            <a:avLst/>
+          </a:prstGeom>
+          <a:noFill/>
+          <a:ln/>
+        </p:spPr>
+        <p:txBody>
+          <a:bodyPr wrap="square" lIns="0" tIns="0" rIns="0" bIns="0" rtlCol="0" anchor="ctr"/>
+          <a:lstStyle/>
+          <a:p>
+            <a:pPr algn="ctr" indent="0" marL="0">
+              <a:buNone/>
+            </a:pPr>
+            <a:endParaRPr lang="en-US" sz="1200" dirty="0"/>
+          </a:p>
+        </p:txBody>
+      </p:sp>
+    </p:spTree>
+  </p:cSld>
+  <p:clrMapOvr>
+    <a:masterClrMapping/>
+  </p:clrMapOvr>
+</p:sld>
+</file>
+
+<file path=ppt/slides/slide13.xml><?xml version="1.0" encoding="utf-8"?>
+<p:sld xmlns:a="http://schemas.openxmlformats.org/drawingml/2006/main" xmlns:r="http://schemas.openxmlformats.org/officeDocument/2006/relationships" xmlns:p="http://schemas.openxmlformats.org/presentationml/2006/main">
+  <p:cSld name="Slide 13">
     <p:spTree>
       <p:nvGrpSpPr>
         <p:cNvPr id="1" name=""/>
@@ -14515,7 +15273,35 @@
                 <a:ea typeface="Trade Gothic Next" pitchFamily="34" charset="-122"/>
                 <a:cs typeface="Trade Gothic Next" pitchFamily="34" charset="-120"/>
               </a:rPr>
-              <a:t>n² : 1, 4, 9, 16</a:t>
+              <a:t>n</a:t>
+            </a:r>
+            <a:pPr indent="0" marL="0">
+              <a:buNone/>
+            </a:pPr>
+            <a:r>
+              <a:rPr lang="en-US" sz="1600" baseline="30000" dirty="0">
+                <a:solidFill>
+                  <a:srgbClr val="14161B"/>
+                </a:solidFill>
+                <a:latin typeface="Trade Gothic Next" pitchFamily="34" charset="0"/>
+                <a:ea typeface="Trade Gothic Next" pitchFamily="34" charset="-122"/>
+                <a:cs typeface="Trade Gothic Next" pitchFamily="34" charset="-120"/>
+              </a:rPr>
+              <a:t>2</a:t>
+            </a:r>
+            <a:pPr indent="0" marL="0">
+              <a:buNone/>
+            </a:pPr>
+            <a:r>
+              <a:rPr lang="en-US" sz="1600" dirty="0">
+                <a:solidFill>
+                  <a:srgbClr val="14161B"/>
+                </a:solidFill>
+                <a:latin typeface="Trade Gothic Next" pitchFamily="34" charset="0"/>
+                <a:ea typeface="Trade Gothic Next" pitchFamily="34" charset="-122"/>
+                <a:cs typeface="Trade Gothic Next" pitchFamily="34" charset="-120"/>
+              </a:rPr>
+              <a:t> : 1, 4, 9, 16</a:t>
             </a:r>
             <a:endParaRPr lang="en-US" sz="1600" dirty="0"/>
           </a:p>
@@ -14597,7 +15383,35 @@
                 <a:ea typeface="Trade Gothic Next" pitchFamily="34" charset="-122"/>
                 <a:cs typeface="Trade Gothic Next" pitchFamily="34" charset="-120"/>
               </a:rPr>
-              <a:t>2n² : 2, 8, 18, 32</a:t>
+              <a:t>2n</a:t>
+            </a:r>
+            <a:pPr indent="0" marL="0">
+              <a:buNone/>
+            </a:pPr>
+            <a:r>
+              <a:rPr lang="en-US" sz="1600" baseline="30000" dirty="0">
+                <a:solidFill>
+                  <a:srgbClr val="14161B"/>
+                </a:solidFill>
+                <a:latin typeface="Trade Gothic Next" pitchFamily="34" charset="0"/>
+                <a:ea typeface="Trade Gothic Next" pitchFamily="34" charset="-122"/>
+                <a:cs typeface="Trade Gothic Next" pitchFamily="34" charset="-120"/>
+              </a:rPr>
+              <a:t>2</a:t>
+            </a:r>
+            <a:pPr indent="0" marL="0">
+              <a:buNone/>
+            </a:pPr>
+            <a:r>
+              <a:rPr lang="en-US" sz="1600" dirty="0">
+                <a:solidFill>
+                  <a:srgbClr val="14161B"/>
+                </a:solidFill>
+                <a:latin typeface="Trade Gothic Next" pitchFamily="34" charset="0"/>
+                <a:ea typeface="Trade Gothic Next" pitchFamily="34" charset="-122"/>
+                <a:cs typeface="Trade Gothic Next" pitchFamily="34" charset="-120"/>
+              </a:rPr>
+              <a:t> : 2, 8, 18, 32</a:t>
             </a:r>
             <a:endParaRPr lang="en-US" sz="1600" dirty="0"/>
           </a:p>
@@ -14769,7 +15583,7 @@
       </p:sp>
       <p:sp>
         <p:nvSpPr>
-          <p:cNvPr id="13" name="Text 3"/>
+          <p:cNvPr id="14" name="Text 3"/>
           <p:cNvSpPr txBox="1"/>
           <p:nvPr>
             <p:ph idx="106" type="body" hasCustomPrompt="1"/>
@@ -14805,9 +15619,9 @@
 </p:sld>
 </file>
 
-<file path=ppt/slides/slide13.xml><?xml version="1.0" encoding="utf-8"?>
+<file path=ppt/slides/slide14.xml><?xml version="1.0" encoding="utf-8"?>
 <p:sld xmlns:a="http://schemas.openxmlformats.org/drawingml/2006/main" xmlns:r="http://schemas.openxmlformats.org/officeDocument/2006/relationships" xmlns:p="http://schemas.openxmlformats.org/presentationml/2006/main">
-  <p:cSld name="Slide 13">
+  <p:cSld name="Slide 14">
     <p:spTree>
       <p:nvGrpSpPr>
         <p:cNvPr id="1" name=""/>
@@ -15210,7 +16024,7 @@
       </p:sp>
       <p:sp>
         <p:nvSpPr>
-          <p:cNvPr id="11" name="Text 3"/>
+          <p:cNvPr id="12" name="Text 3"/>
           <p:cNvSpPr txBox="1"/>
           <p:nvPr>
             <p:ph idx="106" hasCustomPrompt="1"/>
@@ -15246,9 +16060,9 @@
 </p:sld>
 </file>
 
-<file path=ppt/slides/slide14.xml><?xml version="1.0" encoding="utf-8"?>
+<file path=ppt/slides/slide15.xml><?xml version="1.0" encoding="utf-8"?>
 <p:sld xmlns:a="http://schemas.openxmlformats.org/drawingml/2006/main" xmlns:r="http://schemas.openxmlformats.org/officeDocument/2006/relationships" xmlns:p="http://schemas.openxmlformats.org/presentationml/2006/main">
-  <p:cSld name="Slide 14">
+  <p:cSld name="Slide 15">
     <p:spTree>
       <p:nvGrpSpPr>
         <p:cNvPr id="1" name=""/>
@@ -15486,7 +16300,7 @@
                 <a:ea typeface="Trade Gothic Next" pitchFamily="34" charset="-122"/>
                 <a:cs typeface="Trade Gothic Next" pitchFamily="34" charset="-120"/>
               </a:rPr>
-              <a:t>THE SURPRISE</a:t>
+              <a:t>ORDER RULE</a:t>
             </a:r>
             <a:endParaRPr lang="en-US" sz="1200" dirty="0"/>
           </a:p>
@@ -15699,7 +16513,7 @@
       </p:sp>
       <p:sp>
         <p:nvSpPr>
-          <p:cNvPr id="13" name="Text 3"/>
+          <p:cNvPr id="14" name="Text 3"/>
           <p:cNvSpPr txBox="1"/>
           <p:nvPr>
             <p:ph idx="106" type="body" hasCustomPrompt="1"/>
@@ -15724,535 +16538,6 @@
               <a:buNone/>
             </a:pPr>
             <a:endParaRPr lang="en-US" sz="2000" dirty="0"/>
-          </a:p>
-        </p:txBody>
-      </p:sp>
-    </p:spTree>
-  </p:cSld>
-  <p:clrMapOvr>
-    <a:masterClrMapping/>
-  </p:clrMapOvr>
-</p:sld>
-</file>
-
-<file path=ppt/slides/slide15.xml><?xml version="1.0" encoding="utf-8"?>
-<p:sld xmlns:a="http://schemas.openxmlformats.org/drawingml/2006/main" xmlns:r="http://schemas.openxmlformats.org/officeDocument/2006/relationships" xmlns:p="http://schemas.openxmlformats.org/presentationml/2006/main">
-  <p:cSld name="Slide 15">
-    <p:spTree>
-      <p:nvGrpSpPr>
-        <p:cNvPr id="1" name=""/>
-        <p:cNvGrpSpPr/>
-        <p:nvPr/>
-      </p:nvGrpSpPr>
-      <p:grpSpPr>
-        <a:xfrm>
-          <a:off x="0" y="0"/>
-          <a:ext cx="0" cy="0"/>
-          <a:chOff x="0" y="0"/>
-          <a:chExt cx="0" cy="0"/>
-        </a:xfrm>
-      </p:grpSpPr>
-      <p:sp>
-        <p:nvSpPr>
-          <p:cNvPr id="2" name="Text 2"/>
-          <p:cNvSpPr txBox="1"/>
-          <p:nvPr>
-            <p:ph idx="103" type="title" hasCustomPrompt="1"/>
-          </p:nvPr>
-        </p:nvSpPr>
-        <p:spPr>
-          <a:xfrm>
-            <a:off x="685800" y="932688"/>
-            <a:ext cx="7863840" cy="868680"/>
-          </a:xfrm>
-          <a:prstGeom prst="rect">
-            <a:avLst/>
-          </a:prstGeom>
-          <a:noFill/>
-          <a:ln/>
-        </p:spPr>
-        <p:txBody>
-          <a:bodyPr wrap="square" lIns="0" tIns="0" rIns="0" bIns="0" rtlCol="0" anchor="t"/>
-          <a:lstStyle/>
-          <a:p>
-            <a:pPr algn="l" indent="0" marL="0">
-              <a:buNone/>
-            </a:pPr>
-            <a:r>
-              <a:rPr lang="en-US" sz="2800" b="1" dirty="0">
-                <a:solidFill>
-                  <a:srgbClr val="14161B"/>
-                </a:solidFill>
-                <a:latin typeface="Trade Gothic Next" pitchFamily="34" charset="0"/>
-                <a:ea typeface="Trade Gothic Next" pitchFamily="34" charset="-122"/>
-                <a:cs typeface="Trade Gothic Next" pitchFamily="34" charset="-120"/>
-              </a:rPr>
-              <a:t>Example: Capacity</a:t>
-            </a:r>
-            <a:endParaRPr lang="en-US" sz="2800" dirty="0"/>
-          </a:p>
-        </p:txBody>
-      </p:sp>
-      <p:sp>
-        <p:nvSpPr>
-          <p:cNvPr id="3" name="Text 2"/>
-          <p:cNvSpPr txBox="1"/>
-          <p:nvPr>
-            <p:ph idx="104" type="body" hasCustomPrompt="1"/>
-          </p:nvPr>
-        </p:nvSpPr>
-        <p:spPr>
-          <a:xfrm>
-            <a:off x="685800" y="1847088"/>
-            <a:ext cx="7863840" cy="384048"/>
-          </a:xfrm>
-          <a:prstGeom prst="rect">
-            <a:avLst/>
-          </a:prstGeom>
-          <a:noFill/>
-          <a:ln/>
-        </p:spPr>
-        <p:txBody>
-          <a:bodyPr wrap="square" lIns="0" tIns="0" rIns="0" bIns="0" rtlCol="0"/>
-          <a:lstStyle/>
-          <a:p>
-            <a:pPr indent="0" marL="0">
-              <a:buNone/>
-            </a:pPr>
-            <a:r>
-              <a:rPr lang="en-US" sz="1700" dirty="0">
-                <a:solidFill>
-                  <a:srgbClr val="2E3338"/>
-                </a:solidFill>
-                <a:latin typeface="Trade Gothic Next" pitchFamily="34" charset="0"/>
-                <a:ea typeface="Trade Gothic Next" pitchFamily="34" charset="-122"/>
-                <a:cs typeface="Trade Gothic Next" pitchFamily="34" charset="-120"/>
-              </a:rPr>
-              <a:t>Your turn first. Then we compare.</a:t>
-            </a:r>
-            <a:endParaRPr lang="en-US" sz="1700" dirty="0"/>
-          </a:p>
-        </p:txBody>
-      </p:sp>
-      <p:sp>
-        <p:nvSpPr>
-          <p:cNvPr id="4" name="Text 6"/>
-          <p:cNvSpPr txBox="1"/>
-          <p:nvPr>
-            <p:ph idx="110" type="body" hasCustomPrompt="1"/>
-          </p:nvPr>
-        </p:nvSpPr>
-        <p:spPr>
-          <a:xfrm>
-            <a:off x="886968" y="2798064"/>
-            <a:ext cx="4992624" cy="548640"/>
-          </a:xfrm>
-          <a:prstGeom prst="rect">
-            <a:avLst/>
-          </a:prstGeom>
-          <a:noFill/>
-          <a:ln/>
-        </p:spPr>
-        <p:txBody>
-          <a:bodyPr wrap="square" lIns="0" tIns="0" rIns="0" bIns="0" rtlCol="0"/>
-          <a:lstStyle/>
-          <a:p>
-            <a:pPr indent="0" marL="0">
-              <a:buNone/>
-            </a:pPr>
-            <a:r>
-              <a:rPr lang="en-US" sz="1600" dirty="0">
-                <a:solidFill>
-                  <a:srgbClr val="EDF0E5"/>
-                </a:solidFill>
-                <a:latin typeface="Trade Gothic Next" pitchFamily="34" charset="0"/>
-                <a:ea typeface="Trade Gothic Next" pitchFamily="34" charset="-122"/>
-                <a:cs typeface="Trade Gothic Next" pitchFamily="34" charset="-120"/>
-              </a:rPr>
-              <a:t>What is the maximum number of electrons in the 4f sublevel? In the n = 2 level?</a:t>
-            </a:r>
-            <a:endParaRPr lang="en-US" sz="1600" dirty="0"/>
-          </a:p>
-        </p:txBody>
-      </p:sp>
-      <p:sp>
-        <p:nvSpPr>
-          <p:cNvPr id="5" name="Text 7"/>
-          <p:cNvSpPr txBox="1"/>
-          <p:nvPr>
-            <p:ph idx="112" type="body" hasCustomPrompt="1"/>
-          </p:nvPr>
-        </p:nvSpPr>
-        <p:spPr>
-          <a:xfrm>
-            <a:off x="886968" y="3776472"/>
-            <a:ext cx="2203704" cy="219456"/>
-          </a:xfrm>
-          <a:prstGeom prst="rect">
-            <a:avLst/>
-          </a:prstGeom>
-          <a:noFill/>
-          <a:ln/>
-        </p:spPr>
-        <p:txBody>
-          <a:bodyPr wrap="square" lIns="0" tIns="0" rIns="0" bIns="0" rtlCol="0"/>
-          <a:lstStyle/>
-          <a:p>
-            <a:pPr indent="0" marL="0">
-              <a:buNone/>
-            </a:pPr>
-            <a:r>
-              <a:rPr lang="en-US" sz="1200" b="1" spc="120" kern="0" dirty="0">
-                <a:solidFill>
-                  <a:srgbClr val="2E3338"/>
-                </a:solidFill>
-                <a:latin typeface="Trade Gothic Next" pitchFamily="34" charset="0"/>
-                <a:ea typeface="Trade Gothic Next" pitchFamily="34" charset="-122"/>
-                <a:cs typeface="Trade Gothic Next" pitchFamily="34" charset="-120"/>
-              </a:rPr>
-              <a:t>GIVEN</a:t>
-            </a:r>
-            <a:endParaRPr lang="en-US" sz="1200" dirty="0"/>
-          </a:p>
-        </p:txBody>
-      </p:sp>
-      <p:sp>
-        <p:nvSpPr>
-          <p:cNvPr id="6" name="Text 7"/>
-          <p:cNvSpPr txBox="1"/>
-          <p:nvPr>
-            <p:ph idx="113" type="body" hasCustomPrompt="1"/>
-          </p:nvPr>
-        </p:nvSpPr>
-        <p:spPr>
-          <a:xfrm>
-            <a:off x="886968" y="4069080"/>
-            <a:ext cx="2203704" cy="1078992"/>
-          </a:xfrm>
-          <a:prstGeom prst="rect">
-            <a:avLst/>
-          </a:prstGeom>
-          <a:noFill/>
-          <a:ln/>
-        </p:spPr>
-        <p:txBody>
-          <a:bodyPr wrap="square" lIns="0" tIns="0" rIns="0" bIns="0" rtlCol="0"/>
-          <a:lstStyle/>
-          <a:p>
-            <a:pPr indent="0" marL="0">
-              <a:buNone/>
-            </a:pPr>
-            <a:r>
-              <a:rPr lang="en-US" sz="1600" dirty="0">
-                <a:solidFill>
-                  <a:srgbClr val="14161B"/>
-                </a:solidFill>
-                <a:latin typeface="Trade Gothic Next" pitchFamily="34" charset="0"/>
-                <a:ea typeface="Trade Gothic Next" pitchFamily="34" charset="-122"/>
-                <a:cs typeface="Trade Gothic Next" pitchFamily="34" charset="-120"/>
-              </a:rPr>
-              <a:t>4f sublevel</a:t>
-            </a:r>
-            <a:endParaRPr lang="en-US" sz="1600" dirty="0"/>
-          </a:p>
-          <a:p>
-            <a:pPr indent="0" marL="0">
-              <a:buNone/>
-            </a:pPr>
-            <a:r>
-              <a:rPr lang="en-US" sz="1600" dirty="0">
-                <a:solidFill>
-                  <a:srgbClr val="14161B"/>
-                </a:solidFill>
-                <a:latin typeface="Trade Gothic Next" pitchFamily="34" charset="0"/>
-                <a:ea typeface="Trade Gothic Next" pitchFamily="34" charset="-122"/>
-                <a:cs typeface="Trade Gothic Next" pitchFamily="34" charset="-120"/>
-              </a:rPr>
-              <a:t>n = 2 level</a:t>
-            </a:r>
-            <a:endParaRPr lang="en-US" sz="1600" dirty="0"/>
-          </a:p>
-        </p:txBody>
-      </p:sp>
-      <p:sp>
-        <p:nvSpPr>
-          <p:cNvPr id="7" name="Text 8"/>
-          <p:cNvSpPr txBox="1"/>
-          <p:nvPr>
-            <p:ph idx="115" type="body" hasCustomPrompt="1"/>
-          </p:nvPr>
-        </p:nvSpPr>
-        <p:spPr>
-          <a:xfrm>
-            <a:off x="3675888" y="3776472"/>
-            <a:ext cx="2203704" cy="219456"/>
-          </a:xfrm>
-          <a:prstGeom prst="rect">
-            <a:avLst/>
-          </a:prstGeom>
-          <a:noFill/>
-          <a:ln/>
-        </p:spPr>
-        <p:txBody>
-          <a:bodyPr wrap="square" lIns="0" tIns="0" rIns="0" bIns="0" rtlCol="0"/>
-          <a:lstStyle/>
-          <a:p>
-            <a:pPr indent="0" marL="0">
-              <a:buNone/>
-            </a:pPr>
-            <a:r>
-              <a:rPr lang="en-US" sz="1200" b="1" spc="120" kern="0" dirty="0">
-                <a:solidFill>
-                  <a:srgbClr val="2E3338"/>
-                </a:solidFill>
-                <a:latin typeface="Trade Gothic Next" pitchFamily="34" charset="0"/>
-                <a:ea typeface="Trade Gothic Next" pitchFamily="34" charset="-122"/>
-                <a:cs typeface="Trade Gothic Next" pitchFamily="34" charset="-120"/>
-              </a:rPr>
-              <a:t>NEED</a:t>
-            </a:r>
-            <a:endParaRPr lang="en-US" sz="1200" dirty="0"/>
-          </a:p>
-        </p:txBody>
-      </p:sp>
-      <p:sp>
-        <p:nvSpPr>
-          <p:cNvPr id="8" name="Text 8"/>
-          <p:cNvSpPr txBox="1"/>
-          <p:nvPr>
-            <p:ph idx="116" type="body" hasCustomPrompt="1"/>
-          </p:nvPr>
-        </p:nvSpPr>
-        <p:spPr>
-          <a:xfrm>
-            <a:off x="3675888" y="4069080"/>
-            <a:ext cx="2203704" cy="1078992"/>
-          </a:xfrm>
-          <a:prstGeom prst="rect">
-            <a:avLst/>
-          </a:prstGeom>
-          <a:noFill/>
-          <a:ln/>
-        </p:spPr>
-        <p:txBody>
-          <a:bodyPr wrap="square" lIns="0" tIns="0" rIns="0" bIns="0" rtlCol="0"/>
-          <a:lstStyle/>
-          <a:p>
-            <a:pPr indent="0" marL="0">
-              <a:buNone/>
-            </a:pPr>
-            <a:r>
-              <a:rPr lang="en-US" sz="1600" dirty="0">
-                <a:solidFill>
-                  <a:srgbClr val="14161B"/>
-                </a:solidFill>
-                <a:latin typeface="Trade Gothic Next" pitchFamily="34" charset="0"/>
-                <a:ea typeface="Trade Gothic Next" pitchFamily="34" charset="-122"/>
-                <a:cs typeface="Trade Gothic Next" pitchFamily="34" charset="-120"/>
-              </a:rPr>
-              <a:t>Electrons in 4f</a:t>
-            </a:r>
-            <a:endParaRPr lang="en-US" sz="1600" dirty="0"/>
-          </a:p>
-          <a:p>
-            <a:pPr indent="0" marL="0">
-              <a:buNone/>
-            </a:pPr>
-            <a:r>
-              <a:rPr lang="en-US" sz="1600" dirty="0">
-                <a:solidFill>
-                  <a:srgbClr val="14161B"/>
-                </a:solidFill>
-                <a:latin typeface="Trade Gothic Next" pitchFamily="34" charset="0"/>
-                <a:ea typeface="Trade Gothic Next" pitchFamily="34" charset="-122"/>
-                <a:cs typeface="Trade Gothic Next" pitchFamily="34" charset="-120"/>
-              </a:rPr>
-              <a:t>Electrons in n = 2</a:t>
-            </a:r>
-            <a:endParaRPr lang="en-US" sz="1600" dirty="0"/>
-          </a:p>
-        </p:txBody>
-      </p:sp>
-      <p:sp>
-        <p:nvSpPr>
-          <p:cNvPr id="9" name="Text 10"/>
-          <p:cNvSpPr txBox="1"/>
-          <p:nvPr>
-            <p:ph idx="119" type="body" hasCustomPrompt="1"/>
-          </p:nvPr>
-        </p:nvSpPr>
-        <p:spPr>
-          <a:xfrm>
-            <a:off x="6464808" y="2880360"/>
-            <a:ext cx="4837176" cy="2286000"/>
-          </a:xfrm>
-          <a:prstGeom prst="rect">
-            <a:avLst/>
-          </a:prstGeom>
-          <a:noFill/>
-          <a:ln/>
-        </p:spPr>
-        <p:txBody>
-          <a:bodyPr wrap="square" lIns="0" tIns="0" rIns="0" bIns="0" rtlCol="0"/>
-          <a:lstStyle/>
-          <a:p>
-            <a:pPr indent="0" marL="0">
-              <a:buNone/>
-            </a:pPr>
-            <a:endParaRPr lang="en-US" sz="1900" dirty="0"/>
-          </a:p>
-        </p:txBody>
-      </p:sp>
-      <p:sp>
-        <p:nvSpPr>
-          <p:cNvPr id="10" name="Text 12"/>
-          <p:cNvSpPr txBox="1"/>
-          <p:nvPr>
-            <p:ph idx="122" type="body" hasCustomPrompt="1"/>
-          </p:nvPr>
-        </p:nvSpPr>
-        <p:spPr>
-          <a:xfrm>
-            <a:off x="2240280" y="5605272"/>
-            <a:ext cx="8991295" cy="402336"/>
-          </a:xfrm>
-          <a:prstGeom prst="rect">
-            <a:avLst/>
-          </a:prstGeom>
-          <a:noFill/>
-          <a:ln/>
-        </p:spPr>
-        <p:txBody>
-          <a:bodyPr wrap="square" lIns="0" tIns="0" rIns="0" bIns="0" rtlCol="0" anchor="ctr"/>
-          <a:lstStyle/>
-          <a:p>
-            <a:pPr indent="0" marL="0">
-              <a:buNone/>
-            </a:pPr>
-            <a:r>
-              <a:rPr lang="en-US" sz="1600" b="1" dirty="0">
-                <a:solidFill>
-                  <a:srgbClr val="EDF0E5"/>
-                </a:solidFill>
-                <a:latin typeface="Trade Gothic Next" pitchFamily="34" charset="0"/>
-                <a:ea typeface="Trade Gothic Next" pitchFamily="34" charset="-122"/>
-                <a:cs typeface="Trade Gothic Next" pitchFamily="34" charset="-120"/>
-              </a:rPr>
-              <a:t>Electrons in a sublevel = orbitals × 2.</a:t>
-            </a:r>
-            <a:endParaRPr lang="en-US" sz="1600" dirty="0"/>
-          </a:p>
-        </p:txBody>
-      </p:sp>
-      <p:sp>
-        <p:nvSpPr>
-          <p:cNvPr id="11" name="Text 1"/>
-          <p:cNvSpPr txBox="1"/>
-          <p:nvPr>
-            <p:ph idx="101" type="body" hasCustomPrompt="1"/>
-          </p:nvPr>
-        </p:nvSpPr>
-        <p:spPr>
-          <a:xfrm>
-            <a:off x="685800" y="384048"/>
-            <a:ext cx="6400800" cy="237744"/>
-          </a:xfrm>
-          <a:prstGeom prst="rect">
-            <a:avLst/>
-          </a:prstGeom>
-          <a:noFill/>
-          <a:ln/>
-        </p:spPr>
-        <p:txBody>
-          <a:bodyPr wrap="square" lIns="0" tIns="0" rIns="0" bIns="0" rtlCol="0" anchor="ctr"/>
-          <a:lstStyle/>
-          <a:p>
-            <a:pPr indent="0" marL="0">
-              <a:buNone/>
-            </a:pPr>
-            <a:r>
-              <a:rPr lang="en-US" sz="1100" b="1" spc="160" kern="0" dirty="0">
-                <a:solidFill>
-                  <a:srgbClr val="14161B"/>
-                </a:solidFill>
-                <a:latin typeface="Trade Gothic Next" pitchFamily="34" charset="0"/>
-                <a:ea typeface="Trade Gothic Next" pitchFamily="34" charset="-122"/>
-                <a:cs typeface="Trade Gothic Next" pitchFamily="34" charset="-120"/>
-              </a:rPr>
-              <a:t>UNIT 02  •  CHEMISTRY</a:t>
-            </a:r>
-            <a:endParaRPr lang="en-US" sz="1100" dirty="0"/>
-          </a:p>
-        </p:txBody>
-      </p:sp>
-      <p:sp>
-        <p:nvSpPr>
-          <p:cNvPr id="12" name="Text 13"/>
-          <p:cNvSpPr txBox="1"/>
-          <p:nvPr>
-            <p:ph idx="124" type="body" hasCustomPrompt="1"/>
-          </p:nvPr>
-        </p:nvSpPr>
-        <p:spPr>
-          <a:xfrm>
-            <a:off x="8762695" y="6382512"/>
-            <a:ext cx="2743200" cy="237744"/>
-          </a:xfrm>
-          <a:prstGeom prst="rect">
-            <a:avLst/>
-          </a:prstGeom>
-          <a:noFill/>
-          <a:ln/>
-        </p:spPr>
-        <p:txBody>
-          <a:bodyPr wrap="square" lIns="0" tIns="0" rIns="0" bIns="0" rtlCol="0" anchor="ctr"/>
-          <a:lstStyle/>
-          <a:p>
-            <a:pPr algn="r" indent="0" marL="0">
-              <a:buNone/>
-            </a:pPr>
-            <a:r>
-              <a:rPr lang="en-US" sz="1000" b="1" spc="140" kern="0" dirty="0">
-                <a:solidFill>
-                  <a:srgbClr val="2E3338"/>
-                </a:solidFill>
-                <a:latin typeface="Trade Gothic Next" pitchFamily="34" charset="0"/>
-                <a:ea typeface="Trade Gothic Next" pitchFamily="34" charset="-122"/>
-                <a:cs typeface="Trade Gothic Next" pitchFamily="34" charset="-120"/>
-              </a:rPr>
-              <a:t>U02 • S02.2</a:t>
-            </a:r>
-            <a:endParaRPr lang="en-US" sz="1000" dirty="0"/>
-          </a:p>
-        </p:txBody>
-      </p:sp>
-      <p:sp>
-        <p:nvSpPr>
-          <p:cNvPr id="13" name="Text 4"/>
-          <p:cNvSpPr txBox="1"/>
-          <p:nvPr>
-            <p:ph idx="107" hasCustomPrompt="1"/>
-          </p:nvPr>
-        </p:nvSpPr>
-        <p:spPr>
-          <a:xfrm>
-            <a:off x="9262872" y="1088136"/>
-            <a:ext cx="1901952" cy="1069848"/>
-          </a:xfrm>
-          <a:prstGeom prst="rect">
-            <a:avLst/>
-          </a:prstGeom>
-          <a:noFill/>
-          <a:ln/>
-        </p:spPr>
-        <p:txBody>
-          <a:bodyPr wrap="square" lIns="0" tIns="0" rIns="0" bIns="0" rtlCol="0" anchor="ctr"/>
-          <a:lstStyle/>
-          <a:p>
-            <a:pPr algn="ctr" indent="0" marL="0">
-              <a:buNone/>
-            </a:pPr>
-            <a:endParaRPr lang="en-US" sz="1200" dirty="0"/>
           </a:p>
         </p:txBody>
       </p:sp>
@@ -16292,7 +16577,7 @@
         <p:spPr>
           <a:xfrm>
             <a:off x="685800" y="932688"/>
-            <a:ext cx="10820095" cy="868680"/>
+            <a:ext cx="7863840" cy="868680"/>
           </a:xfrm>
           <a:prstGeom prst="rect">
             <a:avLst/>
@@ -16316,7 +16601,7 @@
                 <a:ea typeface="Trade Gothic Next" pitchFamily="34" charset="-122"/>
                 <a:cs typeface="Trade Gothic Next" pitchFamily="34" charset="-120"/>
               </a:rPr>
-              <a:t>Capacity, Worked</a:t>
+              <a:t>Example: Capacity</a:t>
             </a:r>
             <a:endParaRPr lang="en-US" sz="2800" dirty="0"/>
           </a:p>
@@ -16333,7 +16618,7 @@
         <p:spPr>
           <a:xfrm>
             <a:off x="685800" y="1847088"/>
-            <a:ext cx="10820095" cy="384048"/>
+            <a:ext cx="7863840" cy="384048"/>
           </a:xfrm>
           <a:prstGeom prst="rect">
             <a:avLst/>
@@ -16357,7 +16642,7 @@
                 <a:ea typeface="Trade Gothic Next" pitchFamily="34" charset="-122"/>
                 <a:cs typeface="Trade Gothic Next" pitchFamily="34" charset="-120"/>
               </a:rPr>
-              <a:t>Check yours against this.</a:t>
+              <a:t>Your turn first. Then we compare.</a:t>
             </a:r>
             <a:endParaRPr lang="en-US" sz="1700" dirty="0"/>
           </a:p>
@@ -16365,16 +16650,16 @@
       </p:sp>
       <p:sp>
         <p:nvSpPr>
-          <p:cNvPr id="4" name="Text 5"/>
-          <p:cNvSpPr txBox="1"/>
-          <p:nvPr>
-            <p:ph idx="109" type="body" hasCustomPrompt="1"/>
-          </p:nvPr>
-        </p:nvSpPr>
-        <p:spPr>
-          <a:xfrm>
-            <a:off x="5276088" y="2560320"/>
-            <a:ext cx="2752344" cy="219456"/>
+          <p:cNvPr id="4" name="Text 6"/>
+          <p:cNvSpPr txBox="1"/>
+          <p:nvPr>
+            <p:ph idx="110" type="body" hasCustomPrompt="1"/>
+          </p:nvPr>
+        </p:nvSpPr>
+        <p:spPr>
+          <a:xfrm>
+            <a:off x="886968" y="2798064"/>
+            <a:ext cx="4992624" cy="548640"/>
           </a:xfrm>
           <a:prstGeom prst="rect">
             <a:avLst/>
@@ -16390,6 +16675,47 @@
               <a:buNone/>
             </a:pPr>
             <a:r>
+              <a:rPr lang="en-US" sz="1600" dirty="0">
+                <a:solidFill>
+                  <a:srgbClr val="EDF0E5"/>
+                </a:solidFill>
+                <a:latin typeface="Trade Gothic Next" pitchFamily="34" charset="0"/>
+                <a:ea typeface="Trade Gothic Next" pitchFamily="34" charset="-122"/>
+                <a:cs typeface="Trade Gothic Next" pitchFamily="34" charset="-120"/>
+              </a:rPr>
+              <a:t>What is the maximum number of electrons in the 4f sublevel? In the n = 2 level?</a:t>
+            </a:r>
+            <a:endParaRPr lang="en-US" sz="1600" dirty="0"/>
+          </a:p>
+        </p:txBody>
+      </p:sp>
+      <p:sp>
+        <p:nvSpPr>
+          <p:cNvPr id="5" name="Text 7"/>
+          <p:cNvSpPr txBox="1"/>
+          <p:nvPr>
+            <p:ph idx="112" type="body" hasCustomPrompt="1"/>
+          </p:nvPr>
+        </p:nvSpPr>
+        <p:spPr>
+          <a:xfrm>
+            <a:off x="886968" y="3776472"/>
+            <a:ext cx="2203704" cy="219456"/>
+          </a:xfrm>
+          <a:prstGeom prst="rect">
+            <a:avLst/>
+          </a:prstGeom>
+          <a:noFill/>
+          <a:ln/>
+        </p:spPr>
+        <p:txBody>
+          <a:bodyPr wrap="square" lIns="0" tIns="0" rIns="0" bIns="0" rtlCol="0"/>
+          <a:lstStyle/>
+          <a:p>
+            <a:pPr indent="0" marL="0">
+              <a:buNone/>
+            </a:pPr>
+            <a:r>
               <a:rPr lang="en-US" sz="1200" b="1" spc="120" kern="0" dirty="0">
                 <a:solidFill>
                   <a:srgbClr val="2E3338"/>
@@ -16398,7 +16724,7 @@
                 <a:ea typeface="Trade Gothic Next" pitchFamily="34" charset="-122"/>
                 <a:cs typeface="Trade Gothic Next" pitchFamily="34" charset="-120"/>
               </a:rPr>
-              <a:t>SETUP</a:t>
+              <a:t>GIVEN</a:t>
             </a:r>
             <a:endParaRPr lang="en-US" sz="1200" dirty="0"/>
           </a:p>
@@ -16406,16 +16732,16 @@
       </p:sp>
       <p:sp>
         <p:nvSpPr>
-          <p:cNvPr id="5" name="Text 5"/>
-          <p:cNvSpPr txBox="1"/>
-          <p:nvPr>
-            <p:ph idx="110" type="body" hasCustomPrompt="1"/>
-          </p:nvPr>
-        </p:nvSpPr>
-        <p:spPr>
-          <a:xfrm>
-            <a:off x="5276088" y="2852928"/>
-            <a:ext cx="2752344" cy="1901952"/>
+          <p:cNvPr id="6" name="Text 7"/>
+          <p:cNvSpPr txBox="1"/>
+          <p:nvPr>
+            <p:ph idx="113" type="body" hasCustomPrompt="1"/>
+          </p:nvPr>
+        </p:nvSpPr>
+        <p:spPr>
+          <a:xfrm>
+            <a:off x="886968" y="4069080"/>
+            <a:ext cx="2203704" cy="1078992"/>
           </a:xfrm>
           <a:prstGeom prst="rect">
             <a:avLst/>
@@ -16439,7 +16765,7 @@
                 <a:ea typeface="Trade Gothic Next" pitchFamily="34" charset="-122"/>
                 <a:cs typeface="Trade Gothic Next" pitchFamily="34" charset="-120"/>
               </a:rPr>
-              <a:t>f has 7 orbitals.</a:t>
+              <a:t>4f sublevel</a:t>
             </a:r>
             <a:endParaRPr lang="en-US" sz="1600" dirty="0"/>
           </a:p>
@@ -16456,7 +16782,7 @@
                 <a:ea typeface="Trade Gothic Next" pitchFamily="34" charset="-122"/>
                 <a:cs typeface="Trade Gothic Next" pitchFamily="34" charset="-120"/>
               </a:rPr>
-              <a:t>n = 2 has 2s and 2p.</a:t>
+              <a:t>n = 2 level</a:t>
             </a:r>
             <a:endParaRPr lang="en-US" sz="1600" dirty="0"/>
           </a:p>
@@ -16464,16 +16790,16 @@
       </p:sp>
       <p:sp>
         <p:nvSpPr>
-          <p:cNvPr id="6" name="Text 7"/>
-          <p:cNvSpPr txBox="1"/>
-          <p:nvPr>
-            <p:ph idx="113" type="body" hasCustomPrompt="1"/>
-          </p:nvPr>
-        </p:nvSpPr>
-        <p:spPr>
-          <a:xfrm>
-            <a:off x="8613648" y="2871216"/>
-            <a:ext cx="2688336" cy="1920240"/>
+          <p:cNvPr id="7" name="Text 8"/>
+          <p:cNvSpPr txBox="1"/>
+          <p:nvPr>
+            <p:ph idx="115" type="body" hasCustomPrompt="1"/>
+          </p:nvPr>
+        </p:nvSpPr>
+        <p:spPr>
+          <a:xfrm>
+            <a:off x="3675888" y="3776472"/>
+            <a:ext cx="2203704" cy="219456"/>
           </a:xfrm>
           <a:prstGeom prst="rect">
             <a:avLst/>
@@ -16489,7 +16815,48 @@
               <a:buNone/>
             </a:pPr>
             <a:r>
-              <a:rPr lang="en-US" sz="1900" dirty="0">
+              <a:rPr lang="en-US" sz="1200" b="1" spc="120" kern="0" dirty="0">
+                <a:solidFill>
+                  <a:srgbClr val="2E3338"/>
+                </a:solidFill>
+                <a:latin typeface="Trade Gothic Next" pitchFamily="34" charset="0"/>
+                <a:ea typeface="Trade Gothic Next" pitchFamily="34" charset="-122"/>
+                <a:cs typeface="Trade Gothic Next" pitchFamily="34" charset="-120"/>
+              </a:rPr>
+              <a:t>NEED</a:t>
+            </a:r>
+            <a:endParaRPr lang="en-US" sz="1200" dirty="0"/>
+          </a:p>
+        </p:txBody>
+      </p:sp>
+      <p:sp>
+        <p:nvSpPr>
+          <p:cNvPr id="8" name="Text 8"/>
+          <p:cNvSpPr txBox="1"/>
+          <p:nvPr>
+            <p:ph idx="116" type="body" hasCustomPrompt="1"/>
+          </p:nvPr>
+        </p:nvSpPr>
+        <p:spPr>
+          <a:xfrm>
+            <a:off x="3675888" y="4069080"/>
+            <a:ext cx="2203704" cy="1078992"/>
+          </a:xfrm>
+          <a:prstGeom prst="rect">
+            <a:avLst/>
+          </a:prstGeom>
+          <a:noFill/>
+          <a:ln/>
+        </p:spPr>
+        <p:txBody>
+          <a:bodyPr wrap="square" lIns="0" tIns="0" rIns="0" bIns="0" rtlCol="0"/>
+          <a:lstStyle/>
+          <a:p>
+            <a:pPr indent="0" marL="0">
+              <a:buNone/>
+            </a:pPr>
+            <a:r>
+              <a:rPr lang="en-US" sz="1600" dirty="0">
                 <a:solidFill>
                   <a:srgbClr val="14161B"/>
                 </a:solidFill>
@@ -16497,74 +16864,70 @@
                 <a:ea typeface="Trade Gothic Next" pitchFamily="34" charset="-122"/>
                 <a:cs typeface="Trade Gothic Next" pitchFamily="34" charset="-120"/>
               </a:rPr>
-              <a:t>4f: 7 × 2 = 14</a:t>
-            </a:r>
+              <a:t>Electrons in 4f</a:t>
+            </a:r>
+            <a:endParaRPr lang="en-US" sz="1600" dirty="0"/>
+          </a:p>
+          <a:p>
+            <a:pPr indent="0" marL="0">
+              <a:buNone/>
+            </a:pPr>
+            <a:r>
+              <a:rPr lang="en-US" sz="1600" dirty="0">
+                <a:solidFill>
+                  <a:srgbClr val="14161B"/>
+                </a:solidFill>
+                <a:latin typeface="Trade Gothic Next" pitchFamily="34" charset="0"/>
+                <a:ea typeface="Trade Gothic Next" pitchFamily="34" charset="-122"/>
+                <a:cs typeface="Trade Gothic Next" pitchFamily="34" charset="-120"/>
+              </a:rPr>
+              <a:t>Electrons in n = 2</a:t>
+            </a:r>
+            <a:endParaRPr lang="en-US" sz="1600" dirty="0"/>
+          </a:p>
+        </p:txBody>
+      </p:sp>
+      <p:sp>
+        <p:nvSpPr>
+          <p:cNvPr id="9" name="Text 10"/>
+          <p:cNvSpPr txBox="1"/>
+          <p:nvPr>
+            <p:ph idx="119" type="body" hasCustomPrompt="1"/>
+          </p:nvPr>
+        </p:nvSpPr>
+        <p:spPr>
+          <a:xfrm>
+            <a:off x="6464808" y="2880360"/>
+            <a:ext cx="4837176" cy="2286000"/>
+          </a:xfrm>
+          <a:prstGeom prst="rect">
+            <a:avLst/>
+          </a:prstGeom>
+          <a:noFill/>
+          <a:ln/>
+        </p:spPr>
+        <p:txBody>
+          <a:bodyPr wrap="square" lIns="0" tIns="0" rIns="0" bIns="0" rtlCol="0"/>
+          <a:lstStyle/>
+          <a:p>
+            <a:pPr indent="0" marL="0">
+              <a:buNone/>
+            </a:pPr>
             <a:endParaRPr lang="en-US" sz="1900" dirty="0"/>
           </a:p>
-          <a:p>
-            <a:pPr indent="0" marL="0">
-              <a:buNone/>
-            </a:pPr>
-            <a:r>
-              <a:rPr lang="en-US" sz="1900" dirty="0">
-                <a:solidFill>
-                  <a:srgbClr val="14161B"/>
-                </a:solidFill>
-                <a:latin typeface="Trade Gothic Next" pitchFamily="34" charset="0"/>
-                <a:ea typeface="Trade Gothic Next" pitchFamily="34" charset="-122"/>
-                <a:cs typeface="Trade Gothic Next" pitchFamily="34" charset="-120"/>
-              </a:rPr>
-              <a:t>2s: 1 × 2 = 2</a:t>
-            </a:r>
-            <a:endParaRPr lang="en-US" sz="1900" dirty="0"/>
-          </a:p>
-          <a:p>
-            <a:pPr indent="0" marL="0">
-              <a:buNone/>
-            </a:pPr>
-            <a:r>
-              <a:rPr lang="en-US" sz="1900" dirty="0">
-                <a:solidFill>
-                  <a:srgbClr val="14161B"/>
-                </a:solidFill>
-                <a:latin typeface="Trade Gothic Next" pitchFamily="34" charset="0"/>
-                <a:ea typeface="Trade Gothic Next" pitchFamily="34" charset="-122"/>
-                <a:cs typeface="Trade Gothic Next" pitchFamily="34" charset="-120"/>
-              </a:rPr>
-              <a:t>2p: 3 × 2 = 6</a:t>
-            </a:r>
-            <a:endParaRPr lang="en-US" sz="1900" dirty="0"/>
-          </a:p>
-          <a:p>
-            <a:pPr indent="0" marL="0">
-              <a:buNone/>
-            </a:pPr>
-            <a:r>
-              <a:rPr lang="en-US" sz="1900" dirty="0">
-                <a:solidFill>
-                  <a:srgbClr val="14161B"/>
-                </a:solidFill>
-                <a:latin typeface="Trade Gothic Next" pitchFamily="34" charset="0"/>
-                <a:ea typeface="Trade Gothic Next" pitchFamily="34" charset="-122"/>
-                <a:cs typeface="Trade Gothic Next" pitchFamily="34" charset="-120"/>
-              </a:rPr>
-              <a:t>n = 2: 2 + 6 = 8</a:t>
-            </a:r>
-            <a:endParaRPr lang="en-US" sz="1900" dirty="0"/>
-          </a:p>
-        </p:txBody>
-      </p:sp>
-      <p:sp>
-        <p:nvSpPr>
-          <p:cNvPr id="7" name="Text 9"/>
-          <p:cNvSpPr txBox="1"/>
-          <p:nvPr>
-            <p:ph idx="116" type="body" hasCustomPrompt="1"/>
-          </p:nvPr>
-        </p:nvSpPr>
-        <p:spPr>
-          <a:xfrm>
-            <a:off x="2240280" y="5212080"/>
+        </p:txBody>
+      </p:sp>
+      <p:sp>
+        <p:nvSpPr>
+          <p:cNvPr id="10" name="Text 12"/>
+          <p:cNvSpPr txBox="1"/>
+          <p:nvPr>
+            <p:ph idx="122" type="body" hasCustomPrompt="1"/>
+          </p:nvPr>
+        </p:nvSpPr>
+        <p:spPr>
+          <a:xfrm>
+            <a:off x="2240280" y="5605272"/>
             <a:ext cx="8991295" cy="402336"/>
           </a:xfrm>
           <a:prstGeom prst="rect">
@@ -16589,7 +16952,7 @@
                 <a:ea typeface="Trade Gothic Next" pitchFamily="34" charset="-122"/>
                 <a:cs typeface="Trade Gothic Next" pitchFamily="34" charset="-120"/>
               </a:rPr>
-              <a:t>4f holds 14 electrons. The n = 2 level holds 8, which is 2n².</a:t>
+              <a:t>Electrons in a sublevel = orbitals × 2.</a:t>
             </a:r>
             <a:endParaRPr lang="en-US" sz="1600" dirty="0"/>
           </a:p>
@@ -16597,7 +16960,7 @@
       </p:sp>
       <p:sp>
         <p:nvSpPr>
-          <p:cNvPr id="8" name="Text 1"/>
+          <p:cNvPr id="11" name="Text 1"/>
           <p:cNvSpPr txBox="1"/>
           <p:nvPr>
             <p:ph idx="101" type="body" hasCustomPrompt="1"/>
@@ -16638,10 +17001,10 @@
       </p:sp>
       <p:sp>
         <p:nvSpPr>
-          <p:cNvPr id="9" name="Text 10"/>
-          <p:cNvSpPr txBox="1"/>
-          <p:nvPr>
-            <p:ph idx="118" type="body" hasCustomPrompt="1"/>
+          <p:cNvPr id="12" name="Text 13"/>
+          <p:cNvSpPr txBox="1"/>
+          <p:nvPr>
+            <p:ph idx="124" type="body" hasCustomPrompt="1"/>
           </p:nvPr>
         </p:nvSpPr>
         <p:spPr>
@@ -16679,7 +17042,7 @@
       </p:sp>
       <p:sp>
         <p:nvSpPr>
-          <p:cNvPr id="10" name="Text 4"/>
+          <p:cNvPr id="14" name="Text 4"/>
           <p:cNvSpPr txBox="1"/>
           <p:nvPr>
             <p:ph idx="107" hasCustomPrompt="1"/>
@@ -16687,8 +17050,8 @@
         </p:nvSpPr>
         <p:spPr>
           <a:xfrm>
-            <a:off x="832104" y="2542032"/>
-            <a:ext cx="3867912" cy="2267712"/>
+            <a:off x="9262872" y="1088136"/>
+            <a:ext cx="1901952" cy="1069848"/>
           </a:xfrm>
           <a:prstGeom prst="rect">
             <a:avLst/>
@@ -16718,6 +17081,485 @@
 <file path=ppt/slides/slide17.xml><?xml version="1.0" encoding="utf-8"?>
 <p:sld xmlns:a="http://schemas.openxmlformats.org/drawingml/2006/main" xmlns:r="http://schemas.openxmlformats.org/officeDocument/2006/relationships" xmlns:p="http://schemas.openxmlformats.org/presentationml/2006/main">
   <p:cSld name="Slide 17">
+    <p:spTree>
+      <p:nvGrpSpPr>
+        <p:cNvPr id="1" name=""/>
+        <p:cNvGrpSpPr/>
+        <p:nvPr/>
+      </p:nvGrpSpPr>
+      <p:grpSpPr>
+        <a:xfrm>
+          <a:off x="0" y="0"/>
+          <a:ext cx="0" cy="0"/>
+          <a:chOff x="0" y="0"/>
+          <a:chExt cx="0" cy="0"/>
+        </a:xfrm>
+      </p:grpSpPr>
+      <p:sp>
+        <p:nvSpPr>
+          <p:cNvPr id="2" name="Text 2"/>
+          <p:cNvSpPr txBox="1"/>
+          <p:nvPr>
+            <p:ph idx="103" type="title" hasCustomPrompt="1"/>
+          </p:nvPr>
+        </p:nvSpPr>
+        <p:spPr>
+          <a:xfrm>
+            <a:off x="685800" y="932688"/>
+            <a:ext cx="10820095" cy="868680"/>
+          </a:xfrm>
+          <a:prstGeom prst="rect">
+            <a:avLst/>
+          </a:prstGeom>
+          <a:noFill/>
+          <a:ln/>
+        </p:spPr>
+        <p:txBody>
+          <a:bodyPr wrap="square" lIns="0" tIns="0" rIns="0" bIns="0" rtlCol="0" anchor="t"/>
+          <a:lstStyle/>
+          <a:p>
+            <a:pPr algn="l" indent="0" marL="0">
+              <a:buNone/>
+            </a:pPr>
+            <a:r>
+              <a:rPr lang="en-US" sz="2800" b="1" dirty="0">
+                <a:solidFill>
+                  <a:srgbClr val="14161B"/>
+                </a:solidFill>
+                <a:latin typeface="Trade Gothic Next" pitchFamily="34" charset="0"/>
+                <a:ea typeface="Trade Gothic Next" pitchFamily="34" charset="-122"/>
+                <a:cs typeface="Trade Gothic Next" pitchFamily="34" charset="-120"/>
+              </a:rPr>
+              <a:t>Capacity, Worked</a:t>
+            </a:r>
+            <a:endParaRPr lang="en-US" sz="2800" dirty="0"/>
+          </a:p>
+        </p:txBody>
+      </p:sp>
+      <p:sp>
+        <p:nvSpPr>
+          <p:cNvPr id="3" name="Text 2"/>
+          <p:cNvSpPr txBox="1"/>
+          <p:nvPr>
+            <p:ph idx="104" type="body" hasCustomPrompt="1"/>
+          </p:nvPr>
+        </p:nvSpPr>
+        <p:spPr>
+          <a:xfrm>
+            <a:off x="685800" y="1847088"/>
+            <a:ext cx="10820095" cy="384048"/>
+          </a:xfrm>
+          <a:prstGeom prst="rect">
+            <a:avLst/>
+          </a:prstGeom>
+          <a:noFill/>
+          <a:ln/>
+        </p:spPr>
+        <p:txBody>
+          <a:bodyPr wrap="square" lIns="0" tIns="0" rIns="0" bIns="0" rtlCol="0"/>
+          <a:lstStyle/>
+          <a:p>
+            <a:pPr indent="0" marL="0">
+              <a:buNone/>
+            </a:pPr>
+            <a:r>
+              <a:rPr lang="en-US" sz="1700" dirty="0">
+                <a:solidFill>
+                  <a:srgbClr val="2E3338"/>
+                </a:solidFill>
+                <a:latin typeface="Trade Gothic Next" pitchFamily="34" charset="0"/>
+                <a:ea typeface="Trade Gothic Next" pitchFamily="34" charset="-122"/>
+                <a:cs typeface="Trade Gothic Next" pitchFamily="34" charset="-120"/>
+              </a:rPr>
+              <a:t>Check yours against this.</a:t>
+            </a:r>
+            <a:endParaRPr lang="en-US" sz="1700" dirty="0"/>
+          </a:p>
+        </p:txBody>
+      </p:sp>
+      <p:sp>
+        <p:nvSpPr>
+          <p:cNvPr id="4" name="Text 5"/>
+          <p:cNvSpPr txBox="1"/>
+          <p:nvPr>
+            <p:ph idx="109" type="body" hasCustomPrompt="1"/>
+          </p:nvPr>
+        </p:nvSpPr>
+        <p:spPr>
+          <a:xfrm>
+            <a:off x="5276088" y="2560320"/>
+            <a:ext cx="2752344" cy="219456"/>
+          </a:xfrm>
+          <a:prstGeom prst="rect">
+            <a:avLst/>
+          </a:prstGeom>
+          <a:noFill/>
+          <a:ln/>
+        </p:spPr>
+        <p:txBody>
+          <a:bodyPr wrap="square" lIns="0" tIns="0" rIns="0" bIns="0" rtlCol="0"/>
+          <a:lstStyle/>
+          <a:p>
+            <a:pPr indent="0" marL="0">
+              <a:buNone/>
+            </a:pPr>
+            <a:r>
+              <a:rPr lang="en-US" sz="1200" b="1" spc="120" kern="0" dirty="0">
+                <a:solidFill>
+                  <a:srgbClr val="2E3338"/>
+                </a:solidFill>
+                <a:latin typeface="Trade Gothic Next" pitchFamily="34" charset="0"/>
+                <a:ea typeface="Trade Gothic Next" pitchFamily="34" charset="-122"/>
+                <a:cs typeface="Trade Gothic Next" pitchFamily="34" charset="-120"/>
+              </a:rPr>
+              <a:t>SETUP</a:t>
+            </a:r>
+            <a:endParaRPr lang="en-US" sz="1200" dirty="0"/>
+          </a:p>
+        </p:txBody>
+      </p:sp>
+      <p:sp>
+        <p:nvSpPr>
+          <p:cNvPr id="5" name="Text 5"/>
+          <p:cNvSpPr txBox="1"/>
+          <p:nvPr>
+            <p:ph idx="110" type="body" hasCustomPrompt="1"/>
+          </p:nvPr>
+        </p:nvSpPr>
+        <p:spPr>
+          <a:xfrm>
+            <a:off x="5276088" y="2852928"/>
+            <a:ext cx="2752344" cy="1901952"/>
+          </a:xfrm>
+          <a:prstGeom prst="rect">
+            <a:avLst/>
+          </a:prstGeom>
+          <a:noFill/>
+          <a:ln/>
+        </p:spPr>
+        <p:txBody>
+          <a:bodyPr wrap="square" lIns="0" tIns="0" rIns="0" bIns="0" rtlCol="0"/>
+          <a:lstStyle/>
+          <a:p>
+            <a:pPr indent="0" marL="0">
+              <a:buNone/>
+            </a:pPr>
+            <a:r>
+              <a:rPr lang="en-US" sz="1600" dirty="0">
+                <a:solidFill>
+                  <a:srgbClr val="14161B"/>
+                </a:solidFill>
+                <a:latin typeface="Trade Gothic Next" pitchFamily="34" charset="0"/>
+                <a:ea typeface="Trade Gothic Next" pitchFamily="34" charset="-122"/>
+                <a:cs typeface="Trade Gothic Next" pitchFamily="34" charset="-120"/>
+              </a:rPr>
+              <a:t>f has 7 orbitals.</a:t>
+            </a:r>
+            <a:endParaRPr lang="en-US" sz="1600" dirty="0"/>
+          </a:p>
+          <a:p>
+            <a:pPr indent="0" marL="0">
+              <a:buNone/>
+            </a:pPr>
+            <a:r>
+              <a:rPr lang="en-US" sz="1600" dirty="0">
+                <a:solidFill>
+                  <a:srgbClr val="14161B"/>
+                </a:solidFill>
+                <a:latin typeface="Trade Gothic Next" pitchFamily="34" charset="0"/>
+                <a:ea typeface="Trade Gothic Next" pitchFamily="34" charset="-122"/>
+                <a:cs typeface="Trade Gothic Next" pitchFamily="34" charset="-120"/>
+              </a:rPr>
+              <a:t>n = 2 has 2s and 2p.</a:t>
+            </a:r>
+            <a:endParaRPr lang="en-US" sz="1600" dirty="0"/>
+          </a:p>
+        </p:txBody>
+      </p:sp>
+      <p:sp>
+        <p:nvSpPr>
+          <p:cNvPr id="6" name="Text 7"/>
+          <p:cNvSpPr txBox="1"/>
+          <p:nvPr>
+            <p:ph idx="113" type="body" hasCustomPrompt="1"/>
+          </p:nvPr>
+        </p:nvSpPr>
+        <p:spPr>
+          <a:xfrm>
+            <a:off x="8613648" y="2871216"/>
+            <a:ext cx="2688336" cy="1920240"/>
+          </a:xfrm>
+          <a:prstGeom prst="rect">
+            <a:avLst/>
+          </a:prstGeom>
+          <a:noFill/>
+          <a:ln/>
+        </p:spPr>
+        <p:txBody>
+          <a:bodyPr wrap="square" lIns="0" tIns="0" rIns="0" bIns="0" rtlCol="0"/>
+          <a:lstStyle/>
+          <a:p>
+            <a:pPr indent="0" marL="0">
+              <a:buNone/>
+            </a:pPr>
+            <a:r>
+              <a:rPr lang="en-US" sz="1900" dirty="0">
+                <a:solidFill>
+                  <a:srgbClr val="14161B"/>
+                </a:solidFill>
+                <a:latin typeface="Trade Gothic Next" pitchFamily="34" charset="0"/>
+                <a:ea typeface="Trade Gothic Next" pitchFamily="34" charset="-122"/>
+                <a:cs typeface="Trade Gothic Next" pitchFamily="34" charset="-120"/>
+              </a:rPr>
+              <a:t>4f: 7 × 2 = 14</a:t>
+            </a:r>
+            <a:endParaRPr lang="en-US" sz="1900" dirty="0"/>
+          </a:p>
+          <a:p>
+            <a:pPr indent="0" marL="0">
+              <a:buNone/>
+            </a:pPr>
+            <a:r>
+              <a:rPr lang="en-US" sz="1900" dirty="0">
+                <a:solidFill>
+                  <a:srgbClr val="14161B"/>
+                </a:solidFill>
+                <a:latin typeface="Trade Gothic Next" pitchFamily="34" charset="0"/>
+                <a:ea typeface="Trade Gothic Next" pitchFamily="34" charset="-122"/>
+                <a:cs typeface="Trade Gothic Next" pitchFamily="34" charset="-120"/>
+              </a:rPr>
+              <a:t>2s: 1 × 2 = 2</a:t>
+            </a:r>
+            <a:endParaRPr lang="en-US" sz="1900" dirty="0"/>
+          </a:p>
+          <a:p>
+            <a:pPr indent="0" marL="0">
+              <a:buNone/>
+            </a:pPr>
+            <a:r>
+              <a:rPr lang="en-US" sz="1900" dirty="0">
+                <a:solidFill>
+                  <a:srgbClr val="14161B"/>
+                </a:solidFill>
+                <a:latin typeface="Trade Gothic Next" pitchFamily="34" charset="0"/>
+                <a:ea typeface="Trade Gothic Next" pitchFamily="34" charset="-122"/>
+                <a:cs typeface="Trade Gothic Next" pitchFamily="34" charset="-120"/>
+              </a:rPr>
+              <a:t>2p: 3 × 2 = 6</a:t>
+            </a:r>
+            <a:endParaRPr lang="en-US" sz="1900" dirty="0"/>
+          </a:p>
+          <a:p>
+            <a:pPr indent="0" marL="0">
+              <a:buNone/>
+            </a:pPr>
+            <a:r>
+              <a:rPr lang="en-US" sz="1900" dirty="0">
+                <a:solidFill>
+                  <a:srgbClr val="14161B"/>
+                </a:solidFill>
+                <a:latin typeface="Trade Gothic Next" pitchFamily="34" charset="0"/>
+                <a:ea typeface="Trade Gothic Next" pitchFamily="34" charset="-122"/>
+                <a:cs typeface="Trade Gothic Next" pitchFamily="34" charset="-120"/>
+              </a:rPr>
+              <a:t>n = 2: 2 + 6 = 8</a:t>
+            </a:r>
+            <a:endParaRPr lang="en-US" sz="1900" dirty="0"/>
+          </a:p>
+        </p:txBody>
+      </p:sp>
+      <p:sp>
+        <p:nvSpPr>
+          <p:cNvPr id="7" name="Text 9"/>
+          <p:cNvSpPr txBox="1"/>
+          <p:nvPr>
+            <p:ph idx="116" type="body" hasCustomPrompt="1"/>
+          </p:nvPr>
+        </p:nvSpPr>
+        <p:spPr>
+          <a:xfrm>
+            <a:off x="2240280" y="5212080"/>
+            <a:ext cx="8991295" cy="402336"/>
+          </a:xfrm>
+          <a:prstGeom prst="rect">
+            <a:avLst/>
+          </a:prstGeom>
+          <a:noFill/>
+          <a:ln/>
+        </p:spPr>
+        <p:txBody>
+          <a:bodyPr wrap="square" lIns="0" tIns="0" rIns="0" bIns="0" rtlCol="0" anchor="ctr"/>
+          <a:lstStyle/>
+          <a:p>
+            <a:pPr indent="0" marL="0">
+              <a:buNone/>
+            </a:pPr>
+            <a:r>
+              <a:rPr lang="en-US" sz="1600" b="1" dirty="0">
+                <a:solidFill>
+                  <a:srgbClr val="EDF0E5"/>
+                </a:solidFill>
+                <a:latin typeface="Trade Gothic Next" pitchFamily="34" charset="0"/>
+                <a:ea typeface="Trade Gothic Next" pitchFamily="34" charset="-122"/>
+                <a:cs typeface="Trade Gothic Next" pitchFamily="34" charset="-120"/>
+              </a:rPr>
+              <a:t>4f holds 14 electrons. The n = 2 level holds 8, which is 2n</a:t>
+            </a:r>
+            <a:pPr indent="0" marL="0">
+              <a:buNone/>
+            </a:pPr>
+            <a:r>
+              <a:rPr lang="en-US" sz="1600" b="1" baseline="30000" dirty="0">
+                <a:solidFill>
+                  <a:srgbClr val="EDF0E5"/>
+                </a:solidFill>
+                <a:latin typeface="Trade Gothic Next" pitchFamily="34" charset="0"/>
+                <a:ea typeface="Trade Gothic Next" pitchFamily="34" charset="-122"/>
+                <a:cs typeface="Trade Gothic Next" pitchFamily="34" charset="-120"/>
+              </a:rPr>
+              <a:t>2</a:t>
+            </a:r>
+            <a:pPr indent="0" marL="0">
+              <a:buNone/>
+            </a:pPr>
+            <a:r>
+              <a:rPr lang="en-US" sz="1600" b="1" dirty="0">
+                <a:solidFill>
+                  <a:srgbClr val="EDF0E5"/>
+                </a:solidFill>
+                <a:latin typeface="Trade Gothic Next" pitchFamily="34" charset="0"/>
+                <a:ea typeface="Trade Gothic Next" pitchFamily="34" charset="-122"/>
+                <a:cs typeface="Trade Gothic Next" pitchFamily="34" charset="-120"/>
+              </a:rPr>
+              <a:t>.</a:t>
+            </a:r>
+            <a:endParaRPr lang="en-US" sz="1600" dirty="0"/>
+          </a:p>
+        </p:txBody>
+      </p:sp>
+      <p:sp>
+        <p:nvSpPr>
+          <p:cNvPr id="8" name="Text 1"/>
+          <p:cNvSpPr txBox="1"/>
+          <p:nvPr>
+            <p:ph idx="101" type="body" hasCustomPrompt="1"/>
+          </p:nvPr>
+        </p:nvSpPr>
+        <p:spPr>
+          <a:xfrm>
+            <a:off x="685800" y="384048"/>
+            <a:ext cx="6400800" cy="237744"/>
+          </a:xfrm>
+          <a:prstGeom prst="rect">
+            <a:avLst/>
+          </a:prstGeom>
+          <a:noFill/>
+          <a:ln/>
+        </p:spPr>
+        <p:txBody>
+          <a:bodyPr wrap="square" lIns="0" tIns="0" rIns="0" bIns="0" rtlCol="0" anchor="ctr"/>
+          <a:lstStyle/>
+          <a:p>
+            <a:pPr indent="0" marL="0">
+              <a:buNone/>
+            </a:pPr>
+            <a:r>
+              <a:rPr lang="en-US" sz="1100" b="1" spc="160" kern="0" dirty="0">
+                <a:solidFill>
+                  <a:srgbClr val="14161B"/>
+                </a:solidFill>
+                <a:latin typeface="Trade Gothic Next" pitchFamily="34" charset="0"/>
+                <a:ea typeface="Trade Gothic Next" pitchFamily="34" charset="-122"/>
+                <a:cs typeface="Trade Gothic Next" pitchFamily="34" charset="-120"/>
+              </a:rPr>
+              <a:t>UNIT 02  •  CHEMISTRY</a:t>
+            </a:r>
+            <a:endParaRPr lang="en-US" sz="1100" dirty="0"/>
+          </a:p>
+        </p:txBody>
+      </p:sp>
+      <p:sp>
+        <p:nvSpPr>
+          <p:cNvPr id="9" name="Text 10"/>
+          <p:cNvSpPr txBox="1"/>
+          <p:nvPr>
+            <p:ph idx="118" type="body" hasCustomPrompt="1"/>
+          </p:nvPr>
+        </p:nvSpPr>
+        <p:spPr>
+          <a:xfrm>
+            <a:off x="8762695" y="6382512"/>
+            <a:ext cx="2743200" cy="237744"/>
+          </a:xfrm>
+          <a:prstGeom prst="rect">
+            <a:avLst/>
+          </a:prstGeom>
+          <a:noFill/>
+          <a:ln/>
+        </p:spPr>
+        <p:txBody>
+          <a:bodyPr wrap="square" lIns="0" tIns="0" rIns="0" bIns="0" rtlCol="0" anchor="ctr"/>
+          <a:lstStyle/>
+          <a:p>
+            <a:pPr algn="r" indent="0" marL="0">
+              <a:buNone/>
+            </a:pPr>
+            <a:r>
+              <a:rPr lang="en-US" sz="1000" b="1" spc="140" kern="0" dirty="0">
+                <a:solidFill>
+                  <a:srgbClr val="2E3338"/>
+                </a:solidFill>
+                <a:latin typeface="Trade Gothic Next" pitchFamily="34" charset="0"/>
+                <a:ea typeface="Trade Gothic Next" pitchFamily="34" charset="-122"/>
+                <a:cs typeface="Trade Gothic Next" pitchFamily="34" charset="-120"/>
+              </a:rPr>
+              <a:t>U02 • S02.2</a:t>
+            </a:r>
+            <a:endParaRPr lang="en-US" sz="1000" dirty="0"/>
+          </a:p>
+        </p:txBody>
+      </p:sp>
+      <p:sp>
+        <p:nvSpPr>
+          <p:cNvPr id="11" name="Text 4"/>
+          <p:cNvSpPr txBox="1"/>
+          <p:nvPr>
+            <p:ph idx="107" hasCustomPrompt="1"/>
+          </p:nvPr>
+        </p:nvSpPr>
+        <p:spPr>
+          <a:xfrm>
+            <a:off x="832104" y="2542032"/>
+            <a:ext cx="3867912" cy="2267712"/>
+          </a:xfrm>
+          <a:prstGeom prst="rect">
+            <a:avLst/>
+          </a:prstGeom>
+          <a:noFill/>
+          <a:ln/>
+        </p:spPr>
+        <p:txBody>
+          <a:bodyPr wrap="square" lIns="0" tIns="0" rIns="0" bIns="0" rtlCol="0" anchor="ctr"/>
+          <a:lstStyle/>
+          <a:p>
+            <a:pPr algn="ctr" indent="0" marL="0">
+              <a:buNone/>
+            </a:pPr>
+            <a:endParaRPr lang="en-US" sz="1200" dirty="0"/>
+          </a:p>
+        </p:txBody>
+      </p:sp>
+    </p:spTree>
+  </p:cSld>
+  <p:clrMapOvr>
+    <a:masterClrMapping/>
+  </p:clrMapOvr>
+</p:sld>
+</file>
+
+<file path=ppt/slides/slide18.xml><?xml version="1.0" encoding="utf-8"?>
+<p:sld xmlns:a="http://schemas.openxmlformats.org/drawingml/2006/main" xmlns:r="http://schemas.openxmlformats.org/officeDocument/2006/relationships" xmlns:p="http://schemas.openxmlformats.org/presentationml/2006/main">
+  <p:cSld name="Slide 18">
     <p:spTree>
       <p:nvGrpSpPr>
         <p:cNvPr id="1" name=""/>
@@ -16832,7 +17674,35 @@
                 <a:ea typeface="Trade Gothic Next" pitchFamily="34" charset="-122"/>
                 <a:cs typeface="Trade Gothic Next" pitchFamily="34" charset="-120"/>
               </a:rPr>
-              <a:t>Block width equals sublevel capacity. Helium (1s²) sits in group 18.</a:t>
+              <a:t>Block width equals sublevel capacity. Helium (1s</a:t>
+            </a:r>
+            <a:pPr indent="0" marL="0">
+              <a:buNone/>
+            </a:pPr>
+            <a:r>
+              <a:rPr lang="en-US" sz="1700" baseline="30000" dirty="0">
+                <a:solidFill>
+                  <a:srgbClr val="2E3338"/>
+                </a:solidFill>
+                <a:latin typeface="Trade Gothic Next" pitchFamily="34" charset="0"/>
+                <a:ea typeface="Trade Gothic Next" pitchFamily="34" charset="-122"/>
+                <a:cs typeface="Trade Gothic Next" pitchFamily="34" charset="-120"/>
+              </a:rPr>
+              <a:t>2</a:t>
+            </a:r>
+            <a:pPr indent="0" marL="0">
+              <a:buNone/>
+            </a:pPr>
+            <a:r>
+              <a:rPr lang="en-US" sz="1700" dirty="0">
+                <a:solidFill>
+                  <a:srgbClr val="2E3338"/>
+                </a:solidFill>
+                <a:latin typeface="Trade Gothic Next" pitchFamily="34" charset="0"/>
+                <a:ea typeface="Trade Gothic Next" pitchFamily="34" charset="-122"/>
+                <a:cs typeface="Trade Gothic Next" pitchFamily="34" charset="-120"/>
+              </a:rPr>
+              <a:t>) sits in group 18.</a:t>
             </a:r>
             <a:endParaRPr lang="en-US" sz="1700" dirty="0"/>
           </a:p>
@@ -17078,7 +17948,24 @@
                 <a:ea typeface="Trade Gothic Next" pitchFamily="34" charset="-122"/>
                 <a:cs typeface="Trade Gothic Next" pitchFamily="34" charset="-120"/>
               </a:rPr>
-              <a:t>d: groups 3 to 12, 10 wide. f: 14 wide.</a:t>
+              <a:t>d: groups 3 to 12, 10 wide.</a:t>
+            </a:r>
+            <a:endParaRPr lang="en-US" sz="1600" dirty="0"/>
+          </a:p>
+          <a:p>
+            <a:pPr indent="0" marL="0">
+              <a:buNone/>
+            </a:pPr>
+            <a:r>
+              <a:rPr lang="en-US" sz="1600" dirty="0">
+                <a:solidFill>
+                  <a:srgbClr val="14161B"/>
+                </a:solidFill>
+                <a:latin typeface="Trade Gothic Next" pitchFamily="34" charset="0"/>
+                <a:ea typeface="Trade Gothic Next" pitchFamily="34" charset="-122"/>
+                <a:cs typeface="Trade Gothic Next" pitchFamily="34" charset="-120"/>
+              </a:rPr>
+              <a:t>f: 14 wide, drawn below the table.</a:t>
             </a:r>
             <a:endParaRPr lang="en-US" sz="1600" dirty="0"/>
           </a:p>
@@ -17168,7 +18055,7 @@
       </p:sp>
       <p:sp>
         <p:nvSpPr>
-          <p:cNvPr id="13" name="Text 3"/>
+          <p:cNvPr id="14" name="Text 3"/>
           <p:cNvSpPr txBox="1"/>
           <p:nvPr>
             <p:ph idx="106" type="body" hasCustomPrompt="1"/>
@@ -17193,580 +18080,6 @@
               <a:buNone/>
             </a:pPr>
             <a:endParaRPr lang="en-US" sz="2000" dirty="0"/>
-          </a:p>
-        </p:txBody>
-      </p:sp>
-    </p:spTree>
-  </p:cSld>
-  <p:clrMapOvr>
-    <a:masterClrMapping/>
-  </p:clrMapOvr>
-</p:sld>
-</file>
-
-<file path=ppt/slides/slide18.xml><?xml version="1.0" encoding="utf-8"?>
-<p:sld xmlns:a="http://schemas.openxmlformats.org/drawingml/2006/main" xmlns:r="http://schemas.openxmlformats.org/officeDocument/2006/relationships" xmlns:p="http://schemas.openxmlformats.org/presentationml/2006/main">
-  <p:cSld name="Slide 18">
-    <p:spTree>
-      <p:nvGrpSpPr>
-        <p:cNvPr id="1" name=""/>
-        <p:cNvGrpSpPr/>
-        <p:nvPr/>
-      </p:nvGrpSpPr>
-      <p:grpSpPr>
-        <a:xfrm>
-          <a:off x="0" y="0"/>
-          <a:ext cx="0" cy="0"/>
-          <a:chOff x="0" y="0"/>
-          <a:chExt cx="0" cy="0"/>
-        </a:xfrm>
-      </p:grpSpPr>
-      <p:sp>
-        <p:nvSpPr>
-          <p:cNvPr id="2" name="Text 2"/>
-          <p:cNvSpPr txBox="1"/>
-          <p:nvPr>
-            <p:ph idx="103" type="title" hasCustomPrompt="1"/>
-          </p:nvPr>
-        </p:nvSpPr>
-        <p:spPr>
-          <a:xfrm>
-            <a:off x="685800" y="932688"/>
-            <a:ext cx="7360920" cy="868680"/>
-          </a:xfrm>
-          <a:prstGeom prst="rect">
-            <a:avLst/>
-          </a:prstGeom>
-          <a:noFill/>
-          <a:ln/>
-        </p:spPr>
-        <p:txBody>
-          <a:bodyPr wrap="square" lIns="0" tIns="0" rIns="0" bIns="0" rtlCol="0" anchor="t"/>
-          <a:lstStyle/>
-          <a:p>
-            <a:pPr algn="l" indent="0" marL="0">
-              <a:buNone/>
-            </a:pPr>
-            <a:r>
-              <a:rPr lang="en-US" sz="2800" b="1" dirty="0">
-                <a:solidFill>
-                  <a:srgbClr val="14161B"/>
-                </a:solidFill>
-                <a:latin typeface="Trade Gothic Next" pitchFamily="34" charset="0"/>
-                <a:ea typeface="Trade Gothic Next" pitchFamily="34" charset="-122"/>
-                <a:cs typeface="Trade Gothic Next" pitchFamily="34" charset="-120"/>
-              </a:rPr>
-              <a:t>Why Periods Have These Lengths</a:t>
-            </a:r>
-            <a:endParaRPr lang="en-US" sz="2800" dirty="0"/>
-          </a:p>
-        </p:txBody>
-      </p:sp>
-      <p:sp>
-        <p:nvSpPr>
-          <p:cNvPr id="3" name="Text 2"/>
-          <p:cNvSpPr txBox="1"/>
-          <p:nvPr>
-            <p:ph idx="104" type="body" hasCustomPrompt="1"/>
-          </p:nvPr>
-        </p:nvSpPr>
-        <p:spPr>
-          <a:xfrm>
-            <a:off x="685800" y="1847088"/>
-            <a:ext cx="7360920" cy="384048"/>
-          </a:xfrm>
-          <a:prstGeom prst="rect">
-            <a:avLst/>
-          </a:prstGeom>
-          <a:noFill/>
-          <a:ln/>
-        </p:spPr>
-        <p:txBody>
-          <a:bodyPr wrap="square" lIns="0" tIns="0" rIns="0" bIns="0" rtlCol="0"/>
-          <a:lstStyle/>
-          <a:p>
-            <a:pPr indent="0" marL="0">
-              <a:buNone/>
-            </a:pPr>
-            <a:r>
-              <a:rPr lang="en-US" sz="1700" dirty="0">
-                <a:solidFill>
-                  <a:srgbClr val="2E3338"/>
-                </a:solidFill>
-                <a:latin typeface="Trade Gothic Next" pitchFamily="34" charset="0"/>
-                <a:ea typeface="Trade Gothic Next" pitchFamily="34" charset="-122"/>
-                <a:cs typeface="Trade Gothic Next" pitchFamily="34" charset="-120"/>
-              </a:rPr>
-              <a:t>The number after = is how many elements are in that period.</a:t>
-            </a:r>
-            <a:endParaRPr lang="en-US" sz="1700" dirty="0"/>
-          </a:p>
-        </p:txBody>
-      </p:sp>
-      <p:sp>
-        <p:nvSpPr>
-          <p:cNvPr id="4" name="Text 5"/>
-          <p:cNvSpPr txBox="1"/>
-          <p:nvPr>
-            <p:ph idx="109" type="body" hasCustomPrompt="1"/>
-          </p:nvPr>
-        </p:nvSpPr>
-        <p:spPr>
-          <a:xfrm>
-            <a:off x="886968" y="2953512"/>
-            <a:ext cx="2999232" cy="219456"/>
-          </a:xfrm>
-          <a:prstGeom prst="rect">
-            <a:avLst/>
-          </a:prstGeom>
-          <a:noFill/>
-          <a:ln/>
-        </p:spPr>
-        <p:txBody>
-          <a:bodyPr wrap="square" lIns="0" tIns="0" rIns="0" bIns="0" rtlCol="0"/>
-          <a:lstStyle/>
-          <a:p>
-            <a:pPr indent="0" marL="0">
-              <a:buNone/>
-            </a:pPr>
-            <a:r>
-              <a:rPr lang="en-US" sz="1200" b="1" spc="120" kern="0" dirty="0">
-                <a:solidFill>
-                  <a:srgbClr val="2E3338"/>
-                </a:solidFill>
-                <a:latin typeface="Trade Gothic Next" pitchFamily="34" charset="0"/>
-                <a:ea typeface="Trade Gothic Next" pitchFamily="34" charset="-122"/>
-                <a:cs typeface="Trade Gothic Next" pitchFamily="34" charset="-120"/>
-              </a:rPr>
-              <a:t>PERIODS 1 TO 3</a:t>
-            </a:r>
-            <a:endParaRPr lang="en-US" sz="1200" dirty="0"/>
-          </a:p>
-        </p:txBody>
-      </p:sp>
-      <p:sp>
-        <p:nvSpPr>
-          <p:cNvPr id="5" name="Text 5"/>
-          <p:cNvSpPr txBox="1"/>
-          <p:nvPr>
-            <p:ph idx="110" type="body" hasCustomPrompt="1"/>
-          </p:nvPr>
-        </p:nvSpPr>
-        <p:spPr>
-          <a:xfrm>
-            <a:off x="886968" y="3246120"/>
-            <a:ext cx="2999232" cy="1673352"/>
-          </a:xfrm>
-          <a:prstGeom prst="rect">
-            <a:avLst/>
-          </a:prstGeom>
-          <a:noFill/>
-          <a:ln/>
-        </p:spPr>
-        <p:txBody>
-          <a:bodyPr wrap="square" lIns="0" tIns="0" rIns="0" bIns="0" rtlCol="0"/>
-          <a:lstStyle/>
-          <a:p>
-            <a:pPr indent="0" marL="0">
-              <a:buNone/>
-            </a:pPr>
-            <a:r>
-              <a:rPr lang="en-US" sz="1600" dirty="0">
-                <a:solidFill>
-                  <a:srgbClr val="14161B"/>
-                </a:solidFill>
-                <a:latin typeface="Trade Gothic Next" pitchFamily="34" charset="0"/>
-                <a:ea typeface="Trade Gothic Next" pitchFamily="34" charset="-122"/>
-                <a:cs typeface="Trade Gothic Next" pitchFamily="34" charset="-120"/>
-              </a:rPr>
-              <a:t>Period 1: 1s = 2</a:t>
-            </a:r>
-            <a:endParaRPr lang="en-US" sz="1600" dirty="0"/>
-          </a:p>
-          <a:p>
-            <a:pPr indent="0" marL="0">
-              <a:buNone/>
-            </a:pPr>
-            <a:r>
-              <a:rPr lang="en-US" sz="1600" dirty="0">
-                <a:solidFill>
-                  <a:srgbClr val="14161B"/>
-                </a:solidFill>
-                <a:latin typeface="Trade Gothic Next" pitchFamily="34" charset="0"/>
-                <a:ea typeface="Trade Gothic Next" pitchFamily="34" charset="-122"/>
-                <a:cs typeface="Trade Gothic Next" pitchFamily="34" charset="-120"/>
-              </a:rPr>
-              <a:t>Period 2: 2s 2p = 8</a:t>
-            </a:r>
-            <a:endParaRPr lang="en-US" sz="1600" dirty="0"/>
-          </a:p>
-          <a:p>
-            <a:pPr indent="0" marL="0">
-              <a:buNone/>
-            </a:pPr>
-            <a:r>
-              <a:rPr lang="en-US" sz="1600" dirty="0">
-                <a:solidFill>
-                  <a:srgbClr val="14161B"/>
-                </a:solidFill>
-                <a:latin typeface="Trade Gothic Next" pitchFamily="34" charset="0"/>
-                <a:ea typeface="Trade Gothic Next" pitchFamily="34" charset="-122"/>
-                <a:cs typeface="Trade Gothic Next" pitchFamily="34" charset="-120"/>
-              </a:rPr>
-              <a:t>Period 3: 3s 3p = 8</a:t>
-            </a:r>
-            <a:endParaRPr lang="en-US" sz="1600" dirty="0"/>
-          </a:p>
-        </p:txBody>
-      </p:sp>
-      <p:sp>
-        <p:nvSpPr>
-          <p:cNvPr id="6" name="Text 6"/>
-          <p:cNvSpPr txBox="1"/>
-          <p:nvPr>
-            <p:ph idx="112" type="body" hasCustomPrompt="1"/>
-          </p:nvPr>
-        </p:nvSpPr>
-        <p:spPr>
-          <a:xfrm>
-            <a:off x="4498848" y="2953512"/>
-            <a:ext cx="2999232" cy="219456"/>
-          </a:xfrm>
-          <a:prstGeom prst="rect">
-            <a:avLst/>
-          </a:prstGeom>
-          <a:noFill/>
-          <a:ln/>
-        </p:spPr>
-        <p:txBody>
-          <a:bodyPr wrap="square" lIns="0" tIns="0" rIns="0" bIns="0" rtlCol="0"/>
-          <a:lstStyle/>
-          <a:p>
-            <a:pPr indent="0" marL="0">
-              <a:buNone/>
-            </a:pPr>
-            <a:r>
-              <a:rPr lang="en-US" sz="1200" b="1" spc="120" kern="0" dirty="0">
-                <a:solidFill>
-                  <a:srgbClr val="2E3338"/>
-                </a:solidFill>
-                <a:latin typeface="Trade Gothic Next" pitchFamily="34" charset="0"/>
-                <a:ea typeface="Trade Gothic Next" pitchFamily="34" charset="-122"/>
-                <a:cs typeface="Trade Gothic Next" pitchFamily="34" charset="-120"/>
-              </a:rPr>
-              <a:t>PERIODS 4 AND 5</a:t>
-            </a:r>
-            <a:endParaRPr lang="en-US" sz="1200" dirty="0"/>
-          </a:p>
-        </p:txBody>
-      </p:sp>
-      <p:sp>
-        <p:nvSpPr>
-          <p:cNvPr id="7" name="Text 6"/>
-          <p:cNvSpPr txBox="1"/>
-          <p:nvPr>
-            <p:ph idx="113" type="body" hasCustomPrompt="1"/>
-          </p:nvPr>
-        </p:nvSpPr>
-        <p:spPr>
-          <a:xfrm>
-            <a:off x="4498848" y="3246120"/>
-            <a:ext cx="2999232" cy="1673352"/>
-          </a:xfrm>
-          <a:prstGeom prst="rect">
-            <a:avLst/>
-          </a:prstGeom>
-          <a:noFill/>
-          <a:ln/>
-        </p:spPr>
-        <p:txBody>
-          <a:bodyPr wrap="square" lIns="0" tIns="0" rIns="0" bIns="0" rtlCol="0"/>
-          <a:lstStyle/>
-          <a:p>
-            <a:pPr indent="0" marL="0">
-              <a:buNone/>
-            </a:pPr>
-            <a:r>
-              <a:rPr lang="en-US" sz="1600" dirty="0">
-                <a:solidFill>
-                  <a:srgbClr val="14161B"/>
-                </a:solidFill>
-                <a:latin typeface="Trade Gothic Next" pitchFamily="34" charset="0"/>
-                <a:ea typeface="Trade Gothic Next" pitchFamily="34" charset="-122"/>
-                <a:cs typeface="Trade Gothic Next" pitchFamily="34" charset="-120"/>
-              </a:rPr>
-              <a:t>Period 4: 4s 3d 4p = 18</a:t>
-            </a:r>
-            <a:endParaRPr lang="en-US" sz="1600" dirty="0"/>
-          </a:p>
-          <a:p>
-            <a:pPr indent="0" marL="0">
-              <a:buNone/>
-            </a:pPr>
-            <a:r>
-              <a:rPr lang="en-US" sz="1600" dirty="0">
-                <a:solidFill>
-                  <a:srgbClr val="14161B"/>
-                </a:solidFill>
-                <a:latin typeface="Trade Gothic Next" pitchFamily="34" charset="0"/>
-                <a:ea typeface="Trade Gothic Next" pitchFamily="34" charset="-122"/>
-                <a:cs typeface="Trade Gothic Next" pitchFamily="34" charset="-120"/>
-              </a:rPr>
-              <a:t>Period 5: 5s 4d 5p = 18</a:t>
-            </a:r>
-            <a:endParaRPr lang="en-US" sz="1600" dirty="0"/>
-          </a:p>
-        </p:txBody>
-      </p:sp>
-      <p:sp>
-        <p:nvSpPr>
-          <p:cNvPr id="8" name="Text 7"/>
-          <p:cNvSpPr txBox="1"/>
-          <p:nvPr>
-            <p:ph idx="115" type="body" hasCustomPrompt="1"/>
-          </p:nvPr>
-        </p:nvSpPr>
-        <p:spPr>
-          <a:xfrm>
-            <a:off x="8110728" y="2953512"/>
-            <a:ext cx="2999232" cy="219456"/>
-          </a:xfrm>
-          <a:prstGeom prst="rect">
-            <a:avLst/>
-          </a:prstGeom>
-          <a:noFill/>
-          <a:ln/>
-        </p:spPr>
-        <p:txBody>
-          <a:bodyPr wrap="square" lIns="0" tIns="0" rIns="0" bIns="0" rtlCol="0"/>
-          <a:lstStyle/>
-          <a:p>
-            <a:pPr indent="0" marL="0">
-              <a:buNone/>
-            </a:pPr>
-            <a:r>
-              <a:rPr lang="en-US" sz="1200" b="1" spc="120" kern="0" dirty="0">
-                <a:solidFill>
-                  <a:srgbClr val="2E3338"/>
-                </a:solidFill>
-                <a:latin typeface="Trade Gothic Next" pitchFamily="34" charset="0"/>
-                <a:ea typeface="Trade Gothic Next" pitchFamily="34" charset="-122"/>
-                <a:cs typeface="Trade Gothic Next" pitchFamily="34" charset="-120"/>
-              </a:rPr>
-              <a:t>PERIODS 6 AND 7</a:t>
-            </a:r>
-            <a:endParaRPr lang="en-US" sz="1200" dirty="0"/>
-          </a:p>
-        </p:txBody>
-      </p:sp>
-      <p:sp>
-        <p:nvSpPr>
-          <p:cNvPr id="9" name="Text 7"/>
-          <p:cNvSpPr txBox="1"/>
-          <p:nvPr>
-            <p:ph idx="116" type="body" hasCustomPrompt="1"/>
-          </p:nvPr>
-        </p:nvSpPr>
-        <p:spPr>
-          <a:xfrm>
-            <a:off x="8110728" y="3246120"/>
-            <a:ext cx="2999232" cy="1673352"/>
-          </a:xfrm>
-          <a:prstGeom prst="rect">
-            <a:avLst/>
-          </a:prstGeom>
-          <a:noFill/>
-          <a:ln/>
-        </p:spPr>
-        <p:txBody>
-          <a:bodyPr wrap="square" lIns="0" tIns="0" rIns="0" bIns="0" rtlCol="0"/>
-          <a:lstStyle/>
-          <a:p>
-            <a:pPr indent="0" marL="0">
-              <a:buNone/>
-            </a:pPr>
-            <a:r>
-              <a:rPr lang="en-US" sz="1600" dirty="0">
-                <a:solidFill>
-                  <a:srgbClr val="14161B"/>
-                </a:solidFill>
-                <a:latin typeface="Trade Gothic Next" pitchFamily="34" charset="0"/>
-                <a:ea typeface="Trade Gothic Next" pitchFamily="34" charset="-122"/>
-                <a:cs typeface="Trade Gothic Next" pitchFamily="34" charset="-120"/>
-              </a:rPr>
-              <a:t>Period 6: 6s 4f 5d 6p = 32</a:t>
-            </a:r>
-            <a:endParaRPr lang="en-US" sz="1600" dirty="0"/>
-          </a:p>
-          <a:p>
-            <a:pPr indent="0" marL="0">
-              <a:buNone/>
-            </a:pPr>
-            <a:r>
-              <a:rPr lang="en-US" sz="1600" dirty="0">
-                <a:solidFill>
-                  <a:srgbClr val="14161B"/>
-                </a:solidFill>
-                <a:latin typeface="Trade Gothic Next" pitchFamily="34" charset="0"/>
-                <a:ea typeface="Trade Gothic Next" pitchFamily="34" charset="-122"/>
-                <a:cs typeface="Trade Gothic Next" pitchFamily="34" charset="-120"/>
-              </a:rPr>
-              <a:t>Period 7: 7s 5f 6d 7p = 32</a:t>
-            </a:r>
-            <a:endParaRPr lang="en-US" sz="1600" dirty="0"/>
-          </a:p>
-        </p:txBody>
-      </p:sp>
-      <p:sp>
-        <p:nvSpPr>
-          <p:cNvPr id="10" name="Text 9"/>
-          <p:cNvSpPr txBox="1"/>
-          <p:nvPr>
-            <p:ph idx="119" type="body" hasCustomPrompt="1"/>
-          </p:nvPr>
-        </p:nvSpPr>
-        <p:spPr>
-          <a:xfrm>
-            <a:off x="2240280" y="5486400"/>
-            <a:ext cx="8991295" cy="402336"/>
-          </a:xfrm>
-          <a:prstGeom prst="rect">
-            <a:avLst/>
-          </a:prstGeom>
-          <a:noFill/>
-          <a:ln/>
-        </p:spPr>
-        <p:txBody>
-          <a:bodyPr wrap="square" lIns="0" tIns="0" rIns="0" bIns="0" rtlCol="0" anchor="ctr"/>
-          <a:lstStyle/>
-          <a:p>
-            <a:pPr indent="0" marL="0">
-              <a:buNone/>
-            </a:pPr>
-            <a:r>
-              <a:rPr lang="en-US" sz="1600" b="1" dirty="0">
-                <a:solidFill>
-                  <a:srgbClr val="EDF0E5"/>
-                </a:solidFill>
-                <a:latin typeface="Trade Gothic Next" pitchFamily="34" charset="0"/>
-                <a:ea typeface="Trade Gothic Next" pitchFamily="34" charset="-122"/>
-                <a:cs typeface="Trade Gothic Next" pitchFamily="34" charset="-120"/>
-              </a:rPr>
-              <a:t>Period lengths 2, 8, 8, 18, 18, 32, 32 come from the sublevels that fill in each.</a:t>
-            </a:r>
-            <a:endParaRPr lang="en-US" sz="1600" dirty="0"/>
-          </a:p>
-        </p:txBody>
-      </p:sp>
-      <p:sp>
-        <p:nvSpPr>
-          <p:cNvPr id="11" name="Text 1"/>
-          <p:cNvSpPr txBox="1"/>
-          <p:nvPr>
-            <p:ph idx="101" type="body" hasCustomPrompt="1"/>
-          </p:nvPr>
-        </p:nvSpPr>
-        <p:spPr>
-          <a:xfrm>
-            <a:off x="685800" y="384048"/>
-            <a:ext cx="6400800" cy="237744"/>
-          </a:xfrm>
-          <a:prstGeom prst="rect">
-            <a:avLst/>
-          </a:prstGeom>
-          <a:noFill/>
-          <a:ln/>
-        </p:spPr>
-        <p:txBody>
-          <a:bodyPr wrap="square" lIns="0" tIns="0" rIns="0" bIns="0" rtlCol="0" anchor="ctr"/>
-          <a:lstStyle/>
-          <a:p>
-            <a:pPr indent="0" marL="0">
-              <a:buNone/>
-            </a:pPr>
-            <a:r>
-              <a:rPr lang="en-US" sz="1100" b="1" spc="160" kern="0" dirty="0">
-                <a:solidFill>
-                  <a:srgbClr val="14161B"/>
-                </a:solidFill>
-                <a:latin typeface="Trade Gothic Next" pitchFamily="34" charset="0"/>
-                <a:ea typeface="Trade Gothic Next" pitchFamily="34" charset="-122"/>
-                <a:cs typeface="Trade Gothic Next" pitchFamily="34" charset="-120"/>
-              </a:rPr>
-              <a:t>UNIT 02  •  CHEMISTRY</a:t>
-            </a:r>
-            <a:endParaRPr lang="en-US" sz="1100" dirty="0"/>
-          </a:p>
-        </p:txBody>
-      </p:sp>
-      <p:sp>
-        <p:nvSpPr>
-          <p:cNvPr id="12" name="Text 10"/>
-          <p:cNvSpPr txBox="1"/>
-          <p:nvPr>
-            <p:ph idx="121" type="body" hasCustomPrompt="1"/>
-          </p:nvPr>
-        </p:nvSpPr>
-        <p:spPr>
-          <a:xfrm>
-            <a:off x="8762695" y="6382512"/>
-            <a:ext cx="2743200" cy="237744"/>
-          </a:xfrm>
-          <a:prstGeom prst="rect">
-            <a:avLst/>
-          </a:prstGeom>
-          <a:noFill/>
-          <a:ln/>
-        </p:spPr>
-        <p:txBody>
-          <a:bodyPr wrap="square" lIns="0" tIns="0" rIns="0" bIns="0" rtlCol="0" anchor="ctr"/>
-          <a:lstStyle/>
-          <a:p>
-            <a:pPr algn="r" indent="0" marL="0">
-              <a:buNone/>
-            </a:pPr>
-            <a:r>
-              <a:rPr lang="en-US" sz="1000" b="1" spc="140" kern="0" dirty="0">
-                <a:solidFill>
-                  <a:srgbClr val="2E3338"/>
-                </a:solidFill>
-                <a:latin typeface="Trade Gothic Next" pitchFamily="34" charset="0"/>
-                <a:ea typeface="Trade Gothic Next" pitchFamily="34" charset="-122"/>
-                <a:cs typeface="Trade Gothic Next" pitchFamily="34" charset="-120"/>
-              </a:rPr>
-              <a:t>U02 • S02.2</a:t>
-            </a:r>
-            <a:endParaRPr lang="en-US" sz="1000" dirty="0"/>
-          </a:p>
-        </p:txBody>
-      </p:sp>
-      <p:sp>
-        <p:nvSpPr>
-          <p:cNvPr id="13" name="Text 4"/>
-          <p:cNvSpPr txBox="1"/>
-          <p:nvPr>
-            <p:ph idx="107" hasCustomPrompt="1"/>
-          </p:nvPr>
-        </p:nvSpPr>
-        <p:spPr>
-          <a:xfrm>
-            <a:off x="8641080" y="1088136"/>
-            <a:ext cx="2633472" cy="1481328"/>
-          </a:xfrm>
-          <a:prstGeom prst="rect">
-            <a:avLst/>
-          </a:prstGeom>
-          <a:noFill/>
-          <a:ln/>
-        </p:spPr>
-        <p:txBody>
-          <a:bodyPr wrap="square" lIns="0" tIns="0" rIns="0" bIns="0" rtlCol="0" anchor="ctr"/>
-          <a:lstStyle/>
-          <a:p>
-            <a:pPr algn="ctr" indent="0" marL="0">
-              <a:buNone/>
-            </a:pPr>
-            <a:endParaRPr lang="en-US" sz="1200" dirty="0"/>
           </a:p>
         </p:txBody>
       </p:sp>
@@ -17830,7 +18143,7 @@
                 <a:ea typeface="Trade Gothic Next" pitchFamily="34" charset="-122"/>
                 <a:cs typeface="Trade Gothic Next" pitchFamily="34" charset="-120"/>
               </a:rPr>
-              <a:t>Check: Level, Sublevel, Orbital</a:t>
+              <a:t>Why Periods Have These Lengths</a:t>
             </a:r>
             <a:endParaRPr lang="en-US" sz="2800" dirty="0"/>
           </a:p>
@@ -17871,7 +18184,7 @@
                 <a:ea typeface="Trade Gothic Next" pitchFamily="34" charset="-122"/>
                 <a:cs typeface="Trade Gothic Next" pitchFamily="34" charset="-120"/>
               </a:rPr>
-              <a:t>Questions 1 to 3. Answer in your notes.</a:t>
+              <a:t>The number after = is how many elements are in that period.</a:t>
             </a:r>
             <a:endParaRPr lang="en-US" sz="1700" dirty="0"/>
           </a:p>
@@ -17912,7 +18225,7 @@
                 <a:ea typeface="Trade Gothic Next" pitchFamily="34" charset="-122"/>
                 <a:cs typeface="Trade Gothic Next" pitchFamily="34" charset="-120"/>
               </a:rPr>
-              <a:t>QUESTION 1</a:t>
+              <a:t>PERIODS 1 TO 3</a:t>
             </a:r>
             <a:endParaRPr lang="en-US" sz="1200" dirty="0"/>
           </a:p>
@@ -17953,7 +18266,41 @@
                 <a:ea typeface="Trade Gothic Next" pitchFamily="34" charset="-122"/>
                 <a:cs typeface="Trade Gothic Next" pitchFamily="34" charset="-120"/>
               </a:rPr>
-              <a:t>How is an orbital different from a Bohr orbit?</a:t>
+              <a:t>Period 1: 1s = 2</a:t>
+            </a:r>
+            <a:endParaRPr lang="en-US" sz="1600" dirty="0"/>
+          </a:p>
+          <a:p>
+            <a:pPr indent="0" marL="0">
+              <a:buNone/>
+            </a:pPr>
+            <a:r>
+              <a:rPr lang="en-US" sz="1600" dirty="0">
+                <a:solidFill>
+                  <a:srgbClr val="14161B"/>
+                </a:solidFill>
+                <a:latin typeface="Trade Gothic Next" pitchFamily="34" charset="0"/>
+                <a:ea typeface="Trade Gothic Next" pitchFamily="34" charset="-122"/>
+                <a:cs typeface="Trade Gothic Next" pitchFamily="34" charset="-120"/>
+              </a:rPr>
+              <a:t>Period 2: 2s 2p = 8</a:t>
+            </a:r>
+            <a:endParaRPr lang="en-US" sz="1600" dirty="0"/>
+          </a:p>
+          <a:p>
+            <a:pPr indent="0" marL="0">
+              <a:buNone/>
+            </a:pPr>
+            <a:r>
+              <a:rPr lang="en-US" sz="1600" dirty="0">
+                <a:solidFill>
+                  <a:srgbClr val="14161B"/>
+                </a:solidFill>
+                <a:latin typeface="Trade Gothic Next" pitchFamily="34" charset="0"/>
+                <a:ea typeface="Trade Gothic Next" pitchFamily="34" charset="-122"/>
+                <a:cs typeface="Trade Gothic Next" pitchFamily="34" charset="-120"/>
+              </a:rPr>
+              <a:t>Period 3: 3s 3p = 8</a:t>
             </a:r>
             <a:endParaRPr lang="en-US" sz="1600" dirty="0"/>
           </a:p>
@@ -17994,7 +18341,7 @@
                 <a:ea typeface="Trade Gothic Next" pitchFamily="34" charset="-122"/>
                 <a:cs typeface="Trade Gothic Next" pitchFamily="34" charset="-120"/>
               </a:rPr>
-              <a:t>QUESTION 2</a:t>
+              <a:t>PERIODS 4 AND 5</a:t>
             </a:r>
             <a:endParaRPr lang="en-US" sz="1200" dirty="0"/>
           </a:p>
@@ -18035,7 +18382,24 @@
                 <a:ea typeface="Trade Gothic Next" pitchFamily="34" charset="-122"/>
                 <a:cs typeface="Trade Gothic Next" pitchFamily="34" charset="-120"/>
               </a:rPr>
-              <a:t>List all the sublevels in n = 2.</a:t>
+              <a:t>Period 4: 4s 3d 4p = 18</a:t>
+            </a:r>
+            <a:endParaRPr lang="en-US" sz="1600" dirty="0"/>
+          </a:p>
+          <a:p>
+            <a:pPr indent="0" marL="0">
+              <a:buNone/>
+            </a:pPr>
+            <a:r>
+              <a:rPr lang="en-US" sz="1600" dirty="0">
+                <a:solidFill>
+                  <a:srgbClr val="14161B"/>
+                </a:solidFill>
+                <a:latin typeface="Trade Gothic Next" pitchFamily="34" charset="0"/>
+                <a:ea typeface="Trade Gothic Next" pitchFamily="34" charset="-122"/>
+                <a:cs typeface="Trade Gothic Next" pitchFamily="34" charset="-120"/>
+              </a:rPr>
+              <a:t>Period 5: 5s 4d 5p = 18</a:t>
             </a:r>
             <a:endParaRPr lang="en-US" sz="1600" dirty="0"/>
           </a:p>
@@ -18076,7 +18440,7 @@
                 <a:ea typeface="Trade Gothic Next" pitchFamily="34" charset="-122"/>
                 <a:cs typeface="Trade Gothic Next" pitchFamily="34" charset="-120"/>
               </a:rPr>
-              <a:t>QUESTION 3</a:t>
+              <a:t>PERIODS 6 AND 7</a:t>
             </a:r>
             <a:endParaRPr lang="en-US" sz="1200" dirty="0"/>
           </a:p>
@@ -18117,7 +18481,24 @@
                 <a:ea typeface="Trade Gothic Next" pitchFamily="34" charset="-122"/>
                 <a:cs typeface="Trade Gothic Next" pitchFamily="34" charset="-120"/>
               </a:rPr>
-              <a:t>How many orbitals are in a d sublevel? How many electrons can it hold?</a:t>
+              <a:t>Period 6: 6s 4f 5d 6p = 32</a:t>
+            </a:r>
+            <a:endParaRPr lang="en-US" sz="1600" dirty="0"/>
+          </a:p>
+          <a:p>
+            <a:pPr indent="0" marL="0">
+              <a:buNone/>
+            </a:pPr>
+            <a:r>
+              <a:rPr lang="en-US" sz="1600" dirty="0">
+                <a:solidFill>
+                  <a:srgbClr val="14161B"/>
+                </a:solidFill>
+                <a:latin typeface="Trade Gothic Next" pitchFamily="34" charset="0"/>
+                <a:ea typeface="Trade Gothic Next" pitchFamily="34" charset="-122"/>
+                <a:cs typeface="Trade Gothic Next" pitchFamily="34" charset="-120"/>
+              </a:rPr>
+              <a:t>Period 7: 7s 5f 6d 7p = 32</a:t>
             </a:r>
             <a:endParaRPr lang="en-US" sz="1600" dirty="0"/>
           </a:p>
@@ -18158,7 +18539,7 @@
                 <a:ea typeface="Trade Gothic Next" pitchFamily="34" charset="-122"/>
                 <a:cs typeface="Trade Gothic Next" pitchFamily="34" charset="-120"/>
               </a:rPr>
-              <a:t>Answer all three in your notes before we compare.</a:t>
+              <a:t>Period lengths 2, 8, 8, 18, 18, 32, 32 come from the sublevels that fill in each.</a:t>
             </a:r>
             <a:endParaRPr lang="en-US" sz="1600" dirty="0"/>
           </a:p>
@@ -18248,7 +18629,7 @@
       </p:sp>
       <p:sp>
         <p:nvSpPr>
-          <p:cNvPr id="13" name="Text 4"/>
+          <p:cNvPr id="14" name="Text 4"/>
           <p:cNvSpPr txBox="1"/>
           <p:nvPr>
             <p:ph idx="107" hasCustomPrompt="1"/>
@@ -18303,16 +18684,57 @@
       </p:grpSpPr>
       <p:sp>
         <p:nvSpPr>
-          <p:cNvPr id="2" name="Text 5"/>
-          <p:cNvSpPr txBox="1"/>
-          <p:nvPr>
-            <p:ph idx="107" type="title" hasCustomPrompt="1"/>
-          </p:nvPr>
-        </p:nvSpPr>
-        <p:spPr>
-          <a:xfrm>
-            <a:off x="685800" y="1188720"/>
-            <a:ext cx="4892040" cy="868680"/>
+          <p:cNvPr id="2" name="Text 2"/>
+          <p:cNvSpPr txBox="1"/>
+          <p:nvPr>
+            <p:ph idx="103" type="title" hasCustomPrompt="1"/>
+          </p:nvPr>
+        </p:nvSpPr>
+        <p:spPr>
+          <a:xfrm>
+            <a:off x="685800" y="932688"/>
+            <a:ext cx="7360920" cy="868680"/>
+          </a:xfrm>
+          <a:prstGeom prst="rect">
+            <a:avLst/>
+          </a:prstGeom>
+          <a:noFill/>
+          <a:ln/>
+        </p:spPr>
+        <p:txBody>
+          <a:bodyPr wrap="square" lIns="0" tIns="0" rIns="0" bIns="0" rtlCol="0" anchor="t"/>
+          <a:lstStyle/>
+          <a:p>
+            <a:pPr algn="l" indent="0" marL="0">
+              <a:buNone/>
+            </a:pPr>
+            <a:r>
+              <a:rPr lang="en-US" sz="2800" b="1" dirty="0">
+                <a:solidFill>
+                  <a:srgbClr val="14161B"/>
+                </a:solidFill>
+                <a:latin typeface="Trade Gothic Next" pitchFamily="34" charset="0"/>
+                <a:ea typeface="Trade Gothic Next" pitchFamily="34" charset="-122"/>
+                <a:cs typeface="Trade Gothic Next" pitchFamily="34" charset="-120"/>
+              </a:rPr>
+              <a:t>What You Will Be Able to Do</a:t>
+            </a:r>
+            <a:endParaRPr lang="en-US" sz="2800" dirty="0"/>
+          </a:p>
+        </p:txBody>
+      </p:sp>
+      <p:sp>
+        <p:nvSpPr>
+          <p:cNvPr id="3" name="Text 2"/>
+          <p:cNvSpPr txBox="1"/>
+          <p:nvPr>
+            <p:ph idx="104" type="body" hasCustomPrompt="1"/>
+          </p:nvPr>
+        </p:nvSpPr>
+        <p:spPr>
+          <a:xfrm>
+            <a:off x="685800" y="1847088"/>
+            <a:ext cx="7360920" cy="384048"/>
           </a:xfrm>
           <a:prstGeom prst="rect">
             <a:avLst/>
@@ -18324,11 +18746,298 @@
           <a:bodyPr wrap="square" lIns="0" tIns="0" rIns="0" bIns="0" rtlCol="0"/>
           <a:lstStyle/>
           <a:p>
-            <a:pPr algn="l" indent="0" marL="0">
-              <a:buNone/>
-            </a:pPr>
-            <a:r>
-              <a:rPr lang="en-US" sz="2800" b="1" dirty="0">
+            <a:pPr indent="0" marL="0">
+              <a:buNone/>
+            </a:pPr>
+            <a:r>
+              <a:rPr lang="en-US" sz="1700" dirty="0">
+                <a:solidFill>
+                  <a:srgbClr val="2E3338"/>
+                </a:solidFill>
+                <a:latin typeface="Trade Gothic Next" pitchFamily="34" charset="0"/>
+                <a:ea typeface="Trade Gothic Next" pitchFamily="34" charset="-122"/>
+                <a:cs typeface="Trade Gothic Next" pitchFamily="34" charset="-120"/>
+              </a:rPr>
+              <a:t>By the end of 2.2 you can do these three things.</a:t>
+            </a:r>
+            <a:endParaRPr lang="en-US" sz="1700" dirty="0"/>
+          </a:p>
+        </p:txBody>
+      </p:sp>
+      <p:sp>
+        <p:nvSpPr>
+          <p:cNvPr id="4" name="Text 5"/>
+          <p:cNvSpPr txBox="1"/>
+          <p:nvPr>
+            <p:ph idx="109" type="body" hasCustomPrompt="1"/>
+          </p:nvPr>
+        </p:nvSpPr>
+        <p:spPr>
+          <a:xfrm>
+            <a:off x="886968" y="2953512"/>
+            <a:ext cx="2999232" cy="219456"/>
+          </a:xfrm>
+          <a:prstGeom prst="rect">
+            <a:avLst/>
+          </a:prstGeom>
+          <a:noFill/>
+          <a:ln/>
+        </p:spPr>
+        <p:txBody>
+          <a:bodyPr wrap="square" lIns="0" tIns="0" rIns="0" bIns="0" rtlCol="0"/>
+          <a:lstStyle/>
+          <a:p>
+            <a:pPr indent="0" marL="0">
+              <a:buNone/>
+            </a:pPr>
+            <a:r>
+              <a:rPr lang="en-US" sz="1200" b="1" spc="120" kern="0" dirty="0">
+                <a:solidFill>
+                  <a:srgbClr val="2E3338"/>
+                </a:solidFill>
+                <a:latin typeface="Trade Gothic Next" pitchFamily="34" charset="0"/>
+                <a:ea typeface="Trade Gothic Next" pitchFamily="34" charset="-122"/>
+                <a:cs typeface="Trade Gothic Next" pitchFamily="34" charset="-120"/>
+              </a:rPr>
+              <a:t>THE MODEL</a:t>
+            </a:r>
+            <a:endParaRPr lang="en-US" sz="1200" dirty="0"/>
+          </a:p>
+        </p:txBody>
+      </p:sp>
+      <p:sp>
+        <p:nvSpPr>
+          <p:cNvPr id="5" name="Text 5"/>
+          <p:cNvSpPr txBox="1"/>
+          <p:nvPr>
+            <p:ph idx="110" type="body" hasCustomPrompt="1"/>
+          </p:nvPr>
+        </p:nvSpPr>
+        <p:spPr>
+          <a:xfrm>
+            <a:off x="886968" y="3246120"/>
+            <a:ext cx="2999232" cy="1673352"/>
+          </a:xfrm>
+          <a:prstGeom prst="rect">
+            <a:avLst/>
+          </a:prstGeom>
+          <a:noFill/>
+          <a:ln/>
+        </p:spPr>
+        <p:txBody>
+          <a:bodyPr wrap="square" lIns="0" tIns="0" rIns="0" bIns="0" rtlCol="0"/>
+          <a:lstStyle/>
+          <a:p>
+            <a:pPr indent="0" marL="0">
+              <a:buNone/>
+            </a:pPr>
+            <a:r>
+              <a:rPr lang="en-US" sz="1600" dirty="0">
+                <a:solidFill>
+                  <a:srgbClr val="14161B"/>
+                </a:solidFill>
+                <a:latin typeface="Trade Gothic Next" pitchFamily="34" charset="0"/>
+                <a:ea typeface="Trade Gothic Next" pitchFamily="34" charset="-122"/>
+                <a:cs typeface="Trade Gothic Next" pitchFamily="34" charset="-120"/>
+              </a:rPr>
+              <a:t>Describe an orbital as a region where an electron is probably found.</a:t>
+            </a:r>
+            <a:endParaRPr lang="en-US" sz="1600" dirty="0"/>
+          </a:p>
+        </p:txBody>
+      </p:sp>
+      <p:sp>
+        <p:nvSpPr>
+          <p:cNvPr id="6" name="Text 6"/>
+          <p:cNvSpPr txBox="1"/>
+          <p:nvPr>
+            <p:ph idx="112" type="body" hasCustomPrompt="1"/>
+          </p:nvPr>
+        </p:nvSpPr>
+        <p:spPr>
+          <a:xfrm>
+            <a:off x="4498848" y="2953512"/>
+            <a:ext cx="2999232" cy="219456"/>
+          </a:xfrm>
+          <a:prstGeom prst="rect">
+            <a:avLst/>
+          </a:prstGeom>
+          <a:noFill/>
+          <a:ln/>
+        </p:spPr>
+        <p:txBody>
+          <a:bodyPr wrap="square" lIns="0" tIns="0" rIns="0" bIns="0" rtlCol="0"/>
+          <a:lstStyle/>
+          <a:p>
+            <a:pPr indent="0" marL="0">
+              <a:buNone/>
+            </a:pPr>
+            <a:r>
+              <a:rPr lang="en-US" sz="1200" b="1" spc="120" kern="0" dirty="0">
+                <a:solidFill>
+                  <a:srgbClr val="2E3338"/>
+                </a:solidFill>
+                <a:latin typeface="Trade Gothic Next" pitchFamily="34" charset="0"/>
+                <a:ea typeface="Trade Gothic Next" pitchFamily="34" charset="-122"/>
+                <a:cs typeface="Trade Gothic Next" pitchFamily="34" charset="-120"/>
+              </a:rPr>
+              <a:t>NAMES AND COUNTS</a:t>
+            </a:r>
+            <a:endParaRPr lang="en-US" sz="1200" dirty="0"/>
+          </a:p>
+        </p:txBody>
+      </p:sp>
+      <p:sp>
+        <p:nvSpPr>
+          <p:cNvPr id="7" name="Text 6"/>
+          <p:cNvSpPr txBox="1"/>
+          <p:nvPr>
+            <p:ph idx="113" type="body" hasCustomPrompt="1"/>
+          </p:nvPr>
+        </p:nvSpPr>
+        <p:spPr>
+          <a:xfrm>
+            <a:off x="4498848" y="3246120"/>
+            <a:ext cx="2999232" cy="1673352"/>
+          </a:xfrm>
+          <a:prstGeom prst="rect">
+            <a:avLst/>
+          </a:prstGeom>
+          <a:noFill/>
+          <a:ln/>
+        </p:spPr>
+        <p:txBody>
+          <a:bodyPr wrap="square" lIns="0" tIns="0" rIns="0" bIns="0" rtlCol="0"/>
+          <a:lstStyle/>
+          <a:p>
+            <a:pPr indent="0" marL="0">
+              <a:buNone/>
+            </a:pPr>
+            <a:r>
+              <a:rPr lang="en-US" sz="1600" dirty="0">
+                <a:solidFill>
+                  <a:srgbClr val="14161B"/>
+                </a:solidFill>
+                <a:latin typeface="Trade Gothic Next" pitchFamily="34" charset="0"/>
+                <a:ea typeface="Trade Gothic Next" pitchFamily="34" charset="-122"/>
+                <a:cs typeface="Trade Gothic Next" pitchFamily="34" charset="-120"/>
+              </a:rPr>
+              <a:t>Name the sublevels in each level. State the orbitals and electrons each holds.</a:t>
+            </a:r>
+            <a:endParaRPr lang="en-US" sz="1600" dirty="0"/>
+          </a:p>
+        </p:txBody>
+      </p:sp>
+      <p:sp>
+        <p:nvSpPr>
+          <p:cNvPr id="8" name="Text 7"/>
+          <p:cNvSpPr txBox="1"/>
+          <p:nvPr>
+            <p:ph idx="115" type="body" hasCustomPrompt="1"/>
+          </p:nvPr>
+        </p:nvSpPr>
+        <p:spPr>
+          <a:xfrm>
+            <a:off x="8110728" y="2953512"/>
+            <a:ext cx="2999232" cy="219456"/>
+          </a:xfrm>
+          <a:prstGeom prst="rect">
+            <a:avLst/>
+          </a:prstGeom>
+          <a:noFill/>
+          <a:ln/>
+        </p:spPr>
+        <p:txBody>
+          <a:bodyPr wrap="square" lIns="0" tIns="0" rIns="0" bIns="0" rtlCol="0"/>
+          <a:lstStyle/>
+          <a:p>
+            <a:pPr indent="0" marL="0">
+              <a:buNone/>
+            </a:pPr>
+            <a:r>
+              <a:rPr lang="en-US" sz="1200" b="1" spc="120" kern="0" dirty="0">
+                <a:solidFill>
+                  <a:srgbClr val="2E3338"/>
+                </a:solidFill>
+                <a:latin typeface="Trade Gothic Next" pitchFamily="34" charset="0"/>
+                <a:ea typeface="Trade Gothic Next" pitchFamily="34" charset="-122"/>
+                <a:cs typeface="Trade Gothic Next" pitchFamily="34" charset="-120"/>
+              </a:rPr>
+              <a:t>THE TABLE</a:t>
+            </a:r>
+            <a:endParaRPr lang="en-US" sz="1200" dirty="0"/>
+          </a:p>
+        </p:txBody>
+      </p:sp>
+      <p:sp>
+        <p:nvSpPr>
+          <p:cNvPr id="9" name="Text 7"/>
+          <p:cNvSpPr txBox="1"/>
+          <p:nvPr>
+            <p:ph idx="116" type="body" hasCustomPrompt="1"/>
+          </p:nvPr>
+        </p:nvSpPr>
+        <p:spPr>
+          <a:xfrm>
+            <a:off x="8110728" y="3246120"/>
+            <a:ext cx="2999232" cy="1673352"/>
+          </a:xfrm>
+          <a:prstGeom prst="rect">
+            <a:avLst/>
+          </a:prstGeom>
+          <a:noFill/>
+          <a:ln/>
+        </p:spPr>
+        <p:txBody>
+          <a:bodyPr wrap="square" lIns="0" tIns="0" rIns="0" bIns="0" rtlCol="0"/>
+          <a:lstStyle/>
+          <a:p>
+            <a:pPr indent="0" marL="0">
+              <a:buNone/>
+            </a:pPr>
+            <a:r>
+              <a:rPr lang="en-US" sz="1600" dirty="0">
+                <a:solidFill>
+                  <a:srgbClr val="14161B"/>
+                </a:solidFill>
+                <a:latin typeface="Trade Gothic Next" pitchFamily="34" charset="0"/>
+                <a:ea typeface="Trade Gothic Next" pitchFamily="34" charset="-122"/>
+                <a:cs typeface="Trade Gothic Next" pitchFamily="34" charset="-120"/>
+              </a:rPr>
+              <a:t>Link sublevels and orbitals to the block layout of the periodic table.</a:t>
+            </a:r>
+            <a:endParaRPr lang="en-US" sz="1600" dirty="0"/>
+          </a:p>
+        </p:txBody>
+      </p:sp>
+      <p:sp>
+        <p:nvSpPr>
+          <p:cNvPr id="10" name="Text 9"/>
+          <p:cNvSpPr txBox="1"/>
+          <p:nvPr>
+            <p:ph idx="119" type="body" hasCustomPrompt="1"/>
+          </p:nvPr>
+        </p:nvSpPr>
+        <p:spPr>
+          <a:xfrm>
+            <a:off x="2240280" y="5486400"/>
+            <a:ext cx="8991295" cy="402336"/>
+          </a:xfrm>
+          <a:prstGeom prst="rect">
+            <a:avLst/>
+          </a:prstGeom>
+          <a:noFill/>
+          <a:ln/>
+        </p:spPr>
+        <p:txBody>
+          <a:bodyPr wrap="square" lIns="0" tIns="0" rIns="0" bIns="0" rtlCol="0" anchor="ctr"/>
+          <a:lstStyle/>
+          <a:p>
+            <a:pPr indent="0" marL="0">
+              <a:buNone/>
+            </a:pPr>
+            <a:r>
+              <a:rPr lang="en-US" sz="1600" b="1" dirty="0">
                 <a:solidFill>
                   <a:srgbClr val="EDF0E5"/>
                 </a:solidFill>
@@ -18336,48 +19045,7 @@
                 <a:ea typeface="Trade Gothic Next" pitchFamily="34" charset="-122"/>
                 <a:cs typeface="Trade Gothic Next" pitchFamily="34" charset="-120"/>
               </a:rPr>
-              <a:t>Bohr Failed for Helium</a:t>
-            </a:r>
-            <a:endParaRPr lang="en-US" sz="2800" dirty="0"/>
-          </a:p>
-        </p:txBody>
-      </p:sp>
-      <p:sp>
-        <p:nvSpPr>
-          <p:cNvPr id="3" name="Text 5"/>
-          <p:cNvSpPr txBox="1"/>
-          <p:nvPr>
-            <p:ph idx="108" type="body" hasCustomPrompt="1"/>
-          </p:nvPr>
-        </p:nvSpPr>
-        <p:spPr>
-          <a:xfrm>
-            <a:off x="685800" y="2148840"/>
-            <a:ext cx="4892040" cy="1005840"/>
-          </a:xfrm>
-          <a:prstGeom prst="rect">
-            <a:avLst/>
-          </a:prstGeom>
-          <a:noFill/>
-          <a:ln/>
-        </p:spPr>
-        <p:txBody>
-          <a:bodyPr wrap="square" lIns="0" tIns="0" rIns="0" bIns="0" rtlCol="0"/>
-          <a:lstStyle/>
-          <a:p>
-            <a:pPr indent="0" marL="0">
-              <a:buNone/>
-            </a:pPr>
-            <a:r>
-              <a:rPr lang="en-US" sz="1600" dirty="0">
-                <a:solidFill>
-                  <a:srgbClr val="BDB6AA"/>
-                </a:solidFill>
-                <a:latin typeface="Trade Gothic Next" pitchFamily="34" charset="0"/>
-                <a:ea typeface="Trade Gothic Next" pitchFamily="34" charset="-122"/>
-                <a:cs typeface="Trade Gothic Next" pitchFamily="34" charset="-120"/>
-              </a:rPr>
-              <a:t>The Bohr model worked for hydrogen. For helium and every atom after it, the energies came out wrong.</a:t>
+              <a:t>I can name any sublevel and say how many electrons it holds.</a:t>
             </a:r>
             <a:endParaRPr lang="en-US" sz="1600" dirty="0"/>
           </a:p>
@@ -18385,51 +19053,10 @@
       </p:sp>
       <p:sp>
         <p:nvSpPr>
-          <p:cNvPr id="4" name="Text 7"/>
-          <p:cNvSpPr txBox="1"/>
-          <p:nvPr>
-            <p:ph idx="111" type="body" hasCustomPrompt="1"/>
-          </p:nvPr>
-        </p:nvSpPr>
-        <p:spPr>
-          <a:xfrm>
-            <a:off x="886968" y="3950208"/>
-            <a:ext cx="4489704" cy="566928"/>
-          </a:xfrm>
-          <a:prstGeom prst="rect">
-            <a:avLst/>
-          </a:prstGeom>
-          <a:noFill/>
-          <a:ln/>
-        </p:spPr>
-        <p:txBody>
-          <a:bodyPr wrap="square" lIns="0" tIns="0" rIns="0" bIns="0" rtlCol="0"/>
-          <a:lstStyle/>
-          <a:p>
-            <a:pPr indent="0" marL="0">
-              <a:buNone/>
-            </a:pPr>
-            <a:r>
-              <a:rPr lang="en-US" sz="1600" b="1" dirty="0">
-                <a:solidFill>
-                  <a:srgbClr val="EDF0E5"/>
-                </a:solidFill>
-                <a:latin typeface="Trade Gothic Next" pitchFamily="34" charset="0"/>
-                <a:ea typeface="Trade Gothic Next" pitchFamily="34" charset="-122"/>
-                <a:cs typeface="Trade Gothic Next" pitchFamily="34" charset="-120"/>
-              </a:rPr>
-              <a:t>Bohr failed for helium. What replaced it?</a:t>
-            </a:r>
-            <a:endParaRPr lang="en-US" sz="1600" dirty="0"/>
-          </a:p>
-        </p:txBody>
-      </p:sp>
-      <p:sp>
-        <p:nvSpPr>
-          <p:cNvPr id="5" name="Text 4"/>
-          <p:cNvSpPr txBox="1"/>
-          <p:nvPr>
-            <p:ph idx="105" type="body" hasCustomPrompt="1"/>
+          <p:cNvPr id="11" name="Text 1"/>
+          <p:cNvSpPr txBox="1"/>
+          <p:nvPr>
+            <p:ph idx="101" type="body" hasCustomPrompt="1"/>
           </p:nvPr>
         </p:nvSpPr>
         <p:spPr>
@@ -18453,7 +19080,7 @@
             <a:r>
               <a:rPr lang="en-US" sz="1100" b="1" spc="160" kern="0" dirty="0">
                 <a:solidFill>
-                  <a:srgbClr val="EDF0E5"/>
+                  <a:srgbClr val="14161B"/>
                 </a:solidFill>
                 <a:latin typeface="Trade Gothic Next" pitchFamily="34" charset="0"/>
                 <a:ea typeface="Trade Gothic Next" pitchFamily="34" charset="-122"/>
@@ -18467,10 +19094,10 @@
       </p:sp>
       <p:sp>
         <p:nvSpPr>
-          <p:cNvPr id="6" name="Text 8"/>
-          <p:cNvSpPr txBox="1"/>
-          <p:nvPr>
-            <p:ph idx="113" type="body" hasCustomPrompt="1"/>
+          <p:cNvPr id="12" name="Text 10"/>
+          <p:cNvSpPr txBox="1"/>
+          <p:nvPr>
+            <p:ph idx="121" type="body" hasCustomPrompt="1"/>
           </p:nvPr>
         </p:nvSpPr>
         <p:spPr>
@@ -18494,7 +19121,7 @@
             <a:r>
               <a:rPr lang="en-US" sz="1000" b="1" spc="140" kern="0" dirty="0">
                 <a:solidFill>
-                  <a:srgbClr val="BDB6AA"/>
+                  <a:srgbClr val="2E3338"/>
                 </a:solidFill>
                 <a:latin typeface="Trade Gothic Next" pitchFamily="34" charset="0"/>
                 <a:ea typeface="Trade Gothic Next" pitchFamily="34" charset="-122"/>
@@ -18508,16 +19135,16 @@
       </p:sp>
       <p:sp>
         <p:nvSpPr>
-          <p:cNvPr id="7" name="Text 4"/>
-          <p:cNvSpPr txBox="1"/>
-          <p:nvPr>
-            <p:ph idx="104" hasCustomPrompt="1"/>
-          </p:nvPr>
-        </p:nvSpPr>
-        <p:spPr>
-          <a:xfrm>
-            <a:off x="6355080" y="1298448"/>
-            <a:ext cx="4983480" cy="2798064"/>
+          <p:cNvPr id="14" name="Text 4"/>
+          <p:cNvSpPr txBox="1"/>
+          <p:nvPr>
+            <p:ph idx="107" hasCustomPrompt="1"/>
+          </p:nvPr>
+        </p:nvSpPr>
+        <p:spPr>
+          <a:xfrm>
+            <a:off x="8641080" y="1088136"/>
+            <a:ext cx="2633472" cy="1481328"/>
           </a:xfrm>
           <a:prstGeom prst="rect">
             <a:avLst/>
@@ -18572,7 +19199,7 @@
         <p:spPr>
           <a:xfrm>
             <a:off x="685800" y="932688"/>
-            <a:ext cx="10820095" cy="868680"/>
+            <a:ext cx="7360920" cy="868680"/>
           </a:xfrm>
           <a:prstGeom prst="rect">
             <a:avLst/>
@@ -18596,7 +19223,7 @@
                 <a:ea typeface="Trade Gothic Next" pitchFamily="34" charset="-122"/>
                 <a:cs typeface="Trade Gothic Next" pitchFamily="34" charset="-120"/>
               </a:rPr>
-              <a:t>Check: Capacity</a:t>
+              <a:t>Check: Level, Sublevel, Orbital</a:t>
             </a:r>
             <a:endParaRPr lang="en-US" sz="2800" dirty="0"/>
           </a:p>
@@ -18613,7 +19240,7 @@
         <p:spPr>
           <a:xfrm>
             <a:off x="685800" y="1847088"/>
-            <a:ext cx="10820095" cy="384048"/>
+            <a:ext cx="7360920" cy="384048"/>
           </a:xfrm>
           <a:prstGeom prst="rect">
             <a:avLst/>
@@ -18637,7 +19264,7 @@
                 <a:ea typeface="Trade Gothic Next" pitchFamily="34" charset="-122"/>
                 <a:cs typeface="Trade Gothic Next" pitchFamily="34" charset="-120"/>
               </a:rPr>
-              <a:t>Questions 4 and 5. Show the count.</a:t>
+              <a:t>Questions 1 to 3. Answer in your notes.</a:t>
             </a:r>
             <a:endParaRPr lang="en-US" sz="1700" dirty="0"/>
           </a:p>
@@ -18645,16 +19272,16 @@
       </p:sp>
       <p:sp>
         <p:nvSpPr>
-          <p:cNvPr id="4" name="Text 4"/>
-          <p:cNvSpPr txBox="1"/>
-          <p:nvPr>
-            <p:ph idx="108" type="body" hasCustomPrompt="1"/>
-          </p:nvPr>
-        </p:nvSpPr>
-        <p:spPr>
-          <a:xfrm>
-            <a:off x="5733288" y="2542032"/>
-            <a:ext cx="2752344" cy="219456"/>
+          <p:cNvPr id="4" name="Text 5"/>
+          <p:cNvSpPr txBox="1"/>
+          <p:nvPr>
+            <p:ph idx="109" type="body" hasCustomPrompt="1"/>
+          </p:nvPr>
+        </p:nvSpPr>
+        <p:spPr>
+          <a:xfrm>
+            <a:off x="886968" y="2953512"/>
+            <a:ext cx="2999232" cy="219456"/>
           </a:xfrm>
           <a:prstGeom prst="rect">
             <a:avLst/>
@@ -18678,7 +19305,7 @@
                 <a:ea typeface="Trade Gothic Next" pitchFamily="34" charset="-122"/>
                 <a:cs typeface="Trade Gothic Next" pitchFamily="34" charset="-120"/>
               </a:rPr>
-              <a:t>QUESTION 4</a:t>
+              <a:t>QUESTION 1</a:t>
             </a:r>
             <a:endParaRPr lang="en-US" sz="1200" dirty="0"/>
           </a:p>
@@ -18686,16 +19313,16 @@
       </p:sp>
       <p:sp>
         <p:nvSpPr>
-          <p:cNvPr id="5" name="Text 4"/>
-          <p:cNvSpPr txBox="1"/>
-          <p:nvPr>
-            <p:ph idx="109" type="body" hasCustomPrompt="1"/>
-          </p:nvPr>
-        </p:nvSpPr>
-        <p:spPr>
-          <a:xfrm>
-            <a:off x="5733288" y="2834640"/>
-            <a:ext cx="2752344" cy="1965960"/>
+          <p:cNvPr id="5" name="Text 5"/>
+          <p:cNvSpPr txBox="1"/>
+          <p:nvPr>
+            <p:ph idx="110" type="body" hasCustomPrompt="1"/>
+          </p:nvPr>
+        </p:nvSpPr>
+        <p:spPr>
+          <a:xfrm>
+            <a:off x="886968" y="3246120"/>
+            <a:ext cx="2999232" cy="1673352"/>
           </a:xfrm>
           <a:prstGeom prst="rect">
             <a:avLst/>
@@ -18719,7 +19346,7 @@
                 <a:ea typeface="Trade Gothic Next" pitchFamily="34" charset="-122"/>
                 <a:cs typeface="Trade Gothic Next" pitchFamily="34" charset="-120"/>
               </a:rPr>
-              <a:t>What is the maximum number of electrons in the third energy level?</a:t>
+              <a:t>How is an orbital different from a Bohr orbit?</a:t>
             </a:r>
             <a:endParaRPr lang="en-US" sz="1600" dirty="0"/>
           </a:p>
@@ -18727,16 +19354,16 @@
       </p:sp>
       <p:sp>
         <p:nvSpPr>
-          <p:cNvPr id="6" name="Text 5"/>
-          <p:cNvSpPr txBox="1"/>
-          <p:nvPr>
-            <p:ph idx="111" type="body" hasCustomPrompt="1"/>
-          </p:nvPr>
-        </p:nvSpPr>
-        <p:spPr>
-          <a:xfrm>
-            <a:off x="9116568" y="2542032"/>
-            <a:ext cx="2752344" cy="219456"/>
+          <p:cNvPr id="6" name="Text 6"/>
+          <p:cNvSpPr txBox="1"/>
+          <p:nvPr>
+            <p:ph idx="112" type="body" hasCustomPrompt="1"/>
+          </p:nvPr>
+        </p:nvSpPr>
+        <p:spPr>
+          <a:xfrm>
+            <a:off x="4498848" y="2953512"/>
+            <a:ext cx="2999232" cy="219456"/>
           </a:xfrm>
           <a:prstGeom prst="rect">
             <a:avLst/>
@@ -18754,13 +19381,13 @@
             <a:r>
               <a:rPr lang="en-US" sz="1200" b="1" spc="120" kern="0" dirty="0">
                 <a:solidFill>
-                  <a:srgbClr val="BDB6AA"/>
-                </a:solidFill>
-                <a:latin typeface="Trade Gothic Next" pitchFamily="34" charset="0"/>
-                <a:ea typeface="Trade Gothic Next" pitchFamily="34" charset="-122"/>
-                <a:cs typeface="Trade Gothic Next" pitchFamily="34" charset="-120"/>
-              </a:rPr>
-              <a:t>QUESTION 5</a:t>
+                  <a:srgbClr val="2E3338"/>
+                </a:solidFill>
+                <a:latin typeface="Trade Gothic Next" pitchFamily="34" charset="0"/>
+                <a:ea typeface="Trade Gothic Next" pitchFamily="34" charset="-122"/>
+                <a:cs typeface="Trade Gothic Next" pitchFamily="34" charset="-120"/>
+              </a:rPr>
+              <a:t>QUESTION 2</a:t>
             </a:r>
             <a:endParaRPr lang="en-US" sz="1200" dirty="0"/>
           </a:p>
@@ -18768,16 +19395,16 @@
       </p:sp>
       <p:sp>
         <p:nvSpPr>
-          <p:cNvPr id="7" name="Text 5"/>
-          <p:cNvSpPr txBox="1"/>
-          <p:nvPr>
-            <p:ph idx="112" type="body" hasCustomPrompt="1"/>
-          </p:nvPr>
-        </p:nvSpPr>
-        <p:spPr>
-          <a:xfrm>
-            <a:off x="9116568" y="2834640"/>
-            <a:ext cx="2752344" cy="1965960"/>
+          <p:cNvPr id="7" name="Text 6"/>
+          <p:cNvSpPr txBox="1"/>
+          <p:nvPr>
+            <p:ph idx="113" type="body" hasCustomPrompt="1"/>
+          </p:nvPr>
+        </p:nvSpPr>
+        <p:spPr>
+          <a:xfrm>
+            <a:off x="4498848" y="3246120"/>
+            <a:ext cx="2999232" cy="1673352"/>
           </a:xfrm>
           <a:prstGeom prst="rect">
             <a:avLst/>
@@ -18795,13 +19422,136 @@
             <a:r>
               <a:rPr lang="en-US" sz="1600" dirty="0">
                 <a:solidFill>
+                  <a:srgbClr val="14161B"/>
+                </a:solidFill>
+                <a:latin typeface="Trade Gothic Next" pitchFamily="34" charset="0"/>
+                <a:ea typeface="Trade Gothic Next" pitchFamily="34" charset="-122"/>
+                <a:cs typeface="Trade Gothic Next" pitchFamily="34" charset="-120"/>
+              </a:rPr>
+              <a:t>List all the sublevels in n = 2.</a:t>
+            </a:r>
+            <a:endParaRPr lang="en-US" sz="1600" dirty="0"/>
+          </a:p>
+        </p:txBody>
+      </p:sp>
+      <p:sp>
+        <p:nvSpPr>
+          <p:cNvPr id="8" name="Text 7"/>
+          <p:cNvSpPr txBox="1"/>
+          <p:nvPr>
+            <p:ph idx="115" type="body" hasCustomPrompt="1"/>
+          </p:nvPr>
+        </p:nvSpPr>
+        <p:spPr>
+          <a:xfrm>
+            <a:off x="8110728" y="2953512"/>
+            <a:ext cx="2999232" cy="219456"/>
+          </a:xfrm>
+          <a:prstGeom prst="rect">
+            <a:avLst/>
+          </a:prstGeom>
+          <a:noFill/>
+          <a:ln/>
+        </p:spPr>
+        <p:txBody>
+          <a:bodyPr wrap="square" lIns="0" tIns="0" rIns="0" bIns="0" rtlCol="0"/>
+          <a:lstStyle/>
+          <a:p>
+            <a:pPr indent="0" marL="0">
+              <a:buNone/>
+            </a:pPr>
+            <a:r>
+              <a:rPr lang="en-US" sz="1200" b="1" spc="120" kern="0" dirty="0">
+                <a:solidFill>
+                  <a:srgbClr val="2E3338"/>
+                </a:solidFill>
+                <a:latin typeface="Trade Gothic Next" pitchFamily="34" charset="0"/>
+                <a:ea typeface="Trade Gothic Next" pitchFamily="34" charset="-122"/>
+                <a:cs typeface="Trade Gothic Next" pitchFamily="34" charset="-120"/>
+              </a:rPr>
+              <a:t>QUESTION 3</a:t>
+            </a:r>
+            <a:endParaRPr lang="en-US" sz="1200" dirty="0"/>
+          </a:p>
+        </p:txBody>
+      </p:sp>
+      <p:sp>
+        <p:nvSpPr>
+          <p:cNvPr id="9" name="Text 7"/>
+          <p:cNvSpPr txBox="1"/>
+          <p:nvPr>
+            <p:ph idx="116" type="body" hasCustomPrompt="1"/>
+          </p:nvPr>
+        </p:nvSpPr>
+        <p:spPr>
+          <a:xfrm>
+            <a:off x="8110728" y="3246120"/>
+            <a:ext cx="2999232" cy="1673352"/>
+          </a:xfrm>
+          <a:prstGeom prst="rect">
+            <a:avLst/>
+          </a:prstGeom>
+          <a:noFill/>
+          <a:ln/>
+        </p:spPr>
+        <p:txBody>
+          <a:bodyPr wrap="square" lIns="0" tIns="0" rIns="0" bIns="0" rtlCol="0"/>
+          <a:lstStyle/>
+          <a:p>
+            <a:pPr indent="0" marL="0">
+              <a:buNone/>
+            </a:pPr>
+            <a:r>
+              <a:rPr lang="en-US" sz="1600" dirty="0">
+                <a:solidFill>
+                  <a:srgbClr val="14161B"/>
+                </a:solidFill>
+                <a:latin typeface="Trade Gothic Next" pitchFamily="34" charset="0"/>
+                <a:ea typeface="Trade Gothic Next" pitchFamily="34" charset="-122"/>
+                <a:cs typeface="Trade Gothic Next" pitchFamily="34" charset="-120"/>
+              </a:rPr>
+              <a:t>How many orbitals are in a d sublevel? How many electrons can it hold?</a:t>
+            </a:r>
+            <a:endParaRPr lang="en-US" sz="1600" dirty="0"/>
+          </a:p>
+        </p:txBody>
+      </p:sp>
+      <p:sp>
+        <p:nvSpPr>
+          <p:cNvPr id="10" name="Text 9"/>
+          <p:cNvSpPr txBox="1"/>
+          <p:nvPr>
+            <p:ph idx="119" type="body" hasCustomPrompt="1"/>
+          </p:nvPr>
+        </p:nvSpPr>
+        <p:spPr>
+          <a:xfrm>
+            <a:off x="2240280" y="5486400"/>
+            <a:ext cx="8991295" cy="402336"/>
+          </a:xfrm>
+          <a:prstGeom prst="rect">
+            <a:avLst/>
+          </a:prstGeom>
+          <a:noFill/>
+          <a:ln/>
+        </p:spPr>
+        <p:txBody>
+          <a:bodyPr wrap="square" lIns="0" tIns="0" rIns="0" bIns="0" rtlCol="0" anchor="ctr"/>
+          <a:lstStyle/>
+          <a:p>
+            <a:pPr indent="0" marL="0">
+              <a:buNone/>
+            </a:pPr>
+            <a:r>
+              <a:rPr lang="en-US" sz="1600" b="1" dirty="0">
+                <a:solidFill>
                   <a:srgbClr val="EDF0E5"/>
                 </a:solidFill>
                 <a:latin typeface="Trade Gothic Next" pitchFamily="34" charset="0"/>
                 <a:ea typeface="Trade Gothic Next" pitchFamily="34" charset="-122"/>
                 <a:cs typeface="Trade Gothic Next" pitchFamily="34" charset="-120"/>
               </a:rPr>
-              <a:t>How many orbitals are in the n = 4 level?</a:t>
+              <a:t>Level n has n sublevels. Orbitals per sublevel: s 1, p 3, d 5, f 7.</a:t>
             </a:r>
             <a:endParaRPr lang="en-US" sz="1600" dirty="0"/>
           </a:p>
@@ -18809,48 +19559,7 @@
       </p:sp>
       <p:sp>
         <p:nvSpPr>
-          <p:cNvPr id="8" name="Text 7"/>
-          <p:cNvSpPr txBox="1"/>
-          <p:nvPr>
-            <p:ph idx="115" type="body" hasCustomPrompt="1"/>
-          </p:nvPr>
-        </p:nvSpPr>
-        <p:spPr>
-          <a:xfrm>
-            <a:off x="2240280" y="5394960"/>
-            <a:ext cx="8991295" cy="402336"/>
-          </a:xfrm>
-          <a:prstGeom prst="rect">
-            <a:avLst/>
-          </a:prstGeom>
-          <a:noFill/>
-          <a:ln/>
-        </p:spPr>
-        <p:txBody>
-          <a:bodyPr wrap="square" lIns="0" tIns="0" rIns="0" bIns="0" rtlCol="0" anchor="ctr"/>
-          <a:lstStyle/>
-          <a:p>
-            <a:pPr indent="0" marL="0">
-              <a:buNone/>
-            </a:pPr>
-            <a:r>
-              <a:rPr lang="en-US" sz="1600" b="1" dirty="0">
-                <a:solidFill>
-                  <a:srgbClr val="EDF0E5"/>
-                </a:solidFill>
-                <a:latin typeface="Trade Gothic Next" pitchFamily="34" charset="0"/>
-                <a:ea typeface="Trade Gothic Next" pitchFamily="34" charset="-122"/>
-                <a:cs typeface="Trade Gothic Next" pitchFamily="34" charset="-120"/>
-              </a:rPr>
-              <a:t>Show the count: sublevels first, then orbitals, then electrons.</a:t>
-            </a:r>
-            <a:endParaRPr lang="en-US" sz="1600" dirty="0"/>
-          </a:p>
-        </p:txBody>
-      </p:sp>
-      <p:sp>
-        <p:nvSpPr>
-          <p:cNvPr id="9" name="Text 1"/>
+          <p:cNvPr id="11" name="Text 1"/>
           <p:cNvSpPr txBox="1"/>
           <p:nvPr>
             <p:ph idx="101" type="body" hasCustomPrompt="1"/>
@@ -18891,10 +19600,10 @@
       </p:sp>
       <p:sp>
         <p:nvSpPr>
-          <p:cNvPr id="10" name="Text 8"/>
-          <p:cNvSpPr txBox="1"/>
-          <p:nvPr>
-            <p:ph idx="117" type="body" hasCustomPrompt="1"/>
+          <p:cNvPr id="12" name="Text 10"/>
+          <p:cNvSpPr txBox="1"/>
+          <p:nvPr>
+            <p:ph idx="121" type="body" hasCustomPrompt="1"/>
           </p:nvPr>
         </p:nvSpPr>
         <p:spPr>
@@ -18932,16 +19641,16 @@
       </p:sp>
       <p:sp>
         <p:nvSpPr>
-          <p:cNvPr id="11" name="Text 3"/>
-          <p:cNvSpPr txBox="1"/>
-          <p:nvPr>
-            <p:ph idx="106" hasCustomPrompt="1"/>
-          </p:nvPr>
-        </p:nvSpPr>
-        <p:spPr>
-          <a:xfrm>
-            <a:off x="685800" y="2377440"/>
-            <a:ext cx="4663440" cy="2624328"/>
+          <p:cNvPr id="14" name="Text 4"/>
+          <p:cNvSpPr txBox="1"/>
+          <p:nvPr>
+            <p:ph idx="107" hasCustomPrompt="1"/>
+          </p:nvPr>
+        </p:nvSpPr>
+        <p:spPr>
+          <a:xfrm>
+            <a:off x="8641080" y="1088136"/>
+            <a:ext cx="2633472" cy="1481328"/>
           </a:xfrm>
           <a:prstGeom prst="rect">
             <a:avLst/>
@@ -18987,6 +19696,458 @@
       </p:grpSpPr>
       <p:sp>
         <p:nvSpPr>
+          <p:cNvPr id="2" name="Text 2"/>
+          <p:cNvSpPr txBox="1"/>
+          <p:nvPr>
+            <p:ph idx="103" type="title" hasCustomPrompt="1"/>
+          </p:nvPr>
+        </p:nvSpPr>
+        <p:spPr>
+          <a:xfrm>
+            <a:off x="685800" y="932688"/>
+            <a:ext cx="10820095" cy="868680"/>
+          </a:xfrm>
+          <a:prstGeom prst="rect">
+            <a:avLst/>
+          </a:prstGeom>
+          <a:noFill/>
+          <a:ln/>
+        </p:spPr>
+        <p:txBody>
+          <a:bodyPr wrap="square" lIns="0" tIns="0" rIns="0" bIns="0" rtlCol="0" anchor="t"/>
+          <a:lstStyle/>
+          <a:p>
+            <a:pPr algn="l" indent="0" marL="0">
+              <a:buNone/>
+            </a:pPr>
+            <a:r>
+              <a:rPr lang="en-US" sz="2800" b="1" dirty="0">
+                <a:solidFill>
+                  <a:srgbClr val="14161B"/>
+                </a:solidFill>
+                <a:latin typeface="Trade Gothic Next" pitchFamily="34" charset="0"/>
+                <a:ea typeface="Trade Gothic Next" pitchFamily="34" charset="-122"/>
+                <a:cs typeface="Trade Gothic Next" pitchFamily="34" charset="-120"/>
+              </a:rPr>
+              <a:t>Check: Capacity</a:t>
+            </a:r>
+            <a:endParaRPr lang="en-US" sz="2800" dirty="0"/>
+          </a:p>
+        </p:txBody>
+      </p:sp>
+      <p:sp>
+        <p:nvSpPr>
+          <p:cNvPr id="3" name="Text 2"/>
+          <p:cNvSpPr txBox="1"/>
+          <p:nvPr>
+            <p:ph idx="104" type="body" hasCustomPrompt="1"/>
+          </p:nvPr>
+        </p:nvSpPr>
+        <p:spPr>
+          <a:xfrm>
+            <a:off x="685800" y="1847088"/>
+            <a:ext cx="10820095" cy="384048"/>
+          </a:xfrm>
+          <a:prstGeom prst="rect">
+            <a:avLst/>
+          </a:prstGeom>
+          <a:noFill/>
+          <a:ln/>
+        </p:spPr>
+        <p:txBody>
+          <a:bodyPr wrap="square" lIns="0" tIns="0" rIns="0" bIns="0" rtlCol="0"/>
+          <a:lstStyle/>
+          <a:p>
+            <a:pPr indent="0" marL="0">
+              <a:buNone/>
+            </a:pPr>
+            <a:r>
+              <a:rPr lang="en-US" sz="1700" dirty="0">
+                <a:solidFill>
+                  <a:srgbClr val="2E3338"/>
+                </a:solidFill>
+                <a:latin typeface="Trade Gothic Next" pitchFamily="34" charset="0"/>
+                <a:ea typeface="Trade Gothic Next" pitchFamily="34" charset="-122"/>
+                <a:cs typeface="Trade Gothic Next" pitchFamily="34" charset="-120"/>
+              </a:rPr>
+              <a:t>Questions 4 and 5. Show the count.</a:t>
+            </a:r>
+            <a:endParaRPr lang="en-US" sz="1700" dirty="0"/>
+          </a:p>
+        </p:txBody>
+      </p:sp>
+      <p:sp>
+        <p:nvSpPr>
+          <p:cNvPr id="4" name="Text 4"/>
+          <p:cNvSpPr txBox="1"/>
+          <p:nvPr>
+            <p:ph idx="108" type="body" hasCustomPrompt="1"/>
+          </p:nvPr>
+        </p:nvSpPr>
+        <p:spPr>
+          <a:xfrm>
+            <a:off x="5733288" y="2542032"/>
+            <a:ext cx="2752344" cy="219456"/>
+          </a:xfrm>
+          <a:prstGeom prst="rect">
+            <a:avLst/>
+          </a:prstGeom>
+          <a:noFill/>
+          <a:ln/>
+        </p:spPr>
+        <p:txBody>
+          <a:bodyPr wrap="square" lIns="0" tIns="0" rIns="0" bIns="0" rtlCol="0"/>
+          <a:lstStyle/>
+          <a:p>
+            <a:pPr indent="0" marL="0">
+              <a:buNone/>
+            </a:pPr>
+            <a:r>
+              <a:rPr lang="en-US" sz="1200" b="1" spc="120" kern="0" dirty="0">
+                <a:solidFill>
+                  <a:srgbClr val="2E3338"/>
+                </a:solidFill>
+                <a:latin typeface="Trade Gothic Next" pitchFamily="34" charset="0"/>
+                <a:ea typeface="Trade Gothic Next" pitchFamily="34" charset="-122"/>
+                <a:cs typeface="Trade Gothic Next" pitchFamily="34" charset="-120"/>
+              </a:rPr>
+              <a:t>QUESTION 4</a:t>
+            </a:r>
+            <a:endParaRPr lang="en-US" sz="1200" dirty="0"/>
+          </a:p>
+        </p:txBody>
+      </p:sp>
+      <p:sp>
+        <p:nvSpPr>
+          <p:cNvPr id="5" name="Text 4"/>
+          <p:cNvSpPr txBox="1"/>
+          <p:nvPr>
+            <p:ph idx="109" type="body" hasCustomPrompt="1"/>
+          </p:nvPr>
+        </p:nvSpPr>
+        <p:spPr>
+          <a:xfrm>
+            <a:off x="5733288" y="2834640"/>
+            <a:ext cx="2752344" cy="1965960"/>
+          </a:xfrm>
+          <a:prstGeom prst="rect">
+            <a:avLst/>
+          </a:prstGeom>
+          <a:noFill/>
+          <a:ln/>
+        </p:spPr>
+        <p:txBody>
+          <a:bodyPr wrap="square" lIns="0" tIns="0" rIns="0" bIns="0" rtlCol="0"/>
+          <a:lstStyle/>
+          <a:p>
+            <a:pPr indent="0" marL="0">
+              <a:buNone/>
+            </a:pPr>
+            <a:r>
+              <a:rPr lang="en-US" sz="1600" dirty="0">
+                <a:solidFill>
+                  <a:srgbClr val="14161B"/>
+                </a:solidFill>
+                <a:latin typeface="Trade Gothic Next" pitchFamily="34" charset="0"/>
+                <a:ea typeface="Trade Gothic Next" pitchFamily="34" charset="-122"/>
+                <a:cs typeface="Trade Gothic Next" pitchFamily="34" charset="-120"/>
+              </a:rPr>
+              <a:t>What is the maximum number of electrons in the third energy level?</a:t>
+            </a:r>
+            <a:endParaRPr lang="en-US" sz="1600" dirty="0"/>
+          </a:p>
+        </p:txBody>
+      </p:sp>
+      <p:sp>
+        <p:nvSpPr>
+          <p:cNvPr id="6" name="Text 5"/>
+          <p:cNvSpPr txBox="1"/>
+          <p:nvPr>
+            <p:ph idx="111" type="body" hasCustomPrompt="1"/>
+          </p:nvPr>
+        </p:nvSpPr>
+        <p:spPr>
+          <a:xfrm>
+            <a:off x="9116568" y="2542032"/>
+            <a:ext cx="2752344" cy="219456"/>
+          </a:xfrm>
+          <a:prstGeom prst="rect">
+            <a:avLst/>
+          </a:prstGeom>
+          <a:noFill/>
+          <a:ln/>
+        </p:spPr>
+        <p:txBody>
+          <a:bodyPr wrap="square" lIns="0" tIns="0" rIns="0" bIns="0" rtlCol="0"/>
+          <a:lstStyle/>
+          <a:p>
+            <a:pPr indent="0" marL="0">
+              <a:buNone/>
+            </a:pPr>
+            <a:r>
+              <a:rPr lang="en-US" sz="1200" b="1" spc="120" kern="0" dirty="0">
+                <a:solidFill>
+                  <a:srgbClr val="BDB6AA"/>
+                </a:solidFill>
+                <a:latin typeface="Trade Gothic Next" pitchFamily="34" charset="0"/>
+                <a:ea typeface="Trade Gothic Next" pitchFamily="34" charset="-122"/>
+                <a:cs typeface="Trade Gothic Next" pitchFamily="34" charset="-120"/>
+              </a:rPr>
+              <a:t>QUESTION 5</a:t>
+            </a:r>
+            <a:endParaRPr lang="en-US" sz="1200" dirty="0"/>
+          </a:p>
+        </p:txBody>
+      </p:sp>
+      <p:sp>
+        <p:nvSpPr>
+          <p:cNvPr id="7" name="Text 5"/>
+          <p:cNvSpPr txBox="1"/>
+          <p:nvPr>
+            <p:ph idx="112" type="body" hasCustomPrompt="1"/>
+          </p:nvPr>
+        </p:nvSpPr>
+        <p:spPr>
+          <a:xfrm>
+            <a:off x="9116568" y="2834640"/>
+            <a:ext cx="2752344" cy="1965960"/>
+          </a:xfrm>
+          <a:prstGeom prst="rect">
+            <a:avLst/>
+          </a:prstGeom>
+          <a:noFill/>
+          <a:ln/>
+        </p:spPr>
+        <p:txBody>
+          <a:bodyPr wrap="square" lIns="0" tIns="0" rIns="0" bIns="0" rtlCol="0"/>
+          <a:lstStyle/>
+          <a:p>
+            <a:pPr indent="0" marL="0">
+              <a:buNone/>
+            </a:pPr>
+            <a:r>
+              <a:rPr lang="en-US" sz="1600" dirty="0">
+                <a:solidFill>
+                  <a:srgbClr val="EDF0E5"/>
+                </a:solidFill>
+                <a:latin typeface="Trade Gothic Next" pitchFamily="34" charset="0"/>
+                <a:ea typeface="Trade Gothic Next" pitchFamily="34" charset="-122"/>
+                <a:cs typeface="Trade Gothic Next" pitchFamily="34" charset="-120"/>
+              </a:rPr>
+              <a:t>How many orbitals are in the n = 4 level?</a:t>
+            </a:r>
+            <a:endParaRPr lang="en-US" sz="1600" dirty="0"/>
+          </a:p>
+        </p:txBody>
+      </p:sp>
+      <p:sp>
+        <p:nvSpPr>
+          <p:cNvPr id="8" name="Text 7"/>
+          <p:cNvSpPr txBox="1"/>
+          <p:nvPr>
+            <p:ph idx="115" type="body" hasCustomPrompt="1"/>
+          </p:nvPr>
+        </p:nvSpPr>
+        <p:spPr>
+          <a:xfrm>
+            <a:off x="2240280" y="5394960"/>
+            <a:ext cx="8991295" cy="402336"/>
+          </a:xfrm>
+          <a:prstGeom prst="rect">
+            <a:avLst/>
+          </a:prstGeom>
+          <a:noFill/>
+          <a:ln/>
+        </p:spPr>
+        <p:txBody>
+          <a:bodyPr wrap="square" lIns="0" tIns="0" rIns="0" bIns="0" rtlCol="0" anchor="ctr"/>
+          <a:lstStyle/>
+          <a:p>
+            <a:pPr indent="0" marL="0">
+              <a:buNone/>
+            </a:pPr>
+            <a:r>
+              <a:rPr lang="en-US" sz="1600" b="1" dirty="0">
+                <a:solidFill>
+                  <a:srgbClr val="EDF0E5"/>
+                </a:solidFill>
+                <a:latin typeface="Trade Gothic Next" pitchFamily="34" charset="0"/>
+                <a:ea typeface="Trade Gothic Next" pitchFamily="34" charset="-122"/>
+                <a:cs typeface="Trade Gothic Next" pitchFamily="34" charset="-120"/>
+              </a:rPr>
+              <a:t>Orbitals in level n = n</a:t>
+            </a:r>
+            <a:pPr indent="0" marL="0">
+              <a:buNone/>
+            </a:pPr>
+            <a:r>
+              <a:rPr lang="en-US" sz="1600" b="1" baseline="30000" dirty="0">
+                <a:solidFill>
+                  <a:srgbClr val="EDF0E5"/>
+                </a:solidFill>
+                <a:latin typeface="Trade Gothic Next" pitchFamily="34" charset="0"/>
+                <a:ea typeface="Trade Gothic Next" pitchFamily="34" charset="-122"/>
+                <a:cs typeface="Trade Gothic Next" pitchFamily="34" charset="-120"/>
+              </a:rPr>
+              <a:t>2</a:t>
+            </a:r>
+            <a:pPr indent="0" marL="0">
+              <a:buNone/>
+            </a:pPr>
+            <a:r>
+              <a:rPr lang="en-US" sz="1600" b="1" dirty="0">
+                <a:solidFill>
+                  <a:srgbClr val="EDF0E5"/>
+                </a:solidFill>
+                <a:latin typeface="Trade Gothic Next" pitchFamily="34" charset="0"/>
+                <a:ea typeface="Trade Gothic Next" pitchFamily="34" charset="-122"/>
+                <a:cs typeface="Trade Gothic Next" pitchFamily="34" charset="-120"/>
+              </a:rPr>
+              <a:t>. Electrons in a sublevel = orbitals × 2.</a:t>
+            </a:r>
+            <a:endParaRPr lang="en-US" sz="1600" dirty="0"/>
+          </a:p>
+        </p:txBody>
+      </p:sp>
+      <p:sp>
+        <p:nvSpPr>
+          <p:cNvPr id="9" name="Text 1"/>
+          <p:cNvSpPr txBox="1"/>
+          <p:nvPr>
+            <p:ph idx="101" type="body" hasCustomPrompt="1"/>
+          </p:nvPr>
+        </p:nvSpPr>
+        <p:spPr>
+          <a:xfrm>
+            <a:off x="685800" y="384048"/>
+            <a:ext cx="6400800" cy="237744"/>
+          </a:xfrm>
+          <a:prstGeom prst="rect">
+            <a:avLst/>
+          </a:prstGeom>
+          <a:noFill/>
+          <a:ln/>
+        </p:spPr>
+        <p:txBody>
+          <a:bodyPr wrap="square" lIns="0" tIns="0" rIns="0" bIns="0" rtlCol="0" anchor="ctr"/>
+          <a:lstStyle/>
+          <a:p>
+            <a:pPr indent="0" marL="0">
+              <a:buNone/>
+            </a:pPr>
+            <a:r>
+              <a:rPr lang="en-US" sz="1100" b="1" spc="160" kern="0" dirty="0">
+                <a:solidFill>
+                  <a:srgbClr val="14161B"/>
+                </a:solidFill>
+                <a:latin typeface="Trade Gothic Next" pitchFamily="34" charset="0"/>
+                <a:ea typeface="Trade Gothic Next" pitchFamily="34" charset="-122"/>
+                <a:cs typeface="Trade Gothic Next" pitchFamily="34" charset="-120"/>
+              </a:rPr>
+              <a:t>UNIT 02  •  CHEMISTRY</a:t>
+            </a:r>
+            <a:endParaRPr lang="en-US" sz="1100" dirty="0"/>
+          </a:p>
+        </p:txBody>
+      </p:sp>
+      <p:sp>
+        <p:nvSpPr>
+          <p:cNvPr id="10" name="Text 8"/>
+          <p:cNvSpPr txBox="1"/>
+          <p:nvPr>
+            <p:ph idx="117" type="body" hasCustomPrompt="1"/>
+          </p:nvPr>
+        </p:nvSpPr>
+        <p:spPr>
+          <a:xfrm>
+            <a:off x="8762695" y="6382512"/>
+            <a:ext cx="2743200" cy="237744"/>
+          </a:xfrm>
+          <a:prstGeom prst="rect">
+            <a:avLst/>
+          </a:prstGeom>
+          <a:noFill/>
+          <a:ln/>
+        </p:spPr>
+        <p:txBody>
+          <a:bodyPr wrap="square" lIns="0" tIns="0" rIns="0" bIns="0" rtlCol="0" anchor="ctr"/>
+          <a:lstStyle/>
+          <a:p>
+            <a:pPr algn="r" indent="0" marL="0">
+              <a:buNone/>
+            </a:pPr>
+            <a:r>
+              <a:rPr lang="en-US" sz="1000" b="1" spc="140" kern="0" dirty="0">
+                <a:solidFill>
+                  <a:srgbClr val="2E3338"/>
+                </a:solidFill>
+                <a:latin typeface="Trade Gothic Next" pitchFamily="34" charset="0"/>
+                <a:ea typeface="Trade Gothic Next" pitchFamily="34" charset="-122"/>
+                <a:cs typeface="Trade Gothic Next" pitchFamily="34" charset="-120"/>
+              </a:rPr>
+              <a:t>U02 • S02.2</a:t>
+            </a:r>
+            <a:endParaRPr lang="en-US" sz="1000" dirty="0"/>
+          </a:p>
+        </p:txBody>
+      </p:sp>
+      <p:sp>
+        <p:nvSpPr>
+          <p:cNvPr id="12" name="Text 3"/>
+          <p:cNvSpPr txBox="1"/>
+          <p:nvPr>
+            <p:ph idx="106" hasCustomPrompt="1"/>
+          </p:nvPr>
+        </p:nvSpPr>
+        <p:spPr>
+          <a:xfrm>
+            <a:off x="685800" y="2377440"/>
+            <a:ext cx="4663440" cy="2624328"/>
+          </a:xfrm>
+          <a:prstGeom prst="rect">
+            <a:avLst/>
+          </a:prstGeom>
+          <a:noFill/>
+          <a:ln/>
+        </p:spPr>
+        <p:txBody>
+          <a:bodyPr wrap="square" lIns="0" tIns="0" rIns="0" bIns="0" rtlCol="0" anchor="ctr"/>
+          <a:lstStyle/>
+          <a:p>
+            <a:pPr algn="ctr" indent="0" marL="0">
+              <a:buNone/>
+            </a:pPr>
+            <a:endParaRPr lang="en-US" sz="1200" dirty="0"/>
+          </a:p>
+        </p:txBody>
+      </p:sp>
+    </p:spTree>
+  </p:cSld>
+  <p:clrMapOvr>
+    <a:masterClrMapping/>
+  </p:clrMapOvr>
+</p:sld>
+</file>
+
+<file path=ppt/slides/slide22.xml><?xml version="1.0" encoding="utf-8"?>
+<p:sld xmlns:a="http://schemas.openxmlformats.org/drawingml/2006/main" xmlns:r="http://schemas.openxmlformats.org/officeDocument/2006/relationships" xmlns:p="http://schemas.openxmlformats.org/presentationml/2006/main">
+  <p:cSld name="Slide 22">
+    <p:spTree>
+      <p:nvGrpSpPr>
+        <p:cNvPr id="1" name=""/>
+        <p:cNvGrpSpPr/>
+        <p:nvPr/>
+      </p:nvGrpSpPr>
+      <p:grpSpPr>
+        <a:xfrm>
+          <a:off x="0" y="0"/>
+          <a:ext cx="0" cy="0"/>
+          <a:chOff x="0" y="0"/>
+          <a:chExt cx="0" cy="0"/>
+        </a:xfrm>
+      </p:grpSpPr>
+      <p:sp>
+        <p:nvSpPr>
           <p:cNvPr id="2" name="Text 5"/>
           <p:cNvSpPr txBox="1"/>
           <p:nvPr>
@@ -19020,7 +20181,7 @@
                 <a:ea typeface="Trade Gothic Next" pitchFamily="34" charset="-122"/>
                 <a:cs typeface="Trade Gothic Next" pitchFamily="34" charset="-120"/>
               </a:rPr>
-              <a:t>LOOKING AHEAD</a:t>
+              <a:t>NEXT</a:t>
             </a:r>
             <a:endParaRPr lang="en-US" sz="1100" dirty="0"/>
           </a:p>
@@ -19064,7 +20225,7 @@
                 <a:ea typeface="Trade Gothic Next" pitchFamily="34" charset="-122"/>
                 <a:cs typeface="Trade Gothic Next" pitchFamily="34" charset="-120"/>
               </a:rPr>
-              <a:t>Where This Goes</a:t>
+              <a:t>S2.3</a:t>
             </a:r>
             <a:endParaRPr lang="en-US" sz="2600" dirty="0"/>
           </a:p>
@@ -19084,7 +20245,7 @@
                 <a:ea typeface="Trade Gothic Next" pitchFamily="34" charset="-122"/>
                 <a:cs typeface="Trade Gothic Next" pitchFamily="34" charset="-120"/>
               </a:rPr>
-              <a:t>Next</a:t>
+              <a:t>Electron Configurations</a:t>
             </a:r>
             <a:endParaRPr lang="en-US" sz="2600" dirty="0"/>
           </a:p>
@@ -19125,7 +20286,7 @@
                 <a:ea typeface="Trade Gothic Next" pitchFamily="34" charset="-122"/>
                 <a:cs typeface="Trade Gothic Next" pitchFamily="34" charset="-120"/>
               </a:rPr>
-              <a:t>You can now name every orbital. Next: filling them in order to write an electron configuration.</a:t>
+              <a:t>Fill the orbitals in order.</a:t>
             </a:r>
             <a:endParaRPr lang="en-US" sz="1600" dirty="0"/>
           </a:p>
@@ -19174,7 +20335,7 @@
       </p:sp>
       <p:sp>
         <p:nvSpPr>
-          <p:cNvPr id="6" name="Text 2"/>
+          <p:cNvPr id="7" name="Text 2"/>
           <p:cNvSpPr txBox="1"/>
           <p:nvPr>
             <p:ph idx="102" hasCustomPrompt="1"/>
@@ -19229,25 +20390,25 @@
       </p:grpSpPr>
       <p:sp>
         <p:nvSpPr>
-          <p:cNvPr id="2" name="Text 2"/>
-          <p:cNvSpPr txBox="1"/>
-          <p:nvPr>
-            <p:ph idx="103" type="title" hasCustomPrompt="1"/>
-          </p:nvPr>
-        </p:nvSpPr>
-        <p:spPr>
-          <a:xfrm>
-            <a:off x="685800" y="932688"/>
-            <a:ext cx="7360920" cy="868680"/>
-          </a:xfrm>
-          <a:prstGeom prst="rect">
-            <a:avLst/>
-          </a:prstGeom>
-          <a:noFill/>
-          <a:ln/>
-        </p:spPr>
-        <p:txBody>
-          <a:bodyPr wrap="square" lIns="0" tIns="0" rIns="0" bIns="0" rtlCol="0" anchor="t"/>
+          <p:cNvPr id="2" name="Text 5"/>
+          <p:cNvSpPr txBox="1"/>
+          <p:nvPr>
+            <p:ph idx="107" type="title" hasCustomPrompt="1"/>
+          </p:nvPr>
+        </p:nvSpPr>
+        <p:spPr>
+          <a:xfrm>
+            <a:off x="685800" y="1188720"/>
+            <a:ext cx="4892040" cy="868680"/>
+          </a:xfrm>
+          <a:prstGeom prst="rect">
+            <a:avLst/>
+          </a:prstGeom>
+          <a:noFill/>
+          <a:ln/>
+        </p:spPr>
+        <p:txBody>
+          <a:bodyPr wrap="square" lIns="0" tIns="0" rIns="0" bIns="0" rtlCol="0"/>
           <a:lstStyle/>
           <a:p>
             <a:pPr algn="l" indent="0" marL="0">
@@ -19256,13 +20417,13 @@
             <a:r>
               <a:rPr lang="en-US" sz="2800" b="1" dirty="0">
                 <a:solidFill>
-                  <a:srgbClr val="14161B"/>
-                </a:solidFill>
-                <a:latin typeface="Trade Gothic Next" pitchFamily="34" charset="0"/>
-                <a:ea typeface="Trade Gothic Next" pitchFamily="34" charset="-122"/>
-                <a:cs typeface="Trade Gothic Next" pitchFamily="34" charset="-120"/>
-              </a:rPr>
-              <a:t>Three Words You Need First</a:t>
+                  <a:srgbClr val="EDF0E5"/>
+                </a:solidFill>
+                <a:latin typeface="Trade Gothic Next" pitchFamily="34" charset="0"/>
+                <a:ea typeface="Trade Gothic Next" pitchFamily="34" charset="-122"/>
+                <a:cs typeface="Trade Gothic Next" pitchFamily="34" charset="-120"/>
+              </a:rPr>
+              <a:t>Bohr Failed for Helium</a:t>
             </a:r>
             <a:endParaRPr lang="en-US" sz="2800" dirty="0"/>
           </a:p>
@@ -19270,16 +20431,16 @@
       </p:sp>
       <p:sp>
         <p:nvSpPr>
-          <p:cNvPr id="3" name="Text 2"/>
-          <p:cNvSpPr txBox="1"/>
-          <p:nvPr>
-            <p:ph idx="104" type="body" hasCustomPrompt="1"/>
-          </p:nvPr>
-        </p:nvSpPr>
-        <p:spPr>
-          <a:xfrm>
-            <a:off x="685800" y="1847088"/>
-            <a:ext cx="7360920" cy="384048"/>
+          <p:cNvPr id="3" name="Text 5"/>
+          <p:cNvSpPr txBox="1"/>
+          <p:nvPr>
+            <p:ph idx="108" type="body" hasCustomPrompt="1"/>
+          </p:nvPr>
+        </p:nvSpPr>
+        <p:spPr>
+          <a:xfrm>
+            <a:off x="685800" y="2148840"/>
+            <a:ext cx="4892040" cy="1005840"/>
           </a:xfrm>
           <a:prstGeom prst="rect">
             <a:avLst/>
@@ -19295,32 +20456,32 @@
               <a:buNone/>
             </a:pPr>
             <a:r>
-              <a:rPr lang="en-US" sz="1700" dirty="0">
-                <a:solidFill>
-                  <a:srgbClr val="2E3338"/>
-                </a:solidFill>
-                <a:latin typeface="Trade Gothic Next" pitchFamily="34" charset="0"/>
-                <a:ea typeface="Trade Gothic Next" pitchFamily="34" charset="-122"/>
-                <a:cs typeface="Trade Gothic Next" pitchFamily="34" charset="-120"/>
-              </a:rPr>
-              <a:t>Write these before we go further. Each one sits inside the one before.</a:t>
-            </a:r>
-            <a:endParaRPr lang="en-US" sz="1700" dirty="0"/>
-          </a:p>
-        </p:txBody>
-      </p:sp>
-      <p:sp>
-        <p:nvSpPr>
-          <p:cNvPr id="4" name="Text 5"/>
-          <p:cNvSpPr txBox="1"/>
-          <p:nvPr>
-            <p:ph idx="109" type="body" hasCustomPrompt="1"/>
-          </p:nvPr>
-        </p:nvSpPr>
-        <p:spPr>
-          <a:xfrm>
-            <a:off x="886968" y="2953512"/>
-            <a:ext cx="2999232" cy="219456"/>
+              <a:rPr lang="en-US" sz="1600" dirty="0">
+                <a:solidFill>
+                  <a:srgbClr val="BDB6AA"/>
+                </a:solidFill>
+                <a:latin typeface="Trade Gothic Next" pitchFamily="34" charset="0"/>
+                <a:ea typeface="Trade Gothic Next" pitchFamily="34" charset="-122"/>
+                <a:cs typeface="Trade Gothic Next" pitchFamily="34" charset="-120"/>
+              </a:rPr>
+              <a:t>The Bohr model worked for hydrogen. For helium and every atom after it, the energies came out wrong.</a:t>
+            </a:r>
+            <a:endParaRPr lang="en-US" sz="1600" dirty="0"/>
+          </a:p>
+        </p:txBody>
+      </p:sp>
+      <p:sp>
+        <p:nvSpPr>
+          <p:cNvPr id="4" name="Text 7"/>
+          <p:cNvSpPr txBox="1"/>
+          <p:nvPr>
+            <p:ph idx="111" type="body" hasCustomPrompt="1"/>
+          </p:nvPr>
+        </p:nvSpPr>
+        <p:spPr>
+          <a:xfrm>
+            <a:off x="886968" y="3950208"/>
+            <a:ext cx="4489704" cy="566928"/>
           </a:xfrm>
           <a:prstGeom prst="rect">
             <a:avLst/>
@@ -19336,56 +20497,15 @@
               <a:buNone/>
             </a:pPr>
             <a:r>
-              <a:rPr lang="en-US" sz="1200" b="1" spc="120" kern="0" dirty="0">
-                <a:solidFill>
-                  <a:srgbClr val="2E3338"/>
-                </a:solidFill>
-                <a:latin typeface="Trade Gothic Next" pitchFamily="34" charset="0"/>
-                <a:ea typeface="Trade Gothic Next" pitchFamily="34" charset="-122"/>
-                <a:cs typeface="Trade Gothic Next" pitchFamily="34" charset="-120"/>
-              </a:rPr>
-              <a:t>ENERGY LEVEL</a:t>
-            </a:r>
-            <a:endParaRPr lang="en-US" sz="1200" dirty="0"/>
-          </a:p>
-        </p:txBody>
-      </p:sp>
-      <p:sp>
-        <p:nvSpPr>
-          <p:cNvPr id="5" name="Text 5"/>
-          <p:cNvSpPr txBox="1"/>
-          <p:nvPr>
-            <p:ph idx="110" type="body" hasCustomPrompt="1"/>
-          </p:nvPr>
-        </p:nvSpPr>
-        <p:spPr>
-          <a:xfrm>
-            <a:off x="886968" y="3246120"/>
-            <a:ext cx="2999232" cy="1673352"/>
-          </a:xfrm>
-          <a:prstGeom prst="rect">
-            <a:avLst/>
-          </a:prstGeom>
-          <a:noFill/>
-          <a:ln/>
-        </p:spPr>
-        <p:txBody>
-          <a:bodyPr wrap="square" lIns="0" tIns="0" rIns="0" bIns="0" rtlCol="0"/>
-          <a:lstStyle/>
-          <a:p>
-            <a:pPr indent="0" marL="0">
-              <a:buNone/>
-            </a:pPr>
-            <a:r>
-              <a:rPr lang="en-US" sz="1600" dirty="0">
-                <a:solidFill>
-                  <a:srgbClr val="14161B"/>
-                </a:solidFill>
-                <a:latin typeface="Trade Gothic Next" pitchFamily="34" charset="0"/>
-                <a:ea typeface="Trade Gothic Next" pitchFamily="34" charset="-122"/>
-                <a:cs typeface="Trade Gothic Next" pitchFamily="34" charset="-120"/>
-              </a:rPr>
-              <a:t>The main shell. Numbered n = 1, 2, 3, 4, and up.</a:t>
+              <a:rPr lang="en-US" sz="1600" b="1" dirty="0">
+                <a:solidFill>
+                  <a:srgbClr val="EDF0E5"/>
+                </a:solidFill>
+                <a:latin typeface="Trade Gothic Next" pitchFamily="34" charset="0"/>
+                <a:ea typeface="Trade Gothic Next" pitchFamily="34" charset="-122"/>
+                <a:cs typeface="Trade Gothic Next" pitchFamily="34" charset="-120"/>
+              </a:rPr>
+              <a:t>Bohr failed for helium. What replaced it?</a:t>
             </a:r>
             <a:endParaRPr lang="en-US" sz="1600" dirty="0"/>
           </a:p>
@@ -19393,215 +20513,10 @@
       </p:sp>
       <p:sp>
         <p:nvSpPr>
-          <p:cNvPr id="6" name="Text 6"/>
-          <p:cNvSpPr txBox="1"/>
-          <p:nvPr>
-            <p:ph idx="112" type="body" hasCustomPrompt="1"/>
-          </p:nvPr>
-        </p:nvSpPr>
-        <p:spPr>
-          <a:xfrm>
-            <a:off x="4498848" y="2953512"/>
-            <a:ext cx="2999232" cy="219456"/>
-          </a:xfrm>
-          <a:prstGeom prst="rect">
-            <a:avLst/>
-          </a:prstGeom>
-          <a:noFill/>
-          <a:ln/>
-        </p:spPr>
-        <p:txBody>
-          <a:bodyPr wrap="square" lIns="0" tIns="0" rIns="0" bIns="0" rtlCol="0"/>
-          <a:lstStyle/>
-          <a:p>
-            <a:pPr indent="0" marL="0">
-              <a:buNone/>
-            </a:pPr>
-            <a:r>
-              <a:rPr lang="en-US" sz="1200" b="1" spc="120" kern="0" dirty="0">
-                <a:solidFill>
-                  <a:srgbClr val="2E3338"/>
-                </a:solidFill>
-                <a:latin typeface="Trade Gothic Next" pitchFamily="34" charset="0"/>
-                <a:ea typeface="Trade Gothic Next" pitchFamily="34" charset="-122"/>
-                <a:cs typeface="Trade Gothic Next" pitchFamily="34" charset="-120"/>
-              </a:rPr>
-              <a:t>SUBLEVEL</a:t>
-            </a:r>
-            <a:endParaRPr lang="en-US" sz="1200" dirty="0"/>
-          </a:p>
-        </p:txBody>
-      </p:sp>
-      <p:sp>
-        <p:nvSpPr>
-          <p:cNvPr id="7" name="Text 6"/>
-          <p:cNvSpPr txBox="1"/>
-          <p:nvPr>
-            <p:ph idx="113" type="body" hasCustomPrompt="1"/>
-          </p:nvPr>
-        </p:nvSpPr>
-        <p:spPr>
-          <a:xfrm>
-            <a:off x="4498848" y="3246120"/>
-            <a:ext cx="2999232" cy="1673352"/>
-          </a:xfrm>
-          <a:prstGeom prst="rect">
-            <a:avLst/>
-          </a:prstGeom>
-          <a:noFill/>
-          <a:ln/>
-        </p:spPr>
-        <p:txBody>
-          <a:bodyPr wrap="square" lIns="0" tIns="0" rIns="0" bIns="0" rtlCol="0"/>
-          <a:lstStyle/>
-          <a:p>
-            <a:pPr indent="0" marL="0">
-              <a:buNone/>
-            </a:pPr>
-            <a:r>
-              <a:rPr lang="en-US" sz="1600" dirty="0">
-                <a:solidFill>
-                  <a:srgbClr val="14161B"/>
-                </a:solidFill>
-                <a:latin typeface="Trade Gothic Next" pitchFamily="34" charset="0"/>
-                <a:ea typeface="Trade Gothic Next" pitchFamily="34" charset="-122"/>
-                <a:cs typeface="Trade Gothic Next" pitchFamily="34" charset="-120"/>
-              </a:rPr>
-              <a:t>A group of orbitals inside a level. Named s, p, d, f.</a:t>
-            </a:r>
-            <a:endParaRPr lang="en-US" sz="1600" dirty="0"/>
-          </a:p>
-        </p:txBody>
-      </p:sp>
-      <p:sp>
-        <p:nvSpPr>
-          <p:cNvPr id="8" name="Text 7"/>
-          <p:cNvSpPr txBox="1"/>
-          <p:nvPr>
-            <p:ph idx="115" type="body" hasCustomPrompt="1"/>
-          </p:nvPr>
-        </p:nvSpPr>
-        <p:spPr>
-          <a:xfrm>
-            <a:off x="8110728" y="2953512"/>
-            <a:ext cx="2999232" cy="219456"/>
-          </a:xfrm>
-          <a:prstGeom prst="rect">
-            <a:avLst/>
-          </a:prstGeom>
-          <a:noFill/>
-          <a:ln/>
-        </p:spPr>
-        <p:txBody>
-          <a:bodyPr wrap="square" lIns="0" tIns="0" rIns="0" bIns="0" rtlCol="0"/>
-          <a:lstStyle/>
-          <a:p>
-            <a:pPr indent="0" marL="0">
-              <a:buNone/>
-            </a:pPr>
-            <a:r>
-              <a:rPr lang="en-US" sz="1200" b="1" spc="120" kern="0" dirty="0">
-                <a:solidFill>
-                  <a:srgbClr val="2E3338"/>
-                </a:solidFill>
-                <a:latin typeface="Trade Gothic Next" pitchFamily="34" charset="0"/>
-                <a:ea typeface="Trade Gothic Next" pitchFamily="34" charset="-122"/>
-                <a:cs typeface="Trade Gothic Next" pitchFamily="34" charset="-120"/>
-              </a:rPr>
-              <a:t>ORBITAL</a:t>
-            </a:r>
-            <a:endParaRPr lang="en-US" sz="1200" dirty="0"/>
-          </a:p>
-        </p:txBody>
-      </p:sp>
-      <p:sp>
-        <p:nvSpPr>
-          <p:cNvPr id="9" name="Text 7"/>
-          <p:cNvSpPr txBox="1"/>
-          <p:nvPr>
-            <p:ph idx="116" type="body" hasCustomPrompt="1"/>
-          </p:nvPr>
-        </p:nvSpPr>
-        <p:spPr>
-          <a:xfrm>
-            <a:off x="8110728" y="3246120"/>
-            <a:ext cx="2999232" cy="1673352"/>
-          </a:xfrm>
-          <a:prstGeom prst="rect">
-            <a:avLst/>
-          </a:prstGeom>
-          <a:noFill/>
-          <a:ln/>
-        </p:spPr>
-        <p:txBody>
-          <a:bodyPr wrap="square" lIns="0" tIns="0" rIns="0" bIns="0" rtlCol="0"/>
-          <a:lstStyle/>
-          <a:p>
-            <a:pPr indent="0" marL="0">
-              <a:buNone/>
-            </a:pPr>
-            <a:r>
-              <a:rPr lang="en-US" sz="1600" dirty="0">
-                <a:solidFill>
-                  <a:srgbClr val="14161B"/>
-                </a:solidFill>
-                <a:latin typeface="Trade Gothic Next" pitchFamily="34" charset="0"/>
-                <a:ea typeface="Trade Gothic Next" pitchFamily="34" charset="-122"/>
-                <a:cs typeface="Trade Gothic Next" pitchFamily="34" charset="-120"/>
-              </a:rPr>
-              <a:t>A region where an electron is probably found. Holds up to 2 electrons.</a:t>
-            </a:r>
-            <a:endParaRPr lang="en-US" sz="1600" dirty="0"/>
-          </a:p>
-        </p:txBody>
-      </p:sp>
-      <p:sp>
-        <p:nvSpPr>
-          <p:cNvPr id="10" name="Text 9"/>
-          <p:cNvSpPr txBox="1"/>
-          <p:nvPr>
-            <p:ph idx="119" type="body" hasCustomPrompt="1"/>
-          </p:nvPr>
-        </p:nvSpPr>
-        <p:spPr>
-          <a:xfrm>
-            <a:off x="2240280" y="5486400"/>
-            <a:ext cx="8991295" cy="402336"/>
-          </a:xfrm>
-          <a:prstGeom prst="rect">
-            <a:avLst/>
-          </a:prstGeom>
-          <a:noFill/>
-          <a:ln/>
-        </p:spPr>
-        <p:txBody>
-          <a:bodyPr wrap="square" lIns="0" tIns="0" rIns="0" bIns="0" rtlCol="0" anchor="ctr"/>
-          <a:lstStyle/>
-          <a:p>
-            <a:pPr indent="0" marL="0">
-              <a:buNone/>
-            </a:pPr>
-            <a:r>
-              <a:rPr lang="en-US" sz="1600" b="1" dirty="0">
-                <a:solidFill>
-                  <a:srgbClr val="EDF0E5"/>
-                </a:solidFill>
-                <a:latin typeface="Trade Gothic Next" pitchFamily="34" charset="0"/>
-                <a:ea typeface="Trade Gothic Next" pitchFamily="34" charset="-122"/>
-                <a:cs typeface="Trade Gothic Next" pitchFamily="34" charset="-120"/>
-              </a:rPr>
-              <a:t>Energy levels contain sublevels. Sublevels contain orbitals.</a:t>
-            </a:r>
-            <a:endParaRPr lang="en-US" sz="1600" dirty="0"/>
-          </a:p>
-        </p:txBody>
-      </p:sp>
-      <p:sp>
-        <p:nvSpPr>
-          <p:cNvPr id="11" name="Text 1"/>
-          <p:cNvSpPr txBox="1"/>
-          <p:nvPr>
-            <p:ph idx="101" type="body" hasCustomPrompt="1"/>
+          <p:cNvPr id="5" name="Text 4"/>
+          <p:cNvSpPr txBox="1"/>
+          <p:nvPr>
+            <p:ph idx="105" type="body" hasCustomPrompt="1"/>
           </p:nvPr>
         </p:nvSpPr>
         <p:spPr>
@@ -19625,7 +20540,7 @@
             <a:r>
               <a:rPr lang="en-US" sz="1100" b="1" spc="160" kern="0" dirty="0">
                 <a:solidFill>
-                  <a:srgbClr val="14161B"/>
+                  <a:srgbClr val="EDF0E5"/>
                 </a:solidFill>
                 <a:latin typeface="Trade Gothic Next" pitchFamily="34" charset="0"/>
                 <a:ea typeface="Trade Gothic Next" pitchFamily="34" charset="-122"/>
@@ -19639,10 +20554,10 @@
       </p:sp>
       <p:sp>
         <p:nvSpPr>
-          <p:cNvPr id="12" name="Text 10"/>
-          <p:cNvSpPr txBox="1"/>
-          <p:nvPr>
-            <p:ph idx="121" type="body" hasCustomPrompt="1"/>
+          <p:cNvPr id="6" name="Text 8"/>
+          <p:cNvSpPr txBox="1"/>
+          <p:nvPr>
+            <p:ph idx="113" type="body" hasCustomPrompt="1"/>
           </p:nvPr>
         </p:nvSpPr>
         <p:spPr>
@@ -19666,7 +20581,7 @@
             <a:r>
               <a:rPr lang="en-US" sz="1000" b="1" spc="140" kern="0" dirty="0">
                 <a:solidFill>
-                  <a:srgbClr val="2E3338"/>
+                  <a:srgbClr val="BDB6AA"/>
                 </a:solidFill>
                 <a:latin typeface="Trade Gothic Next" pitchFamily="34" charset="0"/>
                 <a:ea typeface="Trade Gothic Next" pitchFamily="34" charset="-122"/>
@@ -19680,16 +20595,16 @@
       </p:sp>
       <p:sp>
         <p:nvSpPr>
-          <p:cNvPr id="13" name="Text 4"/>
-          <p:cNvSpPr txBox="1"/>
-          <p:nvPr>
-            <p:ph idx="107" hasCustomPrompt="1"/>
-          </p:nvPr>
-        </p:nvSpPr>
-        <p:spPr>
-          <a:xfrm>
-            <a:off x="8641080" y="1088136"/>
-            <a:ext cx="2633472" cy="1481328"/>
+          <p:cNvPr id="8" name="Text 4"/>
+          <p:cNvSpPr txBox="1"/>
+          <p:nvPr>
+            <p:ph idx="104" hasCustomPrompt="1"/>
+          </p:nvPr>
+        </p:nvSpPr>
+        <p:spPr>
+          <a:xfrm>
+            <a:off x="6355080" y="1298448"/>
+            <a:ext cx="4983480" cy="2798064"/>
           </a:xfrm>
           <a:prstGeom prst="rect">
             <a:avLst/>
@@ -19768,7 +20683,7 @@
                 <a:ea typeface="Trade Gothic Next" pitchFamily="34" charset="-122"/>
                 <a:cs typeface="Trade Gothic Next" pitchFamily="34" charset="-120"/>
               </a:rPr>
-              <a:t>How the Model Changed</a:t>
+              <a:t>Three Words You Need First</a:t>
             </a:r>
             <a:endParaRPr lang="en-US" sz="2800" dirty="0"/>
           </a:p>
@@ -19809,7 +20724,7 @@
                 <a:ea typeface="Trade Gothic Next" pitchFamily="34" charset="-122"/>
                 <a:cs typeface="Trade Gothic Next" pitchFamily="34" charset="-120"/>
               </a:rPr>
-              <a:t>Two ideas replaced Bohr's circular paths.</a:t>
+              <a:t>Write these before we go further. Each one sits inside the one before.</a:t>
             </a:r>
             <a:endParaRPr lang="en-US" sz="1700" dirty="0"/>
           </a:p>
@@ -19850,7 +20765,7 @@
                 <a:ea typeface="Trade Gothic Next" pitchFamily="34" charset="-122"/>
                 <a:cs typeface="Trade Gothic Next" pitchFamily="34" charset="-120"/>
               </a:rPr>
-              <a:t>SCHRÖDINGER, 1926</a:t>
+              <a:t>ENERGY LEVEL</a:t>
             </a:r>
             <a:endParaRPr lang="en-US" sz="1200" dirty="0"/>
           </a:p>
@@ -19891,30 +20806,7 @@
                 <a:ea typeface="Trade Gothic Next" pitchFamily="34" charset="-122"/>
                 <a:cs typeface="Trade Gothic Next" pitchFamily="34" charset="-120"/>
               </a:rPr>
-              <a:t>Described electrons with wave equations.</a:t>
-            </a:r>
-            <a:endParaRPr lang="en-US" sz="1600" dirty="0"/>
-          </a:p>
-          <a:p>
-            <a:pPr indent="0" marL="0">
-              <a:buNone/>
-            </a:pPr>
-            <a:endParaRPr lang="en-US" sz="1600" dirty="0"/>
-          </a:p>
-          <a:p>
-            <a:pPr indent="0" marL="0">
-              <a:buNone/>
-            </a:pPr>
-            <a:r>
-              <a:rPr lang="en-US" sz="1600" dirty="0">
-                <a:solidFill>
-                  <a:srgbClr val="14161B"/>
-                </a:solidFill>
-                <a:latin typeface="Trade Gothic Next" pitchFamily="34" charset="0"/>
-                <a:ea typeface="Trade Gothic Next" pitchFamily="34" charset="-122"/>
-                <a:cs typeface="Trade Gothic Next" pitchFamily="34" charset="-120"/>
-              </a:rPr>
-              <a:t>The math gives probabilities, not paths.</a:t>
+              <a:t>The main shell. Numbered n = 1, 2, 3, 4, and up.</a:t>
             </a:r>
             <a:endParaRPr lang="en-US" sz="1600" dirty="0"/>
           </a:p>
@@ -19955,7 +20847,7 @@
                 <a:ea typeface="Trade Gothic Next" pitchFamily="34" charset="-122"/>
                 <a:cs typeface="Trade Gothic Next" pitchFamily="34" charset="-120"/>
               </a:rPr>
-              <a:t>HEISENBERG</a:t>
+              <a:t>SUBLEVEL</a:t>
             </a:r>
             <a:endParaRPr lang="en-US" sz="1200" dirty="0"/>
           </a:p>
@@ -19996,7 +20888,7 @@
                 <a:ea typeface="Trade Gothic Next" pitchFamily="34" charset="-122"/>
                 <a:cs typeface="Trade Gothic Next" pitchFamily="34" charset="-120"/>
               </a:rPr>
-              <a:t>The uncertainty principle: you cannot know an electron's exact position and exact momentum at once.</a:t>
+              <a:t>A group of orbitals inside a level. Named s, p, d, f.</a:t>
             </a:r>
             <a:endParaRPr lang="en-US" sz="1600" dirty="0"/>
           </a:p>
@@ -20037,7 +20929,7 @@
                 <a:ea typeface="Trade Gothic Next" pitchFamily="34" charset="-122"/>
                 <a:cs typeface="Trade Gothic Next" pitchFamily="34" charset="-120"/>
               </a:rPr>
-              <a:t>THE RESULT</a:t>
+              <a:t>ORBITAL</a:t>
             </a:r>
             <a:endParaRPr lang="en-US" sz="1200" dirty="0"/>
           </a:p>
@@ -20078,7 +20970,7 @@
                 <a:ea typeface="Trade Gothic Next" pitchFamily="34" charset="-122"/>
                 <a:cs typeface="Trade Gothic Next" pitchFamily="34" charset="-120"/>
               </a:rPr>
-              <a:t>The quantum-mechanical model, also called the electron cloud model.</a:t>
+              <a:t>A region where an electron is probably found. Holds up to 2 electrons.</a:t>
             </a:r>
             <a:endParaRPr lang="en-US" sz="1600" dirty="0"/>
           </a:p>
@@ -20119,7 +21011,7 @@
                 <a:ea typeface="Trade Gothic Next" pitchFamily="34" charset="-122"/>
                 <a:cs typeface="Trade Gothic Next" pitchFamily="34" charset="-120"/>
               </a:rPr>
-              <a:t>Electrons are described by probability, not by paths.</a:t>
+              <a:t>Energy levels contain sublevels. Sublevels contain orbitals.</a:t>
             </a:r>
             <a:endParaRPr lang="en-US" sz="1600" dirty="0"/>
           </a:p>
@@ -20209,7 +21101,7 @@
       </p:sp>
       <p:sp>
         <p:nvSpPr>
-          <p:cNvPr id="13" name="Text 4"/>
+          <p:cNvPr id="14" name="Text 4"/>
           <p:cNvSpPr txBox="1"/>
           <p:nvPr>
             <p:ph idx="107" hasCustomPrompt="1"/>
@@ -20273,7 +21165,7 @@
         <p:spPr>
           <a:xfrm>
             <a:off x="685800" y="932688"/>
-            <a:ext cx="10820095" cy="868680"/>
+            <a:ext cx="7360920" cy="868680"/>
           </a:xfrm>
           <a:prstGeom prst="rect">
             <a:avLst/>
@@ -20297,7 +21189,7 @@
                 <a:ea typeface="Trade Gothic Next" pitchFamily="34" charset="-122"/>
                 <a:cs typeface="Trade Gothic Next" pitchFamily="34" charset="-120"/>
               </a:rPr>
-              <a:t>Orbit vs. Orbital</a:t>
+              <a:t>How the Model Changed</a:t>
             </a:r>
             <a:endParaRPr lang="en-US" sz="2800" dirty="0"/>
           </a:p>
@@ -20314,7 +21206,7 @@
         <p:spPr>
           <a:xfrm>
             <a:off x="685800" y="1847088"/>
-            <a:ext cx="10820095" cy="384048"/>
+            <a:ext cx="7360920" cy="384048"/>
           </a:xfrm>
           <a:prstGeom prst="rect">
             <a:avLst/>
@@ -20338,7 +21230,7 @@
                 <a:ea typeface="Trade Gothic Next" pitchFamily="34" charset="-122"/>
                 <a:cs typeface="Trade Gothic Next" pitchFamily="34" charset="-120"/>
               </a:rPr>
-              <a:t>The two words sound alike. They mean different things.</a:t>
+              <a:t>Two ideas replaced Bohr's circular paths.</a:t>
             </a:r>
             <a:endParaRPr lang="en-US" sz="1700" dirty="0"/>
           </a:p>
@@ -20346,16 +21238,16 @@
       </p:sp>
       <p:sp>
         <p:nvSpPr>
-          <p:cNvPr id="4" name="Text 4"/>
-          <p:cNvSpPr txBox="1"/>
-          <p:nvPr>
-            <p:ph idx="108" type="body" hasCustomPrompt="1"/>
-          </p:nvPr>
-        </p:nvSpPr>
-        <p:spPr>
-          <a:xfrm>
-            <a:off x="5733288" y="2542032"/>
-            <a:ext cx="2752344" cy="219456"/>
+          <p:cNvPr id="4" name="Text 5"/>
+          <p:cNvSpPr txBox="1"/>
+          <p:nvPr>
+            <p:ph idx="109" type="body" hasCustomPrompt="1"/>
+          </p:nvPr>
+        </p:nvSpPr>
+        <p:spPr>
+          <a:xfrm>
+            <a:off x="886968" y="2953512"/>
+            <a:ext cx="2999232" cy="219456"/>
           </a:xfrm>
           <a:prstGeom prst="rect">
             <a:avLst/>
@@ -20379,7 +21271,7 @@
                 <a:ea typeface="Trade Gothic Next" pitchFamily="34" charset="-122"/>
                 <a:cs typeface="Trade Gothic Next" pitchFamily="34" charset="-120"/>
               </a:rPr>
-              <a:t>BOHR ORBIT</a:t>
+              <a:t>SCHRÖDINGER, 1926</a:t>
             </a:r>
             <a:endParaRPr lang="en-US" sz="1200" dirty="0"/>
           </a:p>
@@ -20387,16 +21279,16 @@
       </p:sp>
       <p:sp>
         <p:nvSpPr>
-          <p:cNvPr id="5" name="Text 4"/>
-          <p:cNvSpPr txBox="1"/>
-          <p:nvPr>
-            <p:ph idx="109" type="body" hasCustomPrompt="1"/>
-          </p:nvPr>
-        </p:nvSpPr>
-        <p:spPr>
-          <a:xfrm>
-            <a:off x="5733288" y="2834640"/>
-            <a:ext cx="2752344" cy="1965960"/>
+          <p:cNvPr id="5" name="Text 5"/>
+          <p:cNvSpPr txBox="1"/>
+          <p:nvPr>
+            <p:ph idx="110" type="body" hasCustomPrompt="1"/>
+          </p:nvPr>
+        </p:nvSpPr>
+        <p:spPr>
+          <a:xfrm>
+            <a:off x="886968" y="3246120"/>
+            <a:ext cx="2999232" cy="1673352"/>
           </a:xfrm>
           <a:prstGeom prst="rect">
             <a:avLst/>
@@ -20420,7 +21312,7 @@
                 <a:ea typeface="Trade Gothic Next" pitchFamily="34" charset="-122"/>
                 <a:cs typeface="Trade Gothic Next" pitchFamily="34" charset="-120"/>
               </a:rPr>
-              <a:t>A fixed circular path.</a:t>
+              <a:t>Described electrons with wave equations.</a:t>
             </a:r>
             <a:endParaRPr lang="en-US" sz="1600" dirty="0"/>
           </a:p>
@@ -20443,7 +21335,7 @@
                 <a:ea typeface="Trade Gothic Next" pitchFamily="34" charset="-122"/>
                 <a:cs typeface="Trade Gothic Next" pitchFamily="34" charset="-120"/>
               </a:rPr>
-              <a:t>The electron is on the line.</a:t>
+              <a:t>The math gives probabilities, not paths.</a:t>
             </a:r>
             <a:endParaRPr lang="en-US" sz="1600" dirty="0"/>
           </a:p>
@@ -20451,16 +21343,16 @@
       </p:sp>
       <p:sp>
         <p:nvSpPr>
-          <p:cNvPr id="6" name="Text 5"/>
-          <p:cNvSpPr txBox="1"/>
-          <p:nvPr>
-            <p:ph idx="111" type="body" hasCustomPrompt="1"/>
-          </p:nvPr>
-        </p:nvSpPr>
-        <p:spPr>
-          <a:xfrm>
-            <a:off x="9116568" y="2542032"/>
-            <a:ext cx="2752344" cy="219456"/>
+          <p:cNvPr id="6" name="Text 6"/>
+          <p:cNvSpPr txBox="1"/>
+          <p:nvPr>
+            <p:ph idx="112" type="body" hasCustomPrompt="1"/>
+          </p:nvPr>
+        </p:nvSpPr>
+        <p:spPr>
+          <a:xfrm>
+            <a:off x="4498848" y="2953512"/>
+            <a:ext cx="2999232" cy="219456"/>
           </a:xfrm>
           <a:prstGeom prst="rect">
             <a:avLst/>
@@ -20478,13 +21370,13 @@
             <a:r>
               <a:rPr lang="en-US" sz="1200" b="1" spc="120" kern="0" dirty="0">
                 <a:solidFill>
-                  <a:srgbClr val="BDB6AA"/>
-                </a:solidFill>
-                <a:latin typeface="Trade Gothic Next" pitchFamily="34" charset="0"/>
-                <a:ea typeface="Trade Gothic Next" pitchFamily="34" charset="-122"/>
-                <a:cs typeface="Trade Gothic Next" pitchFamily="34" charset="-120"/>
-              </a:rPr>
-              <a:t>ORBITAL</a:t>
+                  <a:srgbClr val="2E3338"/>
+                </a:solidFill>
+                <a:latin typeface="Trade Gothic Next" pitchFamily="34" charset="0"/>
+                <a:ea typeface="Trade Gothic Next" pitchFamily="34" charset="-122"/>
+                <a:cs typeface="Trade Gothic Next" pitchFamily="34" charset="-120"/>
+              </a:rPr>
+              <a:t>HEISENBERG</a:t>
             </a:r>
             <a:endParaRPr lang="en-US" sz="1200" dirty="0"/>
           </a:p>
@@ -20492,16 +21384,16 @@
       </p:sp>
       <p:sp>
         <p:nvSpPr>
-          <p:cNvPr id="7" name="Text 5"/>
-          <p:cNvSpPr txBox="1"/>
-          <p:nvPr>
-            <p:ph idx="112" type="body" hasCustomPrompt="1"/>
-          </p:nvPr>
-        </p:nvSpPr>
-        <p:spPr>
-          <a:xfrm>
-            <a:off x="9116568" y="2834640"/>
-            <a:ext cx="2752344" cy="1965960"/>
+          <p:cNvPr id="7" name="Text 6"/>
+          <p:cNvSpPr txBox="1"/>
+          <p:nvPr>
+            <p:ph idx="113" type="body" hasCustomPrompt="1"/>
+          </p:nvPr>
+        </p:nvSpPr>
+        <p:spPr>
+          <a:xfrm>
+            <a:off x="4498848" y="3246120"/>
+            <a:ext cx="2999232" cy="1673352"/>
           </a:xfrm>
           <a:prstGeom prst="rect">
             <a:avLst/>
@@ -20519,102 +21411,144 @@
             <a:r>
               <a:rPr lang="en-US" sz="1600" dirty="0">
                 <a:solidFill>
+                  <a:srgbClr val="14161B"/>
+                </a:solidFill>
+                <a:latin typeface="Trade Gothic Next" pitchFamily="34" charset="0"/>
+                <a:ea typeface="Trade Gothic Next" pitchFamily="34" charset="-122"/>
+                <a:cs typeface="Trade Gothic Next" pitchFamily="34" charset="-120"/>
+              </a:rPr>
+              <a:t>The uncertainty principle: you cannot know an electron's exact position and exact momentum at once.</a:t>
+            </a:r>
+            <a:endParaRPr lang="en-US" sz="1600" dirty="0"/>
+          </a:p>
+        </p:txBody>
+      </p:sp>
+      <p:sp>
+        <p:nvSpPr>
+          <p:cNvPr id="8" name="Text 7"/>
+          <p:cNvSpPr txBox="1"/>
+          <p:nvPr>
+            <p:ph idx="115" type="body" hasCustomPrompt="1"/>
+          </p:nvPr>
+        </p:nvSpPr>
+        <p:spPr>
+          <a:xfrm>
+            <a:off x="8110728" y="2953512"/>
+            <a:ext cx="2999232" cy="219456"/>
+          </a:xfrm>
+          <a:prstGeom prst="rect">
+            <a:avLst/>
+          </a:prstGeom>
+          <a:noFill/>
+          <a:ln/>
+        </p:spPr>
+        <p:txBody>
+          <a:bodyPr wrap="square" lIns="0" tIns="0" rIns="0" bIns="0" rtlCol="0"/>
+          <a:lstStyle/>
+          <a:p>
+            <a:pPr indent="0" marL="0">
+              <a:buNone/>
+            </a:pPr>
+            <a:r>
+              <a:rPr lang="en-US" sz="1200" b="1" spc="120" kern="0" dirty="0">
+                <a:solidFill>
+                  <a:srgbClr val="2E3338"/>
+                </a:solidFill>
+                <a:latin typeface="Trade Gothic Next" pitchFamily="34" charset="0"/>
+                <a:ea typeface="Trade Gothic Next" pitchFamily="34" charset="-122"/>
+                <a:cs typeface="Trade Gothic Next" pitchFamily="34" charset="-120"/>
+              </a:rPr>
+              <a:t>THE RESULT</a:t>
+            </a:r>
+            <a:endParaRPr lang="en-US" sz="1200" dirty="0"/>
+          </a:p>
+        </p:txBody>
+      </p:sp>
+      <p:sp>
+        <p:nvSpPr>
+          <p:cNvPr id="9" name="Text 7"/>
+          <p:cNvSpPr txBox="1"/>
+          <p:nvPr>
+            <p:ph idx="116" type="body" hasCustomPrompt="1"/>
+          </p:nvPr>
+        </p:nvSpPr>
+        <p:spPr>
+          <a:xfrm>
+            <a:off x="8110728" y="3246120"/>
+            <a:ext cx="2999232" cy="1673352"/>
+          </a:xfrm>
+          <a:prstGeom prst="rect">
+            <a:avLst/>
+          </a:prstGeom>
+          <a:noFill/>
+          <a:ln/>
+        </p:spPr>
+        <p:txBody>
+          <a:bodyPr wrap="square" lIns="0" tIns="0" rIns="0" bIns="0" rtlCol="0"/>
+          <a:lstStyle/>
+          <a:p>
+            <a:pPr indent="0" marL="0">
+              <a:buNone/>
+            </a:pPr>
+            <a:r>
+              <a:rPr lang="en-US" sz="1600" dirty="0">
+                <a:solidFill>
+                  <a:srgbClr val="14161B"/>
+                </a:solidFill>
+                <a:latin typeface="Trade Gothic Next" pitchFamily="34" charset="0"/>
+                <a:ea typeface="Trade Gothic Next" pitchFamily="34" charset="-122"/>
+                <a:cs typeface="Trade Gothic Next" pitchFamily="34" charset="-120"/>
+              </a:rPr>
+              <a:t>The quantum-mechanical model, also called the electron cloud model.</a:t>
+            </a:r>
+            <a:endParaRPr lang="en-US" sz="1600" dirty="0"/>
+          </a:p>
+        </p:txBody>
+      </p:sp>
+      <p:sp>
+        <p:nvSpPr>
+          <p:cNvPr id="10" name="Text 9"/>
+          <p:cNvSpPr txBox="1"/>
+          <p:nvPr>
+            <p:ph idx="119" type="body" hasCustomPrompt="1"/>
+          </p:nvPr>
+        </p:nvSpPr>
+        <p:spPr>
+          <a:xfrm>
+            <a:off x="2240280" y="5486400"/>
+            <a:ext cx="8991295" cy="402336"/>
+          </a:xfrm>
+          <a:prstGeom prst="rect">
+            <a:avLst/>
+          </a:prstGeom>
+          <a:noFill/>
+          <a:ln/>
+        </p:spPr>
+        <p:txBody>
+          <a:bodyPr wrap="square" lIns="0" tIns="0" rIns="0" bIns="0" rtlCol="0" anchor="ctr"/>
+          <a:lstStyle/>
+          <a:p>
+            <a:pPr indent="0" marL="0">
+              <a:buNone/>
+            </a:pPr>
+            <a:r>
+              <a:rPr lang="en-US" sz="1600" b="1" dirty="0">
+                <a:solidFill>
                   <a:srgbClr val="EDF0E5"/>
                 </a:solidFill>
                 <a:latin typeface="Trade Gothic Next" pitchFamily="34" charset="0"/>
                 <a:ea typeface="Trade Gothic Next" pitchFamily="34" charset="-122"/>
                 <a:cs typeface="Trade Gothic Next" pitchFamily="34" charset="-120"/>
               </a:rPr>
-              <a:t>A region of space.</a:t>
+              <a:t>Electrons are described by probability, not by paths.</a:t>
             </a:r>
             <a:endParaRPr lang="en-US" sz="1600" dirty="0"/>
           </a:p>
-          <a:p>
-            <a:pPr indent="0" marL="0">
-              <a:buNone/>
-            </a:pPr>
-            <a:endParaRPr lang="en-US" sz="1600" dirty="0"/>
-          </a:p>
-          <a:p>
-            <a:pPr indent="0" marL="0">
-              <a:buNone/>
-            </a:pPr>
-            <a:r>
-              <a:rPr lang="en-US" sz="1600" dirty="0">
-                <a:solidFill>
-                  <a:srgbClr val="EDF0E5"/>
-                </a:solidFill>
-                <a:latin typeface="Trade Gothic Next" pitchFamily="34" charset="0"/>
-                <a:ea typeface="Trade Gothic Next" pitchFamily="34" charset="-122"/>
-                <a:cs typeface="Trade Gothic Next" pitchFamily="34" charset="-120"/>
-              </a:rPr>
-              <a:t>The electron is probably</a:t>
-            </a:r>
-            <a:endParaRPr lang="en-US" sz="1600" dirty="0"/>
-          </a:p>
-          <a:p>
-            <a:pPr indent="0" marL="0">
-              <a:buNone/>
-            </a:pPr>
-            <a:r>
-              <a:rPr lang="en-US" sz="1600" dirty="0">
-                <a:solidFill>
-                  <a:srgbClr val="EDF0E5"/>
-                </a:solidFill>
-                <a:latin typeface="Trade Gothic Next" pitchFamily="34" charset="0"/>
-                <a:ea typeface="Trade Gothic Next" pitchFamily="34" charset="-122"/>
-                <a:cs typeface="Trade Gothic Next" pitchFamily="34" charset="-120"/>
-              </a:rPr>
-              <a:t>inside it.</a:t>
-            </a:r>
-            <a:endParaRPr lang="en-US" sz="1600" dirty="0"/>
-          </a:p>
-        </p:txBody>
-      </p:sp>
-      <p:sp>
-        <p:nvSpPr>
-          <p:cNvPr id="8" name="Text 7"/>
-          <p:cNvSpPr txBox="1"/>
-          <p:nvPr>
-            <p:ph idx="115" type="body" hasCustomPrompt="1"/>
-          </p:nvPr>
-        </p:nvSpPr>
-        <p:spPr>
-          <a:xfrm>
-            <a:off x="2240280" y="5394960"/>
-            <a:ext cx="8991295" cy="402336"/>
-          </a:xfrm>
-          <a:prstGeom prst="rect">
-            <a:avLst/>
-          </a:prstGeom>
-          <a:noFill/>
-          <a:ln/>
-        </p:spPr>
-        <p:txBody>
-          <a:bodyPr wrap="square" lIns="0" tIns="0" rIns="0" bIns="0" rtlCol="0" anchor="ctr"/>
-          <a:lstStyle/>
-          <a:p>
-            <a:pPr indent="0" marL="0">
-              <a:buNone/>
-            </a:pPr>
-            <a:r>
-              <a:rPr lang="en-US" sz="1600" b="1" dirty="0">
-                <a:solidFill>
-                  <a:srgbClr val="EDF0E5"/>
-                </a:solidFill>
-                <a:latin typeface="Trade Gothic Next" pitchFamily="34" charset="0"/>
-                <a:ea typeface="Trade Gothic Next" pitchFamily="34" charset="-122"/>
-                <a:cs typeface="Trade Gothic Next" pitchFamily="34" charset="-120"/>
-              </a:rPr>
-              <a:t>An orbital is a region of high probability for finding an electron, not a path.</a:t>
-            </a:r>
-            <a:endParaRPr lang="en-US" sz="1600" dirty="0"/>
-          </a:p>
-        </p:txBody>
-      </p:sp>
-      <p:sp>
-        <p:nvSpPr>
-          <p:cNvPr id="9" name="Text 1"/>
+        </p:txBody>
+      </p:sp>
+      <p:sp>
+        <p:nvSpPr>
+          <p:cNvPr id="11" name="Text 1"/>
           <p:cNvSpPr txBox="1"/>
           <p:nvPr>
             <p:ph idx="101" type="body" hasCustomPrompt="1"/>
@@ -20655,10 +21589,10 @@
       </p:sp>
       <p:sp>
         <p:nvSpPr>
-          <p:cNvPr id="10" name="Text 8"/>
-          <p:cNvSpPr txBox="1"/>
-          <p:nvPr>
-            <p:ph idx="117" type="body" hasCustomPrompt="1"/>
+          <p:cNvPr id="12" name="Text 10"/>
+          <p:cNvSpPr txBox="1"/>
+          <p:nvPr>
+            <p:ph idx="121" type="body" hasCustomPrompt="1"/>
           </p:nvPr>
         </p:nvSpPr>
         <p:spPr>
@@ -20696,16 +21630,16 @@
       </p:sp>
       <p:sp>
         <p:nvSpPr>
-          <p:cNvPr id="11" name="Text 3"/>
-          <p:cNvSpPr txBox="1"/>
-          <p:nvPr>
-            <p:ph idx="106" hasCustomPrompt="1"/>
-          </p:nvPr>
-        </p:nvSpPr>
-        <p:spPr>
-          <a:xfrm>
-            <a:off x="685800" y="2377440"/>
-            <a:ext cx="4663440" cy="2624328"/>
+          <p:cNvPr id="14" name="Text 4"/>
+          <p:cNvSpPr txBox="1"/>
+          <p:nvPr>
+            <p:ph idx="107" hasCustomPrompt="1"/>
+          </p:nvPr>
+        </p:nvSpPr>
+        <p:spPr>
+          <a:xfrm>
+            <a:off x="8641080" y="1088136"/>
+            <a:ext cx="2633472" cy="1481328"/>
           </a:xfrm>
           <a:prstGeom prst="rect">
             <a:avLst/>
@@ -20784,7 +21718,7 @@
                 <a:ea typeface="Trade Gothic Next" pitchFamily="34" charset="-122"/>
                 <a:cs typeface="Trade Gothic Next" pitchFamily="34" charset="-120"/>
               </a:rPr>
-              <a:t>Energy Levels: the Number n</a:t>
+              <a:t>Orbit vs. Orbital</a:t>
             </a:r>
             <a:endParaRPr lang="en-US" sz="2800" dirty="0"/>
           </a:p>
@@ -20825,7 +21759,7 @@
                 <a:ea typeface="Trade Gothic Next" pitchFamily="34" charset="-122"/>
                 <a:cs typeface="Trade Gothic Next" pitchFamily="34" charset="-120"/>
               </a:rPr>
-              <a:t>n is the principal quantum number: 1, 2, 3, 4, and up.</a:t>
+              <a:t>The two words sound alike. They mean different things.</a:t>
             </a:r>
             <a:endParaRPr lang="en-US" sz="1700" dirty="0"/>
           </a:p>
@@ -20866,7 +21800,7 @@
                 <a:ea typeface="Trade Gothic Next" pitchFamily="34" charset="-122"/>
                 <a:cs typeface="Trade Gothic Next" pitchFamily="34" charset="-120"/>
               </a:rPr>
-              <a:t>LOW n</a:t>
+              <a:t>BOHR ORBIT</a:t>
             </a:r>
             <a:endParaRPr lang="en-US" sz="1200" dirty="0"/>
           </a:p>
@@ -20907,7 +21841,7 @@
                 <a:ea typeface="Trade Gothic Next" pitchFamily="34" charset="-122"/>
                 <a:cs typeface="Trade Gothic Next" pitchFamily="34" charset="-120"/>
               </a:rPr>
-              <a:t>n = 1</a:t>
+              <a:t>A fixed circular path.</a:t>
             </a:r>
             <a:endParaRPr lang="en-US" sz="1600" dirty="0"/>
           </a:p>
@@ -20915,6 +21849,12 @@
             <a:pPr indent="0" marL="0">
               <a:buNone/>
             </a:pPr>
+            <a:endParaRPr lang="en-US" sz="1600" dirty="0"/>
+          </a:p>
+          <a:p>
+            <a:pPr indent="0" marL="0">
+              <a:buNone/>
+            </a:pPr>
             <a:r>
               <a:rPr lang="en-US" sz="1600" dirty="0">
                 <a:solidFill>
@@ -20924,24 +21864,7 @@
                 <a:ea typeface="Trade Gothic Next" pitchFamily="34" charset="-122"/>
                 <a:cs typeface="Trade Gothic Next" pitchFamily="34" charset="-120"/>
               </a:rPr>
-              <a:t>Closest to the nucleus on average.</a:t>
-            </a:r>
-            <a:endParaRPr lang="en-US" sz="1600" dirty="0"/>
-          </a:p>
-          <a:p>
-            <a:pPr indent="0" marL="0">
-              <a:buNone/>
-            </a:pPr>
-            <a:r>
-              <a:rPr lang="en-US" sz="1600" dirty="0">
-                <a:solidFill>
-                  <a:srgbClr val="14161B"/>
-                </a:solidFill>
-                <a:latin typeface="Trade Gothic Next" pitchFamily="34" charset="0"/>
-                <a:ea typeface="Trade Gothic Next" pitchFamily="34" charset="-122"/>
-                <a:cs typeface="Trade Gothic Next" pitchFamily="34" charset="-120"/>
-              </a:rPr>
-              <a:t>Lowest energy.</a:t>
+              <a:t>The electron is on the line.</a:t>
             </a:r>
             <a:endParaRPr lang="en-US" sz="1600" dirty="0"/>
           </a:p>
@@ -20982,7 +21905,7 @@
                 <a:ea typeface="Trade Gothic Next" pitchFamily="34" charset="-122"/>
                 <a:cs typeface="Trade Gothic Next" pitchFamily="34" charset="-120"/>
               </a:rPr>
-              <a:t>HIGH n</a:t>
+              <a:t>ORBITAL</a:t>
             </a:r>
             <a:endParaRPr lang="en-US" sz="1200" dirty="0"/>
           </a:p>
@@ -21023,7 +21946,7 @@
                 <a:ea typeface="Trade Gothic Next" pitchFamily="34" charset="-122"/>
                 <a:cs typeface="Trade Gothic Next" pitchFamily="34" charset="-120"/>
               </a:rPr>
-              <a:t>n = 4</a:t>
+              <a:t>A region of space.</a:t>
             </a:r>
             <a:endParaRPr lang="en-US" sz="1600" dirty="0"/>
           </a:p>
@@ -21031,6 +21954,12 @@
             <a:pPr indent="0" marL="0">
               <a:buNone/>
             </a:pPr>
+            <a:endParaRPr lang="en-US" sz="1600" dirty="0"/>
+          </a:p>
+          <a:p>
+            <a:pPr indent="0" marL="0">
+              <a:buNone/>
+            </a:pPr>
             <a:r>
               <a:rPr lang="en-US" sz="1600" dirty="0">
                 <a:solidFill>
@@ -21040,7 +21969,7 @@
                 <a:ea typeface="Trade Gothic Next" pitchFamily="34" charset="-122"/>
                 <a:cs typeface="Trade Gothic Next" pitchFamily="34" charset="-120"/>
               </a:rPr>
-              <a:t>Farther from the nucleus on average.</a:t>
+              <a:t>The electron is probably</a:t>
             </a:r>
             <a:endParaRPr lang="en-US" sz="1600" dirty="0"/>
           </a:p>
@@ -21057,7 +21986,7 @@
                 <a:ea typeface="Trade Gothic Next" pitchFamily="34" charset="-122"/>
                 <a:cs typeface="Trade Gothic Next" pitchFamily="34" charset="-120"/>
               </a:rPr>
-              <a:t>Higher energy.</a:t>
+              <a:t>inside it.</a:t>
             </a:r>
             <a:endParaRPr lang="en-US" sz="1600" dirty="0"/>
           </a:p>
@@ -21098,7 +22027,7 @@
                 <a:ea typeface="Trade Gothic Next" pitchFamily="34" charset="-122"/>
                 <a:cs typeface="Trade Gothic Next" pitchFamily="34" charset="-120"/>
               </a:rPr>
-              <a:t>Higher n means higher energy and a larger average distance from the nucleus.</a:t>
+              <a:t>An orbital is a region of high probability for finding an electron, not a path.</a:t>
             </a:r>
             <a:endParaRPr lang="en-US" sz="1600" dirty="0"/>
           </a:p>
@@ -21188,7 +22117,7 @@
       </p:sp>
       <p:sp>
         <p:nvSpPr>
-          <p:cNvPr id="11" name="Text 3"/>
+          <p:cNvPr id="12" name="Text 3"/>
           <p:cNvSpPr txBox="1"/>
           <p:nvPr>
             <p:ph idx="106" hasCustomPrompt="1"/>
@@ -21227,6 +22156,498 @@
 <file path=ppt/slides/slide7.xml><?xml version="1.0" encoding="utf-8"?>
 <p:sld xmlns:a="http://schemas.openxmlformats.org/drawingml/2006/main" xmlns:r="http://schemas.openxmlformats.org/officeDocument/2006/relationships" xmlns:p="http://schemas.openxmlformats.org/presentationml/2006/main">
   <p:cSld name="Slide 7">
+    <p:spTree>
+      <p:nvGrpSpPr>
+        <p:cNvPr id="1" name=""/>
+        <p:cNvGrpSpPr/>
+        <p:nvPr/>
+      </p:nvGrpSpPr>
+      <p:grpSpPr>
+        <a:xfrm>
+          <a:off x="0" y="0"/>
+          <a:ext cx="0" cy="0"/>
+          <a:chOff x="0" y="0"/>
+          <a:chExt cx="0" cy="0"/>
+        </a:xfrm>
+      </p:grpSpPr>
+      <p:sp>
+        <p:nvSpPr>
+          <p:cNvPr id="2" name="Text 2"/>
+          <p:cNvSpPr txBox="1"/>
+          <p:nvPr>
+            <p:ph idx="103" type="title" hasCustomPrompt="1"/>
+          </p:nvPr>
+        </p:nvSpPr>
+        <p:spPr>
+          <a:xfrm>
+            <a:off x="685800" y="932688"/>
+            <a:ext cx="10820095" cy="868680"/>
+          </a:xfrm>
+          <a:prstGeom prst="rect">
+            <a:avLst/>
+          </a:prstGeom>
+          <a:noFill/>
+          <a:ln/>
+        </p:spPr>
+        <p:txBody>
+          <a:bodyPr wrap="square" lIns="0" tIns="0" rIns="0" bIns="0" rtlCol="0" anchor="t"/>
+          <a:lstStyle/>
+          <a:p>
+            <a:pPr algn="l" indent="0" marL="0">
+              <a:buNone/>
+            </a:pPr>
+            <a:r>
+              <a:rPr lang="en-US" sz="2800" b="1" dirty="0">
+                <a:solidFill>
+                  <a:srgbClr val="14161B"/>
+                </a:solidFill>
+                <a:latin typeface="Trade Gothic Next" pitchFamily="34" charset="0"/>
+                <a:ea typeface="Trade Gothic Next" pitchFamily="34" charset="-122"/>
+                <a:cs typeface="Trade Gothic Next" pitchFamily="34" charset="-120"/>
+              </a:rPr>
+              <a:t>Energy Levels: the Number n</a:t>
+            </a:r>
+            <a:endParaRPr lang="en-US" sz="2800" dirty="0"/>
+          </a:p>
+        </p:txBody>
+      </p:sp>
+      <p:sp>
+        <p:nvSpPr>
+          <p:cNvPr id="3" name="Text 2"/>
+          <p:cNvSpPr txBox="1"/>
+          <p:nvPr>
+            <p:ph idx="104" type="body" hasCustomPrompt="1"/>
+          </p:nvPr>
+        </p:nvSpPr>
+        <p:spPr>
+          <a:xfrm>
+            <a:off x="685800" y="1847088"/>
+            <a:ext cx="10820095" cy="384048"/>
+          </a:xfrm>
+          <a:prstGeom prst="rect">
+            <a:avLst/>
+          </a:prstGeom>
+          <a:noFill/>
+          <a:ln/>
+        </p:spPr>
+        <p:txBody>
+          <a:bodyPr wrap="square" lIns="0" tIns="0" rIns="0" bIns="0" rtlCol="0"/>
+          <a:lstStyle/>
+          <a:p>
+            <a:pPr indent="0" marL="0">
+              <a:buNone/>
+            </a:pPr>
+            <a:r>
+              <a:rPr lang="en-US" sz="1700" dirty="0">
+                <a:solidFill>
+                  <a:srgbClr val="2E3338"/>
+                </a:solidFill>
+                <a:latin typeface="Trade Gothic Next" pitchFamily="34" charset="0"/>
+                <a:ea typeface="Trade Gothic Next" pitchFamily="34" charset="-122"/>
+                <a:cs typeface="Trade Gothic Next" pitchFamily="34" charset="-120"/>
+              </a:rPr>
+              <a:t>n is the principal quantum number: 1, 2, 3, 4, and up.</a:t>
+            </a:r>
+            <a:endParaRPr lang="en-US" sz="1700" dirty="0"/>
+          </a:p>
+        </p:txBody>
+      </p:sp>
+      <p:sp>
+        <p:nvSpPr>
+          <p:cNvPr id="4" name="Text 4"/>
+          <p:cNvSpPr txBox="1"/>
+          <p:nvPr>
+            <p:ph idx="108" type="body" hasCustomPrompt="1"/>
+          </p:nvPr>
+        </p:nvSpPr>
+        <p:spPr>
+          <a:xfrm>
+            <a:off x="5733288" y="2542032"/>
+            <a:ext cx="2752344" cy="219456"/>
+          </a:xfrm>
+          <a:prstGeom prst="rect">
+            <a:avLst/>
+          </a:prstGeom>
+          <a:noFill/>
+          <a:ln/>
+        </p:spPr>
+        <p:txBody>
+          <a:bodyPr wrap="square" lIns="0" tIns="0" rIns="0" bIns="0" rtlCol="0"/>
+          <a:lstStyle/>
+          <a:p>
+            <a:pPr indent="0" marL="0">
+              <a:buNone/>
+            </a:pPr>
+            <a:r>
+              <a:rPr lang="en-US" sz="1200" b="1" spc="120" kern="0" dirty="0">
+                <a:solidFill>
+                  <a:srgbClr val="2E3338"/>
+                </a:solidFill>
+                <a:latin typeface="Trade Gothic Next" pitchFamily="34" charset="0"/>
+                <a:ea typeface="Trade Gothic Next" pitchFamily="34" charset="-122"/>
+                <a:cs typeface="Trade Gothic Next" pitchFamily="34" charset="-120"/>
+              </a:rPr>
+              <a:t>LOW n</a:t>
+            </a:r>
+            <a:endParaRPr lang="en-US" sz="1200" dirty="0"/>
+          </a:p>
+        </p:txBody>
+      </p:sp>
+      <p:sp>
+        <p:nvSpPr>
+          <p:cNvPr id="5" name="Text 4"/>
+          <p:cNvSpPr txBox="1"/>
+          <p:nvPr>
+            <p:ph idx="109" type="body" hasCustomPrompt="1"/>
+          </p:nvPr>
+        </p:nvSpPr>
+        <p:spPr>
+          <a:xfrm>
+            <a:off x="5733288" y="2834640"/>
+            <a:ext cx="2752344" cy="1965960"/>
+          </a:xfrm>
+          <a:prstGeom prst="rect">
+            <a:avLst/>
+          </a:prstGeom>
+          <a:noFill/>
+          <a:ln/>
+        </p:spPr>
+        <p:txBody>
+          <a:bodyPr wrap="square" lIns="0" tIns="0" rIns="0" bIns="0" rtlCol="0"/>
+          <a:lstStyle/>
+          <a:p>
+            <a:pPr indent="0" marL="0">
+              <a:buNone/>
+            </a:pPr>
+            <a:r>
+              <a:rPr lang="en-US" sz="1600" dirty="0">
+                <a:solidFill>
+                  <a:srgbClr val="14161B"/>
+                </a:solidFill>
+                <a:latin typeface="Trade Gothic Next" pitchFamily="34" charset="0"/>
+                <a:ea typeface="Trade Gothic Next" pitchFamily="34" charset="-122"/>
+                <a:cs typeface="Trade Gothic Next" pitchFamily="34" charset="-120"/>
+              </a:rPr>
+              <a:t>n = 1</a:t>
+            </a:r>
+            <a:endParaRPr lang="en-US" sz="1600" dirty="0"/>
+          </a:p>
+          <a:p>
+            <a:pPr indent="0" marL="0">
+              <a:buNone/>
+            </a:pPr>
+            <a:r>
+              <a:rPr lang="en-US" sz="1600" dirty="0">
+                <a:solidFill>
+                  <a:srgbClr val="14161B"/>
+                </a:solidFill>
+                <a:latin typeface="Trade Gothic Next" pitchFamily="34" charset="0"/>
+                <a:ea typeface="Trade Gothic Next" pitchFamily="34" charset="-122"/>
+                <a:cs typeface="Trade Gothic Next" pitchFamily="34" charset="-120"/>
+              </a:rPr>
+              <a:t>Closest to the nucleus on average.</a:t>
+            </a:r>
+            <a:endParaRPr lang="en-US" sz="1600" dirty="0"/>
+          </a:p>
+          <a:p>
+            <a:pPr indent="0" marL="0">
+              <a:buNone/>
+            </a:pPr>
+            <a:r>
+              <a:rPr lang="en-US" sz="1600" dirty="0">
+                <a:solidFill>
+                  <a:srgbClr val="14161B"/>
+                </a:solidFill>
+                <a:latin typeface="Trade Gothic Next" pitchFamily="34" charset="0"/>
+                <a:ea typeface="Trade Gothic Next" pitchFamily="34" charset="-122"/>
+                <a:cs typeface="Trade Gothic Next" pitchFamily="34" charset="-120"/>
+              </a:rPr>
+              <a:t>Lowest energy.</a:t>
+            </a:r>
+            <a:endParaRPr lang="en-US" sz="1600" dirty="0"/>
+          </a:p>
+        </p:txBody>
+      </p:sp>
+      <p:sp>
+        <p:nvSpPr>
+          <p:cNvPr id="6" name="Text 5"/>
+          <p:cNvSpPr txBox="1"/>
+          <p:nvPr>
+            <p:ph idx="111" type="body" hasCustomPrompt="1"/>
+          </p:nvPr>
+        </p:nvSpPr>
+        <p:spPr>
+          <a:xfrm>
+            <a:off x="9116568" y="2542032"/>
+            <a:ext cx="2752344" cy="219456"/>
+          </a:xfrm>
+          <a:prstGeom prst="rect">
+            <a:avLst/>
+          </a:prstGeom>
+          <a:noFill/>
+          <a:ln/>
+        </p:spPr>
+        <p:txBody>
+          <a:bodyPr wrap="square" lIns="0" tIns="0" rIns="0" bIns="0" rtlCol="0"/>
+          <a:lstStyle/>
+          <a:p>
+            <a:pPr indent="0" marL="0">
+              <a:buNone/>
+            </a:pPr>
+            <a:r>
+              <a:rPr lang="en-US" sz="1200" b="1" spc="120" kern="0" dirty="0">
+                <a:solidFill>
+                  <a:srgbClr val="BDB6AA"/>
+                </a:solidFill>
+                <a:latin typeface="Trade Gothic Next" pitchFamily="34" charset="0"/>
+                <a:ea typeface="Trade Gothic Next" pitchFamily="34" charset="-122"/>
+                <a:cs typeface="Trade Gothic Next" pitchFamily="34" charset="-120"/>
+              </a:rPr>
+              <a:t>HIGH n</a:t>
+            </a:r>
+            <a:endParaRPr lang="en-US" sz="1200" dirty="0"/>
+          </a:p>
+        </p:txBody>
+      </p:sp>
+      <p:sp>
+        <p:nvSpPr>
+          <p:cNvPr id="7" name="Text 5"/>
+          <p:cNvSpPr txBox="1"/>
+          <p:nvPr>
+            <p:ph idx="112" type="body" hasCustomPrompt="1"/>
+          </p:nvPr>
+        </p:nvSpPr>
+        <p:spPr>
+          <a:xfrm>
+            <a:off x="9116568" y="2834640"/>
+            <a:ext cx="2752344" cy="1965960"/>
+          </a:xfrm>
+          <a:prstGeom prst="rect">
+            <a:avLst/>
+          </a:prstGeom>
+          <a:noFill/>
+          <a:ln/>
+        </p:spPr>
+        <p:txBody>
+          <a:bodyPr wrap="square" lIns="0" tIns="0" rIns="0" bIns="0" rtlCol="0"/>
+          <a:lstStyle/>
+          <a:p>
+            <a:pPr indent="0" marL="0">
+              <a:buNone/>
+            </a:pPr>
+            <a:r>
+              <a:rPr lang="en-US" sz="1600" dirty="0">
+                <a:solidFill>
+                  <a:srgbClr val="EDF0E5"/>
+                </a:solidFill>
+                <a:latin typeface="Trade Gothic Next" pitchFamily="34" charset="0"/>
+                <a:ea typeface="Trade Gothic Next" pitchFamily="34" charset="-122"/>
+                <a:cs typeface="Trade Gothic Next" pitchFamily="34" charset="-120"/>
+              </a:rPr>
+              <a:t>n = 4</a:t>
+            </a:r>
+            <a:endParaRPr lang="en-US" sz="1600" dirty="0"/>
+          </a:p>
+          <a:p>
+            <a:pPr indent="0" marL="0">
+              <a:buNone/>
+            </a:pPr>
+            <a:r>
+              <a:rPr lang="en-US" sz="1600" dirty="0">
+                <a:solidFill>
+                  <a:srgbClr val="EDF0E5"/>
+                </a:solidFill>
+                <a:latin typeface="Trade Gothic Next" pitchFamily="34" charset="0"/>
+                <a:ea typeface="Trade Gothic Next" pitchFamily="34" charset="-122"/>
+                <a:cs typeface="Trade Gothic Next" pitchFamily="34" charset="-120"/>
+              </a:rPr>
+              <a:t>Farther from the nucleus on average.</a:t>
+            </a:r>
+            <a:endParaRPr lang="en-US" sz="1600" dirty="0"/>
+          </a:p>
+          <a:p>
+            <a:pPr indent="0" marL="0">
+              <a:buNone/>
+            </a:pPr>
+            <a:r>
+              <a:rPr lang="en-US" sz="1600" dirty="0">
+                <a:solidFill>
+                  <a:srgbClr val="EDF0E5"/>
+                </a:solidFill>
+                <a:latin typeface="Trade Gothic Next" pitchFamily="34" charset="0"/>
+                <a:ea typeface="Trade Gothic Next" pitchFamily="34" charset="-122"/>
+                <a:cs typeface="Trade Gothic Next" pitchFamily="34" charset="-120"/>
+              </a:rPr>
+              <a:t>Higher energy.</a:t>
+            </a:r>
+            <a:endParaRPr lang="en-US" sz="1600" dirty="0"/>
+          </a:p>
+        </p:txBody>
+      </p:sp>
+      <p:sp>
+        <p:nvSpPr>
+          <p:cNvPr id="8" name="Text 7"/>
+          <p:cNvSpPr txBox="1"/>
+          <p:nvPr>
+            <p:ph idx="115" type="body" hasCustomPrompt="1"/>
+          </p:nvPr>
+        </p:nvSpPr>
+        <p:spPr>
+          <a:xfrm>
+            <a:off x="2240280" y="5394960"/>
+            <a:ext cx="8991295" cy="402336"/>
+          </a:xfrm>
+          <a:prstGeom prst="rect">
+            <a:avLst/>
+          </a:prstGeom>
+          <a:noFill/>
+          <a:ln/>
+        </p:spPr>
+        <p:txBody>
+          <a:bodyPr wrap="square" lIns="0" tIns="0" rIns="0" bIns="0" rtlCol="0" anchor="ctr"/>
+          <a:lstStyle/>
+          <a:p>
+            <a:pPr indent="0" marL="0">
+              <a:buNone/>
+            </a:pPr>
+            <a:r>
+              <a:rPr lang="en-US" sz="1600" b="1" dirty="0">
+                <a:solidFill>
+                  <a:srgbClr val="EDF0E5"/>
+                </a:solidFill>
+                <a:latin typeface="Trade Gothic Next" pitchFamily="34" charset="0"/>
+                <a:ea typeface="Trade Gothic Next" pitchFamily="34" charset="-122"/>
+                <a:cs typeface="Trade Gothic Next" pitchFamily="34" charset="-120"/>
+              </a:rPr>
+              <a:t>Higher n means higher energy and a larger average distance from the nucleus.</a:t>
+            </a:r>
+            <a:endParaRPr lang="en-US" sz="1600" dirty="0"/>
+          </a:p>
+        </p:txBody>
+      </p:sp>
+      <p:sp>
+        <p:nvSpPr>
+          <p:cNvPr id="9" name="Text 1"/>
+          <p:cNvSpPr txBox="1"/>
+          <p:nvPr>
+            <p:ph idx="101" type="body" hasCustomPrompt="1"/>
+          </p:nvPr>
+        </p:nvSpPr>
+        <p:spPr>
+          <a:xfrm>
+            <a:off x="685800" y="384048"/>
+            <a:ext cx="6400800" cy="237744"/>
+          </a:xfrm>
+          <a:prstGeom prst="rect">
+            <a:avLst/>
+          </a:prstGeom>
+          <a:noFill/>
+          <a:ln/>
+        </p:spPr>
+        <p:txBody>
+          <a:bodyPr wrap="square" lIns="0" tIns="0" rIns="0" bIns="0" rtlCol="0" anchor="ctr"/>
+          <a:lstStyle/>
+          <a:p>
+            <a:pPr indent="0" marL="0">
+              <a:buNone/>
+            </a:pPr>
+            <a:r>
+              <a:rPr lang="en-US" sz="1100" b="1" spc="160" kern="0" dirty="0">
+                <a:solidFill>
+                  <a:srgbClr val="14161B"/>
+                </a:solidFill>
+                <a:latin typeface="Trade Gothic Next" pitchFamily="34" charset="0"/>
+                <a:ea typeface="Trade Gothic Next" pitchFamily="34" charset="-122"/>
+                <a:cs typeface="Trade Gothic Next" pitchFamily="34" charset="-120"/>
+              </a:rPr>
+              <a:t>UNIT 02  •  CHEMISTRY</a:t>
+            </a:r>
+            <a:endParaRPr lang="en-US" sz="1100" dirty="0"/>
+          </a:p>
+        </p:txBody>
+      </p:sp>
+      <p:sp>
+        <p:nvSpPr>
+          <p:cNvPr id="10" name="Text 8"/>
+          <p:cNvSpPr txBox="1"/>
+          <p:nvPr>
+            <p:ph idx="117" type="body" hasCustomPrompt="1"/>
+          </p:nvPr>
+        </p:nvSpPr>
+        <p:spPr>
+          <a:xfrm>
+            <a:off x="8762695" y="6382512"/>
+            <a:ext cx="2743200" cy="237744"/>
+          </a:xfrm>
+          <a:prstGeom prst="rect">
+            <a:avLst/>
+          </a:prstGeom>
+          <a:noFill/>
+          <a:ln/>
+        </p:spPr>
+        <p:txBody>
+          <a:bodyPr wrap="square" lIns="0" tIns="0" rIns="0" bIns="0" rtlCol="0" anchor="ctr"/>
+          <a:lstStyle/>
+          <a:p>
+            <a:pPr algn="r" indent="0" marL="0">
+              <a:buNone/>
+            </a:pPr>
+            <a:r>
+              <a:rPr lang="en-US" sz="1000" b="1" spc="140" kern="0" dirty="0">
+                <a:solidFill>
+                  <a:srgbClr val="2E3338"/>
+                </a:solidFill>
+                <a:latin typeface="Trade Gothic Next" pitchFamily="34" charset="0"/>
+                <a:ea typeface="Trade Gothic Next" pitchFamily="34" charset="-122"/>
+                <a:cs typeface="Trade Gothic Next" pitchFamily="34" charset="-120"/>
+              </a:rPr>
+              <a:t>U02 • S02.2</a:t>
+            </a:r>
+            <a:endParaRPr lang="en-US" sz="1000" dirty="0"/>
+          </a:p>
+        </p:txBody>
+      </p:sp>
+      <p:sp>
+        <p:nvSpPr>
+          <p:cNvPr id="12" name="Text 3"/>
+          <p:cNvSpPr txBox="1"/>
+          <p:nvPr>
+            <p:ph idx="106" hasCustomPrompt="1"/>
+          </p:nvPr>
+        </p:nvSpPr>
+        <p:spPr>
+          <a:xfrm>
+            <a:off x="685800" y="2377440"/>
+            <a:ext cx="4663440" cy="2624328"/>
+          </a:xfrm>
+          <a:prstGeom prst="rect">
+            <a:avLst/>
+          </a:prstGeom>
+          <a:noFill/>
+          <a:ln/>
+        </p:spPr>
+        <p:txBody>
+          <a:bodyPr wrap="square" lIns="0" tIns="0" rIns="0" bIns="0" rtlCol="0" anchor="ctr"/>
+          <a:lstStyle/>
+          <a:p>
+            <a:pPr algn="ctr" indent="0" marL="0">
+              <a:buNone/>
+            </a:pPr>
+            <a:endParaRPr lang="en-US" sz="1200" dirty="0"/>
+          </a:p>
+        </p:txBody>
+      </p:sp>
+    </p:spTree>
+  </p:cSld>
+  <p:clrMapOvr>
+    <a:masterClrMapping/>
+  </p:clrMapOvr>
+</p:sld>
+</file>
+
+<file path=ppt/slides/slide8.xml><?xml version="1.0" encoding="utf-8"?>
+<p:sld xmlns:a="http://schemas.openxmlformats.org/drawingml/2006/main" xmlns:r="http://schemas.openxmlformats.org/officeDocument/2006/relationships" xmlns:p="http://schemas.openxmlformats.org/presentationml/2006/main">
+  <p:cSld name="Slide 8">
     <p:spTree>
       <p:nvGrpSpPr>
         <p:cNvPr id="1" name=""/>
@@ -21587,7 +23008,7 @@
                 <a:ea typeface="Trade Gothic Next" pitchFamily="34" charset="-122"/>
                 <a:cs typeface="Trade Gothic Next" pitchFamily="34" charset="-120"/>
               </a:rPr>
-              <a:t>d starts at n = 3. f starts at n = 4.</a:t>
+              <a:t>d: five orbitals, mostly four lobes. f: more complex.</a:t>
             </a:r>
             <a:endParaRPr lang="en-US" sz="1600" dirty="0"/>
           </a:p>
@@ -21677,7 +23098,7 @@
       </p:sp>
       <p:sp>
         <p:nvSpPr>
-          <p:cNvPr id="13" name="Text 3"/>
+          <p:cNvPr id="14" name="Text 3"/>
           <p:cNvSpPr txBox="1"/>
           <p:nvPr>
             <p:ph idx="106" type="body" hasCustomPrompt="1"/>
@@ -21713,9 +23134,9 @@
 </p:sld>
 </file>
 
-<file path=ppt/slides/slide8.xml><?xml version="1.0" encoding="utf-8"?>
+<file path=ppt/slides/slide9.xml><?xml version="1.0" encoding="utf-8"?>
 <p:sld xmlns:a="http://schemas.openxmlformats.org/drawingml/2006/main" xmlns:r="http://schemas.openxmlformats.org/officeDocument/2006/relationships" xmlns:p="http://schemas.openxmlformats.org/presentationml/2006/main">
-  <p:cSld name="Slide 8">
+  <p:cSld name="Slide 9">
     <p:spTree>
       <p:nvGrpSpPr>
         <p:cNvPr id="1" name=""/>
@@ -22166,7 +23587,7 @@
       </p:sp>
       <p:sp>
         <p:nvSpPr>
-          <p:cNvPr id="13" name="Text 3"/>
+          <p:cNvPr id="14" name="Text 3"/>
           <p:cNvSpPr txBox="1"/>
           <p:nvPr>
             <p:ph idx="106" type="body" hasCustomPrompt="1"/>
@@ -22191,563 +23612,6 @@
               <a:buNone/>
             </a:pPr>
             <a:endParaRPr lang="en-US" sz="2000" dirty="0"/>
-          </a:p>
-        </p:txBody>
-      </p:sp>
-    </p:spTree>
-  </p:cSld>
-  <p:clrMapOvr>
-    <a:masterClrMapping/>
-  </p:clrMapOvr>
-</p:sld>
-</file>
-
-<file path=ppt/slides/slide9.xml><?xml version="1.0" encoding="utf-8"?>
-<p:sld xmlns:a="http://schemas.openxmlformats.org/drawingml/2006/main" xmlns:r="http://schemas.openxmlformats.org/officeDocument/2006/relationships" xmlns:p="http://schemas.openxmlformats.org/presentationml/2006/main">
-  <p:cSld name="Slide 9">
-    <p:spTree>
-      <p:nvGrpSpPr>
-        <p:cNvPr id="1" name=""/>
-        <p:cNvGrpSpPr/>
-        <p:nvPr/>
-      </p:nvGrpSpPr>
-      <p:grpSpPr>
-        <a:xfrm>
-          <a:off x="0" y="0"/>
-          <a:ext cx="0" cy="0"/>
-          <a:chOff x="0" y="0"/>
-          <a:chExt cx="0" cy="0"/>
-        </a:xfrm>
-      </p:grpSpPr>
-      <p:sp>
-        <p:nvSpPr>
-          <p:cNvPr id="2" name="Text 2"/>
-          <p:cNvSpPr txBox="1"/>
-          <p:nvPr>
-            <p:ph idx="103" type="title" hasCustomPrompt="1"/>
-          </p:nvPr>
-        </p:nvSpPr>
-        <p:spPr>
-          <a:xfrm>
-            <a:off x="685800" y="932688"/>
-            <a:ext cx="7360920" cy="868680"/>
-          </a:xfrm>
-          <a:prstGeom prst="rect">
-            <a:avLst/>
-          </a:prstGeom>
-          <a:noFill/>
-          <a:ln/>
-        </p:spPr>
-        <p:txBody>
-          <a:bodyPr wrap="square" lIns="0" tIns="0" rIns="0" bIns="0" rtlCol="0" anchor="t"/>
-          <a:lstStyle/>
-          <a:p>
-            <a:pPr algn="l" indent="0" marL="0">
-              <a:buNone/>
-            </a:pPr>
-            <a:r>
-              <a:rPr lang="en-US" sz="2800" b="1" dirty="0">
-                <a:solidFill>
-                  <a:srgbClr val="14161B"/>
-                </a:solidFill>
-                <a:latin typeface="Trade Gothic Next" pitchFamily="34" charset="0"/>
-                <a:ea typeface="Trade Gothic Next" pitchFamily="34" charset="-122"/>
-                <a:cs typeface="Trade Gothic Next" pitchFamily="34" charset="-120"/>
-              </a:rPr>
-              <a:t>How Many Electrons Fit</a:t>
-            </a:r>
-            <a:endParaRPr lang="en-US" sz="2800" dirty="0"/>
-          </a:p>
-        </p:txBody>
-      </p:sp>
-      <p:sp>
-        <p:nvSpPr>
-          <p:cNvPr id="3" name="Text 2"/>
-          <p:cNvSpPr txBox="1"/>
-          <p:nvPr>
-            <p:ph idx="104" type="body" hasCustomPrompt="1"/>
-          </p:nvPr>
-        </p:nvSpPr>
-        <p:spPr>
-          <a:xfrm>
-            <a:off x="685800" y="1847088"/>
-            <a:ext cx="7360920" cy="384048"/>
-          </a:xfrm>
-          <a:prstGeom prst="rect">
-            <a:avLst/>
-          </a:prstGeom>
-          <a:noFill/>
-          <a:ln/>
-        </p:spPr>
-        <p:txBody>
-          <a:bodyPr wrap="square" lIns="0" tIns="0" rIns="0" bIns="0" rtlCol="0"/>
-          <a:lstStyle/>
-          <a:p>
-            <a:pPr indent="0" marL="0">
-              <a:buNone/>
-            </a:pPr>
-            <a:r>
-              <a:rPr lang="en-US" sz="1700" dirty="0">
-                <a:solidFill>
-                  <a:srgbClr val="2E3338"/>
-                </a:solidFill>
-                <a:latin typeface="Trade Gothic Next" pitchFamily="34" charset="0"/>
-                <a:ea typeface="Trade Gothic Next" pitchFamily="34" charset="-122"/>
-                <a:cs typeface="Trade Gothic Next" pitchFamily="34" charset="-120"/>
-              </a:rPr>
-              <a:t>Orbitals are the unit. Count orbitals, then double.</a:t>
-            </a:r>
-            <a:endParaRPr lang="en-US" sz="1700" dirty="0"/>
-          </a:p>
-        </p:txBody>
-      </p:sp>
-      <p:sp>
-        <p:nvSpPr>
-          <p:cNvPr id="4" name="Text 5"/>
-          <p:cNvSpPr txBox="1"/>
-          <p:nvPr>
-            <p:ph idx="109" type="body" hasCustomPrompt="1"/>
-          </p:nvPr>
-        </p:nvSpPr>
-        <p:spPr>
-          <a:xfrm>
-            <a:off x="886968" y="2953512"/>
-            <a:ext cx="2999232" cy="219456"/>
-          </a:xfrm>
-          <a:prstGeom prst="rect">
-            <a:avLst/>
-          </a:prstGeom>
-          <a:noFill/>
-          <a:ln/>
-        </p:spPr>
-        <p:txBody>
-          <a:bodyPr wrap="square" lIns="0" tIns="0" rIns="0" bIns="0" rtlCol="0"/>
-          <a:lstStyle/>
-          <a:p>
-            <a:pPr indent="0" marL="0">
-              <a:buNone/>
-            </a:pPr>
-            <a:r>
-              <a:rPr lang="en-US" sz="1200" b="1" spc="120" kern="0" dirty="0">
-                <a:solidFill>
-                  <a:srgbClr val="2E3338"/>
-                </a:solidFill>
-                <a:latin typeface="Trade Gothic Next" pitchFamily="34" charset="0"/>
-                <a:ea typeface="Trade Gothic Next" pitchFamily="34" charset="-122"/>
-                <a:cs typeface="Trade Gothic Next" pitchFamily="34" charset="-120"/>
-              </a:rPr>
-              <a:t>ONE ORBITAL</a:t>
-            </a:r>
-            <a:endParaRPr lang="en-US" sz="1200" dirty="0"/>
-          </a:p>
-        </p:txBody>
-      </p:sp>
-      <p:sp>
-        <p:nvSpPr>
-          <p:cNvPr id="5" name="Text 5"/>
-          <p:cNvSpPr txBox="1"/>
-          <p:nvPr>
-            <p:ph idx="110" type="body" hasCustomPrompt="1"/>
-          </p:nvPr>
-        </p:nvSpPr>
-        <p:spPr>
-          <a:xfrm>
-            <a:off x="886968" y="3246120"/>
-            <a:ext cx="2999232" cy="1673352"/>
-          </a:xfrm>
-          <a:prstGeom prst="rect">
-            <a:avLst/>
-          </a:prstGeom>
-          <a:noFill/>
-          <a:ln/>
-        </p:spPr>
-        <p:txBody>
-          <a:bodyPr wrap="square" lIns="0" tIns="0" rIns="0" bIns="0" rtlCol="0"/>
-          <a:lstStyle/>
-          <a:p>
-            <a:pPr indent="0" marL="0">
-              <a:buNone/>
-            </a:pPr>
-            <a:r>
-              <a:rPr lang="en-US" sz="1600" dirty="0">
-                <a:solidFill>
-                  <a:srgbClr val="14161B"/>
-                </a:solidFill>
-                <a:latin typeface="Trade Gothic Next" pitchFamily="34" charset="0"/>
-                <a:ea typeface="Trade Gothic Next" pitchFamily="34" charset="-122"/>
-                <a:cs typeface="Trade Gothic Next" pitchFamily="34" charset="-120"/>
-              </a:rPr>
-              <a:t>Holds at most 2 electrons.</a:t>
-            </a:r>
-            <a:endParaRPr lang="en-US" sz="1600" dirty="0"/>
-          </a:p>
-        </p:txBody>
-      </p:sp>
-      <p:sp>
-        <p:nvSpPr>
-          <p:cNvPr id="6" name="Text 6"/>
-          <p:cNvSpPr txBox="1"/>
-          <p:nvPr>
-            <p:ph idx="112" type="body" hasCustomPrompt="1"/>
-          </p:nvPr>
-        </p:nvSpPr>
-        <p:spPr>
-          <a:xfrm>
-            <a:off x="4498848" y="2953512"/>
-            <a:ext cx="2999232" cy="219456"/>
-          </a:xfrm>
-          <a:prstGeom prst="rect">
-            <a:avLst/>
-          </a:prstGeom>
-          <a:noFill/>
-          <a:ln/>
-        </p:spPr>
-        <p:txBody>
-          <a:bodyPr wrap="square" lIns="0" tIns="0" rIns="0" bIns="0" rtlCol="0"/>
-          <a:lstStyle/>
-          <a:p>
-            <a:pPr indent="0" marL="0">
-              <a:buNone/>
-            </a:pPr>
-            <a:r>
-              <a:rPr lang="en-US" sz="1200" b="1" spc="120" kern="0" dirty="0">
-                <a:solidFill>
-                  <a:srgbClr val="2E3338"/>
-                </a:solidFill>
-                <a:latin typeface="Trade Gothic Next" pitchFamily="34" charset="0"/>
-                <a:ea typeface="Trade Gothic Next" pitchFamily="34" charset="-122"/>
-                <a:cs typeface="Trade Gothic Next" pitchFamily="34" charset="-120"/>
-              </a:rPr>
-              <a:t>ONE SUBLEVEL</a:t>
-            </a:r>
-            <a:endParaRPr lang="en-US" sz="1200" dirty="0"/>
-          </a:p>
-        </p:txBody>
-      </p:sp>
-      <p:sp>
-        <p:nvSpPr>
-          <p:cNvPr id="7" name="Text 6"/>
-          <p:cNvSpPr txBox="1"/>
-          <p:nvPr>
-            <p:ph idx="113" type="body" hasCustomPrompt="1"/>
-          </p:nvPr>
-        </p:nvSpPr>
-        <p:spPr>
-          <a:xfrm>
-            <a:off x="4498848" y="3246120"/>
-            <a:ext cx="2999232" cy="1673352"/>
-          </a:xfrm>
-          <a:prstGeom prst="rect">
-            <a:avLst/>
-          </a:prstGeom>
-          <a:noFill/>
-          <a:ln/>
-        </p:spPr>
-        <p:txBody>
-          <a:bodyPr wrap="square" lIns="0" tIns="0" rIns="0" bIns="0" rtlCol="0"/>
-          <a:lstStyle/>
-          <a:p>
-            <a:pPr indent="0" marL="0">
-              <a:buNone/>
-            </a:pPr>
-            <a:r>
-              <a:rPr lang="en-US" sz="1600" dirty="0">
-                <a:solidFill>
-                  <a:srgbClr val="14161B"/>
-                </a:solidFill>
-                <a:latin typeface="Trade Gothic Next" pitchFamily="34" charset="0"/>
-                <a:ea typeface="Trade Gothic Next" pitchFamily="34" charset="-122"/>
-                <a:cs typeface="Trade Gothic Next" pitchFamily="34" charset="-120"/>
-              </a:rPr>
-              <a:t>s: 1 × 2 = 2</a:t>
-            </a:r>
-            <a:endParaRPr lang="en-US" sz="1600" dirty="0"/>
-          </a:p>
-          <a:p>
-            <a:pPr indent="0" marL="0">
-              <a:buNone/>
-            </a:pPr>
-            <a:r>
-              <a:rPr lang="en-US" sz="1600" dirty="0">
-                <a:solidFill>
-                  <a:srgbClr val="14161B"/>
-                </a:solidFill>
-                <a:latin typeface="Trade Gothic Next" pitchFamily="34" charset="0"/>
-                <a:ea typeface="Trade Gothic Next" pitchFamily="34" charset="-122"/>
-                <a:cs typeface="Trade Gothic Next" pitchFamily="34" charset="-120"/>
-              </a:rPr>
-              <a:t>p: 3 × 2 = 6</a:t>
-            </a:r>
-            <a:endParaRPr lang="en-US" sz="1600" dirty="0"/>
-          </a:p>
-          <a:p>
-            <a:pPr indent="0" marL="0">
-              <a:buNone/>
-            </a:pPr>
-            <a:r>
-              <a:rPr lang="en-US" sz="1600" dirty="0">
-                <a:solidFill>
-                  <a:srgbClr val="14161B"/>
-                </a:solidFill>
-                <a:latin typeface="Trade Gothic Next" pitchFamily="34" charset="0"/>
-                <a:ea typeface="Trade Gothic Next" pitchFamily="34" charset="-122"/>
-                <a:cs typeface="Trade Gothic Next" pitchFamily="34" charset="-120"/>
-              </a:rPr>
-              <a:t>d: 5 × 2 = 10</a:t>
-            </a:r>
-            <a:endParaRPr lang="en-US" sz="1600" dirty="0"/>
-          </a:p>
-          <a:p>
-            <a:pPr indent="0" marL="0">
-              <a:buNone/>
-            </a:pPr>
-            <a:r>
-              <a:rPr lang="en-US" sz="1600" dirty="0">
-                <a:solidFill>
-                  <a:srgbClr val="14161B"/>
-                </a:solidFill>
-                <a:latin typeface="Trade Gothic Next" pitchFamily="34" charset="0"/>
-                <a:ea typeface="Trade Gothic Next" pitchFamily="34" charset="-122"/>
-                <a:cs typeface="Trade Gothic Next" pitchFamily="34" charset="-120"/>
-              </a:rPr>
-              <a:t>f: 7 × 2 = 14</a:t>
-            </a:r>
-            <a:endParaRPr lang="en-US" sz="1600" dirty="0"/>
-          </a:p>
-        </p:txBody>
-      </p:sp>
-      <p:sp>
-        <p:nvSpPr>
-          <p:cNvPr id="8" name="Text 7"/>
-          <p:cNvSpPr txBox="1"/>
-          <p:nvPr>
-            <p:ph idx="115" type="body" hasCustomPrompt="1"/>
-          </p:nvPr>
-        </p:nvSpPr>
-        <p:spPr>
-          <a:xfrm>
-            <a:off x="8110728" y="2953512"/>
-            <a:ext cx="2999232" cy="219456"/>
-          </a:xfrm>
-          <a:prstGeom prst="rect">
-            <a:avLst/>
-          </a:prstGeom>
-          <a:noFill/>
-          <a:ln/>
-        </p:spPr>
-        <p:txBody>
-          <a:bodyPr wrap="square" lIns="0" tIns="0" rIns="0" bIns="0" rtlCol="0"/>
-          <a:lstStyle/>
-          <a:p>
-            <a:pPr indent="0" marL="0">
-              <a:buNone/>
-            </a:pPr>
-            <a:r>
-              <a:rPr lang="en-US" sz="1200" b="1" spc="120" kern="0" dirty="0">
-                <a:solidFill>
-                  <a:srgbClr val="2E3338"/>
-                </a:solidFill>
-                <a:latin typeface="Trade Gothic Next" pitchFamily="34" charset="0"/>
-                <a:ea typeface="Trade Gothic Next" pitchFamily="34" charset="-122"/>
-                <a:cs typeface="Trade Gothic Next" pitchFamily="34" charset="-120"/>
-              </a:rPr>
-              <a:t>OPPOSITE SPINS</a:t>
-            </a:r>
-            <a:endParaRPr lang="en-US" sz="1200" dirty="0"/>
-          </a:p>
-        </p:txBody>
-      </p:sp>
-      <p:sp>
-        <p:nvSpPr>
-          <p:cNvPr id="9" name="Text 7"/>
-          <p:cNvSpPr txBox="1"/>
-          <p:nvPr>
-            <p:ph idx="116" type="body" hasCustomPrompt="1"/>
-          </p:nvPr>
-        </p:nvSpPr>
-        <p:spPr>
-          <a:xfrm>
-            <a:off x="8110728" y="3246120"/>
-            <a:ext cx="2999232" cy="1673352"/>
-          </a:xfrm>
-          <a:prstGeom prst="rect">
-            <a:avLst/>
-          </a:prstGeom>
-          <a:noFill/>
-          <a:ln/>
-        </p:spPr>
-        <p:txBody>
-          <a:bodyPr wrap="square" lIns="0" tIns="0" rIns="0" bIns="0" rtlCol="0"/>
-          <a:lstStyle/>
-          <a:p>
-            <a:pPr indent="0" marL="0">
-              <a:buNone/>
-            </a:pPr>
-            <a:r>
-              <a:rPr lang="en-US" sz="1600" dirty="0">
-                <a:solidFill>
-                  <a:srgbClr val="14161B"/>
-                </a:solidFill>
-                <a:latin typeface="Trade Gothic Next" pitchFamily="34" charset="0"/>
-                <a:ea typeface="Trade Gothic Next" pitchFamily="34" charset="-122"/>
-                <a:cs typeface="Trade Gothic Next" pitchFamily="34" charset="-120"/>
-              </a:rPr>
-              <a:t>The 2 electrons in one orbital have opposite spins. Section 2.3 puts this to work.</a:t>
-            </a:r>
-            <a:endParaRPr lang="en-US" sz="1600" dirty="0"/>
-          </a:p>
-        </p:txBody>
-      </p:sp>
-      <p:sp>
-        <p:nvSpPr>
-          <p:cNvPr id="10" name="Text 9"/>
-          <p:cNvSpPr txBox="1"/>
-          <p:nvPr>
-            <p:ph idx="119" type="body" hasCustomPrompt="1"/>
-          </p:nvPr>
-        </p:nvSpPr>
-        <p:spPr>
-          <a:xfrm>
-            <a:off x="2240280" y="5486400"/>
-            <a:ext cx="8991295" cy="402336"/>
-          </a:xfrm>
-          <a:prstGeom prst="rect">
-            <a:avLst/>
-          </a:prstGeom>
-          <a:noFill/>
-          <a:ln/>
-        </p:spPr>
-        <p:txBody>
-          <a:bodyPr wrap="square" lIns="0" tIns="0" rIns="0" bIns="0" rtlCol="0" anchor="ctr"/>
-          <a:lstStyle/>
-          <a:p>
-            <a:pPr indent="0" marL="0">
-              <a:buNone/>
-            </a:pPr>
-            <a:r>
-              <a:rPr lang="en-US" sz="1600" b="1" dirty="0">
-                <a:solidFill>
-                  <a:srgbClr val="EDF0E5"/>
-                </a:solidFill>
-                <a:latin typeface="Trade Gothic Next" pitchFamily="34" charset="0"/>
-                <a:ea typeface="Trade Gothic Next" pitchFamily="34" charset="-122"/>
-                <a:cs typeface="Trade Gothic Next" pitchFamily="34" charset="-120"/>
-              </a:rPr>
-              <a:t>One orbital holds 2 electrons. s holds 2, p holds 6, d holds 10, f holds 14.</a:t>
-            </a:r>
-            <a:endParaRPr lang="en-US" sz="1600" dirty="0"/>
-          </a:p>
-        </p:txBody>
-      </p:sp>
-      <p:sp>
-        <p:nvSpPr>
-          <p:cNvPr id="11" name="Text 1"/>
-          <p:cNvSpPr txBox="1"/>
-          <p:nvPr>
-            <p:ph idx="101" type="body" hasCustomPrompt="1"/>
-          </p:nvPr>
-        </p:nvSpPr>
-        <p:spPr>
-          <a:xfrm>
-            <a:off x="685800" y="384048"/>
-            <a:ext cx="6400800" cy="237744"/>
-          </a:xfrm>
-          <a:prstGeom prst="rect">
-            <a:avLst/>
-          </a:prstGeom>
-          <a:noFill/>
-          <a:ln/>
-        </p:spPr>
-        <p:txBody>
-          <a:bodyPr wrap="square" lIns="0" tIns="0" rIns="0" bIns="0" rtlCol="0" anchor="ctr"/>
-          <a:lstStyle/>
-          <a:p>
-            <a:pPr indent="0" marL="0">
-              <a:buNone/>
-            </a:pPr>
-            <a:r>
-              <a:rPr lang="en-US" sz="1100" b="1" spc="160" kern="0" dirty="0">
-                <a:solidFill>
-                  <a:srgbClr val="14161B"/>
-                </a:solidFill>
-                <a:latin typeface="Trade Gothic Next" pitchFamily="34" charset="0"/>
-                <a:ea typeface="Trade Gothic Next" pitchFamily="34" charset="-122"/>
-                <a:cs typeface="Trade Gothic Next" pitchFamily="34" charset="-120"/>
-              </a:rPr>
-              <a:t>UNIT 02  •  CHEMISTRY</a:t>
-            </a:r>
-            <a:endParaRPr lang="en-US" sz="1100" dirty="0"/>
-          </a:p>
-        </p:txBody>
-      </p:sp>
-      <p:sp>
-        <p:nvSpPr>
-          <p:cNvPr id="12" name="Text 10"/>
-          <p:cNvSpPr txBox="1"/>
-          <p:nvPr>
-            <p:ph idx="121" type="body" hasCustomPrompt="1"/>
-          </p:nvPr>
-        </p:nvSpPr>
-        <p:spPr>
-          <a:xfrm>
-            <a:off x="8762695" y="6382512"/>
-            <a:ext cx="2743200" cy="237744"/>
-          </a:xfrm>
-          <a:prstGeom prst="rect">
-            <a:avLst/>
-          </a:prstGeom>
-          <a:noFill/>
-          <a:ln/>
-        </p:spPr>
-        <p:txBody>
-          <a:bodyPr wrap="square" lIns="0" tIns="0" rIns="0" bIns="0" rtlCol="0" anchor="ctr"/>
-          <a:lstStyle/>
-          <a:p>
-            <a:pPr algn="r" indent="0" marL="0">
-              <a:buNone/>
-            </a:pPr>
-            <a:r>
-              <a:rPr lang="en-US" sz="1000" b="1" spc="140" kern="0" dirty="0">
-                <a:solidFill>
-                  <a:srgbClr val="2E3338"/>
-                </a:solidFill>
-                <a:latin typeface="Trade Gothic Next" pitchFamily="34" charset="0"/>
-                <a:ea typeface="Trade Gothic Next" pitchFamily="34" charset="-122"/>
-                <a:cs typeface="Trade Gothic Next" pitchFamily="34" charset="-120"/>
-              </a:rPr>
-              <a:t>U02 • S02.2</a:t>
-            </a:r>
-            <a:endParaRPr lang="en-US" sz="1000" dirty="0"/>
-          </a:p>
-        </p:txBody>
-      </p:sp>
-      <p:sp>
-        <p:nvSpPr>
-          <p:cNvPr id="13" name="Text 4"/>
-          <p:cNvSpPr txBox="1"/>
-          <p:nvPr>
-            <p:ph idx="107" hasCustomPrompt="1"/>
-          </p:nvPr>
-        </p:nvSpPr>
-        <p:spPr>
-          <a:xfrm>
-            <a:off x="8641080" y="1088136"/>
-            <a:ext cx="2633472" cy="1481328"/>
-          </a:xfrm>
-          <a:prstGeom prst="rect">
-            <a:avLst/>
-          </a:prstGeom>
-          <a:noFill/>
-          <a:ln/>
-        </p:spPr>
-        <p:txBody>
-          <a:bodyPr wrap="square" lIns="0" tIns="0" rIns="0" bIns="0" rtlCol="0" anchor="ctr"/>
-          <a:lstStyle/>
-          <a:p>
-            <a:pPr algn="ctr" indent="0" marL="0">
-              <a:buNone/>
-            </a:pPr>
-            <a:endParaRPr lang="en-US" sz="1200" dirty="0"/>
           </a:p>
         </p:txBody>
       </p:sp>

--- a/deliverables/chem-u02/SHULL_CHEM_Slides_U02_S02.2.pptx
+++ b/deliverables/chem-u02/SHULL_CHEM_Slides_U02_S02.2.pptx
@@ -17948,24 +17948,7 @@
                 <a:ea typeface="Trade Gothic Next" pitchFamily="34" charset="-122"/>
                 <a:cs typeface="Trade Gothic Next" pitchFamily="34" charset="-120"/>
               </a:rPr>
-              <a:t>d: groups 3 to 12, 10 wide.</a:t>
-            </a:r>
-            <a:endParaRPr lang="en-US" sz="1600" dirty="0"/>
-          </a:p>
-          <a:p>
-            <a:pPr indent="0" marL="0">
-              <a:buNone/>
-            </a:pPr>
-            <a:r>
-              <a:rPr lang="en-US" sz="1600" dirty="0">
-                <a:solidFill>
-                  <a:srgbClr val="14161B"/>
-                </a:solidFill>
-                <a:latin typeface="Trade Gothic Next" pitchFamily="34" charset="0"/>
-                <a:ea typeface="Trade Gothic Next" pitchFamily="34" charset="-122"/>
-                <a:cs typeface="Trade Gothic Next" pitchFamily="34" charset="-120"/>
-              </a:rPr>
-              <a:t>f: 14 wide, drawn below the table.</a:t>
+              <a:t>d: groups 3 to 12. f: drawn below, 14 wide.</a:t>
             </a:r>
             <a:endParaRPr lang="en-US" sz="1600" dirty="0"/>
           </a:p>
@@ -23008,7 +22991,7 @@
                 <a:ea typeface="Trade Gothic Next" pitchFamily="34" charset="-122"/>
                 <a:cs typeface="Trade Gothic Next" pitchFamily="34" charset="-120"/>
               </a:rPr>
-              <a:t>d: five orbitals, mostly four lobes. f: more complex.</a:t>
+              <a:t>d starts at n = 3. f starts at n = 4.</a:t>
             </a:r>
             <a:endParaRPr lang="en-US" sz="1600" dirty="0"/>
           </a:p>
@@ -23497,7 +23480,7 @@
                 <a:ea typeface="Trade Gothic Next" pitchFamily="34" charset="-122"/>
                 <a:cs typeface="Trade Gothic Next" pitchFamily="34" charset="-120"/>
               </a:rPr>
-              <a:t>d: mostly four lobes. f: more complex.</a:t>
+              <a:t>d: five orbitals, mostly four lobes. f: more complex.</a:t>
             </a:r>
             <a:endParaRPr lang="en-US" sz="1600" dirty="0"/>
           </a:p>
